--- a/presentation/presentacion_boxplots_modernos.pptx
+++ b/presentation/presentacion_boxplots_modernos.pptx
@@ -18,7 +18,6 @@
     <p:sldId id="266" r:id="rId17"/>
     <p:sldId id="267" r:id="rId18"/>
     <p:sldId id="268" r:id="rId19"/>
-    <p:sldId id="269" r:id="rId20"/>
   </p:sldIdLst>
   <p:sldSz cx="12191695" cy="6858000" type="screen4x3"/>
   <p:notesSz cx="6858000" cy="9144000"/>
@@ -3109,33 +3108,49 @@
         </p:nvSpPr>
         <p:spPr>
           <a:xfrm>
-            <a:off x="822960" y="2103120"/>
-            <a:ext cx="10515600" cy="1463040"/>
-          </a:xfrm>
-          <a:prstGeom prst="rect">
-            <a:avLst/>
-          </a:prstGeom>
-          <a:noFill/>
-        </p:spPr>
-        <p:txBody>
-          <a:bodyPr wrap="none">
-            <a:spAutoFit/>
-          </a:bodyPr>
-          <a:lstStyle/>
-          <a:p>
-            <a:pPr algn="l">
-              <a:spcAft>
-                <a:spcPts val="600"/>
-              </a:spcAft>
-            </a:pPr>
-            <a:r>
-              <a:rPr sz="4000" b="1">
-                <a:solidFill>
-                  <a:srgbClr val="1F3A5F"/>
-                </a:solidFill>
-                <a:latin typeface="Calibri"/>
-              </a:rPr>
-              <a:t>Cinco variaciones modernas del diagrama de caja y bigotes</a:t>
+            <a:off x="731520" y="1051560"/>
+            <a:ext cx="10789920" cy="1005840"/>
+          </a:xfrm>
+          <a:prstGeom prst="rect">
+            <a:avLst/>
+          </a:prstGeom>
+          <a:noFill/>
+        </p:spPr>
+        <p:txBody>
+          <a:bodyPr wrap="square" anchor="t">
+            <a:spAutoFit/>
+          </a:bodyPr>
+          <a:lstStyle/>
+          <a:p>
+            <a:pPr algn="l">
+              <a:spcAft>
+                <a:spcPts val="400"/>
+              </a:spcAft>
+            </a:pPr>
+            <a:r>
+              <a:rPr sz="3100" b="1">
+                <a:solidFill>
+                  <a:srgbClr val="0B5394"/>
+                </a:solidFill>
+                <a:latin typeface="Aptos"/>
+              </a:rPr>
+              <a:t>Cinco variaciones modernas</a:t>
+            </a:r>
+          </a:p>
+          <a:p>
+            <a:pPr algn="l">
+              <a:spcAft>
+                <a:spcPts val="400"/>
+              </a:spcAft>
+            </a:pPr>
+            <a:r>
+              <a:rPr sz="3100" b="1">
+                <a:solidFill>
+                  <a:srgbClr val="0B5394"/>
+                </a:solidFill>
+                <a:latin typeface="Aptos"/>
+              </a:rPr>
+              <a:t>del diagrama de caja y bigotes</a:t>
             </a:r>
           </a:p>
         </p:txBody>
@@ -3148,88 +3163,229 @@
         </p:nvSpPr>
         <p:spPr>
           <a:xfrm>
-            <a:off x="822960" y="3566160"/>
-            <a:ext cx="10515600" cy="1097280"/>
-          </a:xfrm>
-          <a:prstGeom prst="rect">
-            <a:avLst/>
-          </a:prstGeom>
-          <a:noFill/>
-        </p:spPr>
-        <p:txBody>
-          <a:bodyPr wrap="none">
-            <a:spAutoFit/>
-          </a:bodyPr>
-          <a:lstStyle/>
-          <a:p>
-            <a:pPr algn="l">
-              <a:spcAft>
-                <a:spcPts val="600"/>
+            <a:off x="777240" y="2423160"/>
+            <a:ext cx="9875520" cy="502920"/>
+          </a:xfrm>
+          <a:prstGeom prst="rect">
+            <a:avLst/>
+          </a:prstGeom>
+          <a:noFill/>
+        </p:spPr>
+        <p:txBody>
+          <a:bodyPr wrap="square" anchor="t">
+            <a:spAutoFit/>
+          </a:bodyPr>
+          <a:lstStyle/>
+          <a:p>
+            <a:pPr algn="l">
+              <a:spcAft>
+                <a:spcPts val="400"/>
+              </a:spcAft>
+            </a:pPr>
+            <a:r>
+              <a:rPr sz="1700" b="0">
+                <a:solidFill>
+                  <a:srgbClr val="202124"/>
+                </a:solidFill>
+                <a:latin typeface="Aptos"/>
+              </a:rPr>
+              <a:t>Actividad de Técnicas de Validación y Simulación · Universidad Cooperativa de Colombia, campus Cali</a:t>
+            </a:r>
+          </a:p>
+        </p:txBody>
+      </p:sp>
+      <p:sp>
+        <p:nvSpPr>
+          <p:cNvPr id="4" name="TextBox 3"/>
+          <p:cNvSpPr txBox="1"/>
+          <p:nvPr/>
+        </p:nvSpPr>
+        <p:spPr>
+          <a:xfrm>
+            <a:off x="777240" y="3063240"/>
+            <a:ext cx="8961120" cy="411480"/>
+          </a:xfrm>
+          <a:prstGeom prst="rect">
+            <a:avLst/>
+          </a:prstGeom>
+          <a:noFill/>
+        </p:spPr>
+        <p:txBody>
+          <a:bodyPr wrap="square" anchor="t">
+            <a:spAutoFit/>
+          </a:bodyPr>
+          <a:lstStyle/>
+          <a:p>
+            <a:pPr algn="l">
+              <a:spcAft>
+                <a:spcPts val="400"/>
+              </a:spcAft>
+            </a:pPr>
+            <a:r>
+              <a:rPr sz="1800" b="0">
+                <a:solidFill>
+                  <a:srgbClr val="B03A2B"/>
+                </a:solidFill>
+                <a:latin typeface="Aptos"/>
+              </a:rPr>
+              <a:t>Datos reales: rendimiento agrícola municipal EVA 2019–2025 (UPRA)</a:t>
+            </a:r>
+          </a:p>
+        </p:txBody>
+      </p:sp>
+      <p:sp>
+        <p:nvSpPr>
+          <p:cNvPr id="5" name="TextBox 4"/>
+          <p:cNvSpPr txBox="1"/>
+          <p:nvPr/>
+        </p:nvSpPr>
+        <p:spPr>
+          <a:xfrm>
+            <a:off x="777240" y="4846320"/>
+            <a:ext cx="10607040" cy="640080"/>
+          </a:xfrm>
+          <a:prstGeom prst="rect">
+            <a:avLst/>
+          </a:prstGeom>
+          <a:noFill/>
+        </p:spPr>
+        <p:txBody>
+          <a:bodyPr wrap="square" anchor="t">
+            <a:spAutoFit/>
+          </a:bodyPr>
+          <a:lstStyle/>
+          <a:p>
+            <a:pPr algn="l">
+              <a:spcAft>
+                <a:spcPts val="400"/>
               </a:spcAft>
             </a:pPr>
             <a:r>
               <a:rPr sz="2000" b="0">
                 <a:solidFill>
-                  <a:srgbClr val="333333"/>
-                </a:solidFill>
-                <a:latin typeface="Calibri"/>
-              </a:rPr>
-              <a:t>Rendimiento agricola municipal - EVA 2019-2025 (UPRA)</a:t>
-            </a:r>
-          </a:p>
-          <a:p>
-            <a:pPr algn="l">
-              <a:spcAft>
-                <a:spcPts val="600"/>
-              </a:spcAft>
-            </a:pPr>
-            <a:r>
-              <a:rPr sz="1800" b="0">
-                <a:solidFill>
-                  <a:srgbClr val="B03A2B"/>
-                </a:solidFill>
-                <a:latin typeface="Calibri"/>
-              </a:rPr>
-              <a:t>Que revela cada grafico que el boxplot esconde</a:t>
-            </a:r>
-          </a:p>
-        </p:txBody>
-      </p:sp>
-      <p:sp>
-        <p:nvSpPr>
-          <p:cNvPr id="4" name="TextBox 3"/>
-          <p:cNvSpPr txBox="1"/>
-          <p:nvPr/>
-        </p:nvSpPr>
-        <p:spPr>
-          <a:xfrm>
-            <a:off x="822960" y="5852160"/>
-            <a:ext cx="10515600" cy="457200"/>
-          </a:xfrm>
-          <a:prstGeom prst="rect">
-            <a:avLst/>
-          </a:prstGeom>
-          <a:noFill/>
-        </p:spPr>
-        <p:txBody>
-          <a:bodyPr wrap="none">
-            <a:spAutoFit/>
-          </a:bodyPr>
-          <a:lstStyle/>
-          <a:p>
-            <a:pPr algn="l">
-              <a:spcAft>
-                <a:spcPts val="600"/>
-              </a:spcAft>
-            </a:pPr>
-            <a:r>
-              <a:rPr sz="1200" b="0">
-                <a:solidFill>
-                  <a:srgbClr val="666666"/>
-                </a:solidFill>
-                <a:latin typeface="Calibri"/>
-              </a:rPr>
-              <a:t>Fuente: EVA 2019-2025 (UPRA) - datos.gov.co/d/uejq-wxrr</a:t>
+                  <a:srgbClr val="202124"/>
+                </a:solidFill>
+                <a:latin typeface="Aptos"/>
+              </a:rPr>
+              <a:t>Pregunta conductora: ¿qué revela cada gráfico que el boxplot tradicional esconde?</a:t>
+            </a:r>
+          </a:p>
+        </p:txBody>
+      </p:sp>
+      <p:sp>
+        <p:nvSpPr>
+          <p:cNvPr id="6" name="TextBox 5"/>
+          <p:cNvSpPr txBox="1"/>
+          <p:nvPr/>
+        </p:nvSpPr>
+        <p:spPr>
+          <a:xfrm>
+            <a:off x="594360" y="6492240"/>
+            <a:ext cx="7315200" cy="201168"/>
+          </a:xfrm>
+          <a:prstGeom prst="rect">
+            <a:avLst/>
+          </a:prstGeom>
+          <a:noFill/>
+        </p:spPr>
+        <p:txBody>
+          <a:bodyPr wrap="square" anchor="t">
+            <a:spAutoFit/>
+          </a:bodyPr>
+          <a:lstStyle/>
+          <a:p>
+            <a:pPr algn="l">
+              <a:spcAft>
+                <a:spcPts val="400"/>
+              </a:spcAft>
+            </a:pPr>
+            <a:r>
+              <a:rPr sz="900" b="0">
+                <a:solidFill>
+                  <a:srgbClr val="5A5A5A"/>
+                </a:solidFill>
+                <a:latin typeface="Aptos"/>
+              </a:rPr>
+              <a:t>Fuente: EVA 2019–2025 (UPRA) · datos.gov.co</a:t>
+            </a:r>
+          </a:p>
+        </p:txBody>
+      </p:sp>
+      <p:sp>
+        <p:nvSpPr>
+          <p:cNvPr id="7" name="TextBox 6"/>
+          <p:cNvSpPr txBox="1"/>
+          <p:nvPr/>
+        </p:nvSpPr>
+        <p:spPr>
+          <a:xfrm>
+            <a:off x="7955279" y="6492240"/>
+            <a:ext cx="3383280" cy="201168"/>
+          </a:xfrm>
+          <a:prstGeom prst="rect">
+            <a:avLst/>
+          </a:prstGeom>
+          <a:noFill/>
+        </p:spPr>
+        <p:txBody>
+          <a:bodyPr wrap="square" anchor="t">
+            <a:spAutoFit/>
+          </a:bodyPr>
+          <a:lstStyle/>
+          <a:p>
+            <a:pPr algn="r">
+              <a:spcAft>
+                <a:spcPts val="400"/>
+              </a:spcAft>
+            </a:pPr>
+            <a:r>
+              <a:rPr sz="900" b="0">
+                <a:solidFill>
+                  <a:srgbClr val="0B5394"/>
+                </a:solidFill>
+                <a:latin typeface="Aptos"/>
+                <a:hlinkClick r:id="rId2"/>
+              </a:rPr>
+              <a:t>https://www.datos.gov.co/d/uejq-wxrr</a:t>
+            </a:r>
+          </a:p>
+        </p:txBody>
+      </p:sp>
+      <p:sp>
+        <p:nvSpPr>
+          <p:cNvPr id="8" name="TextBox 7"/>
+          <p:cNvSpPr txBox="1"/>
+          <p:nvPr/>
+        </p:nvSpPr>
+        <p:spPr>
+          <a:xfrm>
+            <a:off x="11384280" y="6492240"/>
+            <a:ext cx="228600" cy="201168"/>
+          </a:xfrm>
+          <a:prstGeom prst="rect">
+            <a:avLst/>
+          </a:prstGeom>
+          <a:noFill/>
+        </p:spPr>
+        <p:txBody>
+          <a:bodyPr wrap="square" anchor="t">
+            <a:spAutoFit/>
+          </a:bodyPr>
+          <a:lstStyle/>
+          <a:p>
+            <a:pPr algn="r">
+              <a:spcAft>
+                <a:spcPts val="400"/>
+              </a:spcAft>
+            </a:pPr>
+            <a:r>
+              <a:rPr sz="900" b="0">
+                <a:solidFill>
+                  <a:srgbClr val="5A5A5A"/>
+                </a:solidFill>
+                <a:latin typeface="Aptos"/>
+              </a:rPr>
+              <a:t>1</a:t>
             </a:r>
           </a:p>
         </p:txBody>
@@ -3260,33 +3416,33 @@
         </p:nvSpPr>
         <p:spPr>
           <a:xfrm>
-            <a:off x="548640" y="292608"/>
-            <a:ext cx="11064240" cy="365760"/>
-          </a:xfrm>
-          <a:prstGeom prst="rect">
-            <a:avLst/>
-          </a:prstGeom>
-          <a:noFill/>
-        </p:spPr>
-        <p:txBody>
-          <a:bodyPr wrap="none">
-            <a:spAutoFit/>
-          </a:bodyPr>
-          <a:lstStyle/>
-          <a:p>
-            <a:pPr algn="l">
-              <a:spcAft>
-                <a:spcPts val="600"/>
-              </a:spcAft>
-            </a:pPr>
-            <a:r>
-              <a:rPr sz="1300" b="1">
-                <a:solidFill>
-                  <a:srgbClr val="B03A2B"/>
-                </a:solidFill>
-                <a:latin typeface="Calibri"/>
-              </a:rPr>
-              <a:t>HALLAZGO 5 / COMPOSITE</a:t>
+            <a:off x="594360" y="292608"/>
+            <a:ext cx="10972800" cy="502920"/>
+          </a:xfrm>
+          <a:prstGeom prst="rect">
+            <a:avLst/>
+          </a:prstGeom>
+          <a:noFill/>
+        </p:spPr>
+        <p:txBody>
+          <a:bodyPr wrap="square" anchor="t">
+            <a:spAutoFit/>
+          </a:bodyPr>
+          <a:lstStyle/>
+          <a:p>
+            <a:pPr algn="l">
+              <a:spcAft>
+                <a:spcPts val="400"/>
+              </a:spcAft>
+            </a:pPr>
+            <a:r>
+              <a:rPr sz="2500" b="1">
+                <a:solidFill>
+                  <a:srgbClr val="0B5394"/>
+                </a:solidFill>
+                <a:latin typeface="Aptos"/>
+              </a:rPr>
+              <a:t>Boxenplot · top 5 de cultivos</a:t>
             </a:r>
           </a:p>
         </p:txBody>
@@ -3299,79 +3455,40 @@
         </p:nvSpPr>
         <p:spPr>
           <a:xfrm>
-            <a:off x="548640" y="566928"/>
-            <a:ext cx="11064240" cy="731520"/>
-          </a:xfrm>
-          <a:prstGeom prst="rect">
-            <a:avLst/>
-          </a:prstGeom>
-          <a:noFill/>
-        </p:spPr>
-        <p:txBody>
-          <a:bodyPr wrap="none">
-            <a:spAutoFit/>
-          </a:bodyPr>
-          <a:lstStyle/>
-          <a:p>
-            <a:pPr algn="l">
-              <a:spcAft>
-                <a:spcPts val="600"/>
-              </a:spcAft>
-            </a:pPr>
-            <a:r>
-              <a:rPr sz="2800" b="1">
-                <a:solidFill>
-                  <a:srgbClr val="1F3A5F"/>
-                </a:solidFill>
-                <a:latin typeface="Calibri"/>
-              </a:rPr>
-              <a:t>Figura 5 - Cafe por departamento</a:t>
-            </a:r>
-          </a:p>
-        </p:txBody>
-      </p:sp>
-      <p:sp>
-        <p:nvSpPr>
-          <p:cNvPr id="4" name="TextBox 3"/>
-          <p:cNvSpPr txBox="1"/>
-          <p:nvPr/>
-        </p:nvSpPr>
-        <p:spPr>
-          <a:xfrm>
-            <a:off x="548640" y="1225296"/>
-            <a:ext cx="11064240" cy="91440"/>
-          </a:xfrm>
-          <a:prstGeom prst="rect">
-            <a:avLst/>
-          </a:prstGeom>
-          <a:noFill/>
-        </p:spPr>
-        <p:txBody>
-          <a:bodyPr wrap="none">
-            <a:spAutoFit/>
-          </a:bodyPr>
-          <a:lstStyle/>
-          <a:p>
-            <a:pPr algn="l">
-              <a:spcAft>
-                <a:spcPts val="600"/>
-              </a:spcAft>
-            </a:pPr>
-            <a:r>
-              <a:rPr sz="200" b="0">
-                <a:solidFill>
-                  <a:srgbClr val="B03A2B"/>
-                </a:solidFill>
-                <a:latin typeface="Calibri"/>
-              </a:rPr>
-              <a:t> </a:t>
+            <a:off x="621792" y="822960"/>
+            <a:ext cx="10972800" cy="274320"/>
+          </a:xfrm>
+          <a:prstGeom prst="rect">
+            <a:avLst/>
+          </a:prstGeom>
+          <a:noFill/>
+        </p:spPr>
+        <p:txBody>
+          <a:bodyPr wrap="square" anchor="t">
+            <a:spAutoFit/>
+          </a:bodyPr>
+          <a:lstStyle/>
+          <a:p>
+            <a:pPr algn="l">
+              <a:spcAft>
+                <a:spcPts val="400"/>
+              </a:spcAft>
+            </a:pPr>
+            <a:r>
+              <a:rPr sz="1100" b="0">
+                <a:solidFill>
+                  <a:srgbClr val="5A5A5A"/>
+                </a:solidFill>
+                <a:latin typeface="Aptos"/>
+              </a:rPr>
+              <a:t>Captura de la visualización Plotly generada con datos reales EVA</a:t>
             </a:r>
           </a:p>
         </p:txBody>
       </p:sp>
       <p:pic>
         <p:nvPicPr>
-          <p:cNvPr id="5" name="Picture 4" descr="fig5_composite_cafe.png"/>
+          <p:cNvPr id="4" name="Picture 3" descr="fig4_boxenplot_top5.png"/>
           <p:cNvPicPr>
             <a:picLocks noChangeAspect="1"/>
           </p:cNvPicPr>
@@ -3385,8 +3502,8 @@
         </p:blipFill>
         <p:spPr>
           <a:xfrm>
-            <a:off x="548640" y="1417320"/>
-            <a:ext cx="11064240" cy="4996754"/>
+            <a:off x="457200" y="1097280"/>
+            <a:ext cx="11274552" cy="4434840"/>
           </a:xfrm>
           <a:prstGeom prst="rect">
             <a:avLst/>
@@ -3395,39 +3512,78 @@
       </p:pic>
       <p:sp>
         <p:nvSpPr>
+          <p:cNvPr id="5" name="TextBox 4"/>
+          <p:cNvSpPr txBox="1"/>
+          <p:nvPr/>
+        </p:nvSpPr>
+        <p:spPr>
+          <a:xfrm>
+            <a:off x="640080" y="5559552"/>
+            <a:ext cx="10927080" cy="566928"/>
+          </a:xfrm>
+          <a:prstGeom prst="rect">
+            <a:avLst/>
+          </a:prstGeom>
+          <a:noFill/>
+        </p:spPr>
+        <p:txBody>
+          <a:bodyPr wrap="square" anchor="t">
+            <a:spAutoFit/>
+          </a:bodyPr>
+          <a:lstStyle/>
+          <a:p>
+            <a:pPr algn="l">
+              <a:spcAft>
+                <a:spcPts val="400"/>
+              </a:spcAft>
+            </a:pPr>
+            <a:r>
+              <a:rPr sz="1100" b="0">
+                <a:solidFill>
+                  <a:srgbClr val="202124"/>
+                </a:solidFill>
+                <a:latin typeface="Aptos"/>
+              </a:rPr>
+              <a:t>Todas las medianas relativas valen 1, pero las colas no: tomate tiene p99 = 4,8× y maíz 4,4×; yuca presenta la cola alta más corta, p99 = 2,5×. La escala logarítmica permite comparar esas razones.</a:t>
+            </a:r>
+          </a:p>
+        </p:txBody>
+      </p:sp>
+      <p:sp>
+        <p:nvSpPr>
           <p:cNvPr id="6" name="TextBox 5"/>
           <p:cNvSpPr txBox="1"/>
           <p:nvPr/>
         </p:nvSpPr>
         <p:spPr>
           <a:xfrm>
-            <a:off x="548640" y="5806440"/>
-            <a:ext cx="11064240" cy="640080"/>
-          </a:xfrm>
-          <a:prstGeom prst="rect">
-            <a:avLst/>
-          </a:prstGeom>
-          <a:noFill/>
-        </p:spPr>
-        <p:txBody>
-          <a:bodyPr wrap="none">
-            <a:spAutoFit/>
-          </a:bodyPr>
-          <a:lstStyle/>
-          <a:p>
-            <a:pPr algn="l">
-              <a:spcAft>
-                <a:spcPts val="600"/>
-              </a:spcAft>
-            </a:pPr>
-            <a:r>
-              <a:rPr sz="1500" b="1">
-                <a:solidFill>
-                  <a:srgbClr val="333333"/>
-                </a:solidFill>
-                <a:latin typeface="Calibri"/>
-              </a:rPr>
-              <a:t>La media cae por debajo de la mediana en los 6 departamentos (cola baja), lo contrario de los cultivos anteriores.</a:t>
+            <a:off x="640080" y="6144768"/>
+            <a:ext cx="10927080" cy="201168"/>
+          </a:xfrm>
+          <a:prstGeom prst="rect">
+            <a:avLst/>
+          </a:prstGeom>
+          <a:noFill/>
+        </p:spPr>
+        <p:txBody>
+          <a:bodyPr wrap="square" anchor="t">
+            <a:spAutoFit/>
+          </a:bodyPr>
+          <a:lstStyle/>
+          <a:p>
+            <a:pPr algn="ctr">
+              <a:spcAft>
+                <a:spcPts val="400"/>
+              </a:spcAft>
+            </a:pPr>
+            <a:r>
+              <a:rPr sz="900" b="0">
+                <a:solidFill>
+                  <a:srgbClr val="5A5A5A"/>
+                </a:solidFill>
+                <a:latin typeface="Aptos"/>
+              </a:rPr>
+              <a:t>Demostración: fig4_boxenplot_top5.html · hover de cuantiles y muestra de registros.</a:t>
             </a:r>
           </a:p>
         </p:txBody>
@@ -3440,33 +3596,112 @@
         </p:nvSpPr>
         <p:spPr>
           <a:xfrm>
-            <a:off x="548640" y="6419088"/>
-            <a:ext cx="11064240" cy="365760"/>
-          </a:xfrm>
-          <a:prstGeom prst="rect">
-            <a:avLst/>
-          </a:prstGeom>
-          <a:noFill/>
-        </p:spPr>
-        <p:txBody>
-          <a:bodyPr wrap="none">
-            <a:spAutoFit/>
-          </a:bodyPr>
-          <a:lstStyle/>
-          <a:p>
-            <a:pPr algn="l">
-              <a:spcAft>
-                <a:spcPts val="600"/>
-              </a:spcAft>
-            </a:pPr>
-            <a:r>
-              <a:rPr sz="1000" b="0">
-                <a:solidFill>
-                  <a:srgbClr val="666666"/>
-                </a:solidFill>
-                <a:latin typeface="Calibri"/>
-              </a:rPr>
-              <a:t>Fuente: EVA 2019-2025 (UPRA) - datos.gov.co/d/uejq-wxrr</a:t>
+            <a:off x="594360" y="6492240"/>
+            <a:ext cx="7315200" cy="201168"/>
+          </a:xfrm>
+          <a:prstGeom prst="rect">
+            <a:avLst/>
+          </a:prstGeom>
+          <a:noFill/>
+        </p:spPr>
+        <p:txBody>
+          <a:bodyPr wrap="square" anchor="t">
+            <a:spAutoFit/>
+          </a:bodyPr>
+          <a:lstStyle/>
+          <a:p>
+            <a:pPr algn="l">
+              <a:spcAft>
+                <a:spcPts val="400"/>
+              </a:spcAft>
+            </a:pPr>
+            <a:r>
+              <a:rPr sz="900" b="0">
+                <a:solidFill>
+                  <a:srgbClr val="5A5A5A"/>
+                </a:solidFill>
+                <a:latin typeface="Aptos"/>
+              </a:rPr>
+              <a:t>Fuente: EVA 2019–2025 (UPRA) · datos.gov.co</a:t>
+            </a:r>
+          </a:p>
+        </p:txBody>
+      </p:sp>
+      <p:sp>
+        <p:nvSpPr>
+          <p:cNvPr id="8" name="TextBox 7"/>
+          <p:cNvSpPr txBox="1"/>
+          <p:nvPr/>
+        </p:nvSpPr>
+        <p:spPr>
+          <a:xfrm>
+            <a:off x="7955279" y="6492240"/>
+            <a:ext cx="3383280" cy="201168"/>
+          </a:xfrm>
+          <a:prstGeom prst="rect">
+            <a:avLst/>
+          </a:prstGeom>
+          <a:noFill/>
+        </p:spPr>
+        <p:txBody>
+          <a:bodyPr wrap="square" anchor="t">
+            <a:spAutoFit/>
+          </a:bodyPr>
+          <a:lstStyle/>
+          <a:p>
+            <a:pPr algn="r">
+              <a:spcAft>
+                <a:spcPts val="400"/>
+              </a:spcAft>
+            </a:pPr>
+            <a:r>
+              <a:rPr sz="900" b="0">
+                <a:solidFill>
+                  <a:srgbClr val="0B5394"/>
+                </a:solidFill>
+                <a:latin typeface="Aptos"/>
+                <a:hlinkClick r:id="rId3"/>
+              </a:rPr>
+              <a:t>https://www.datos.gov.co/d/uejq-wxrr</a:t>
+            </a:r>
+          </a:p>
+        </p:txBody>
+      </p:sp>
+      <p:sp>
+        <p:nvSpPr>
+          <p:cNvPr id="9" name="TextBox 8"/>
+          <p:cNvSpPr txBox="1"/>
+          <p:nvPr/>
+        </p:nvSpPr>
+        <p:spPr>
+          <a:xfrm>
+            <a:off x="11384280" y="6492240"/>
+            <a:ext cx="228600" cy="201168"/>
+          </a:xfrm>
+          <a:prstGeom prst="rect">
+            <a:avLst/>
+          </a:prstGeom>
+          <a:noFill/>
+        </p:spPr>
+        <p:txBody>
+          <a:bodyPr wrap="square" anchor="t">
+            <a:spAutoFit/>
+          </a:bodyPr>
+          <a:lstStyle/>
+          <a:p>
+            <a:pPr algn="r">
+              <a:spcAft>
+                <a:spcPts val="400"/>
+              </a:spcAft>
+            </a:pPr>
+            <a:r>
+              <a:rPr sz="900" b="0">
+                <a:solidFill>
+                  <a:srgbClr val="5A5A5A"/>
+                </a:solidFill>
+                <a:latin typeface="Aptos"/>
+              </a:rPr>
+              <a:t>10</a:t>
             </a:r>
           </a:p>
         </p:txBody>
@@ -3497,298 +3732,598 @@
         </p:nvSpPr>
         <p:spPr>
           <a:xfrm>
-            <a:off x="548640" y="292608"/>
-            <a:ext cx="11064240" cy="365760"/>
-          </a:xfrm>
-          <a:prstGeom prst="rect">
-            <a:avLst/>
-          </a:prstGeom>
-          <a:noFill/>
-        </p:spPr>
-        <p:txBody>
-          <a:bodyPr wrap="none">
-            <a:spAutoFit/>
-          </a:bodyPr>
-          <a:lstStyle/>
-          <a:p>
-            <a:pPr algn="l">
-              <a:spcAft>
-                <a:spcPts val="600"/>
-              </a:spcAft>
-            </a:pPr>
-            <a:r>
-              <a:rPr sz="1300" b="1">
+            <a:off x="594360" y="292608"/>
+            <a:ext cx="10972800" cy="502920"/>
+          </a:xfrm>
+          <a:prstGeom prst="rect">
+            <a:avLst/>
+          </a:prstGeom>
+          <a:noFill/>
+        </p:spPr>
+        <p:txBody>
+          <a:bodyPr wrap="square" anchor="t">
+            <a:spAutoFit/>
+          </a:bodyPr>
+          <a:lstStyle/>
+          <a:p>
+            <a:pPr algn="l">
+              <a:spcAft>
+                <a:spcPts val="400"/>
+              </a:spcAft>
+            </a:pPr>
+            <a:r>
+              <a:rPr sz="2500" b="1">
+                <a:solidFill>
+                  <a:srgbClr val="0B5394"/>
+                </a:solidFill>
+                <a:latin typeface="Aptos"/>
+              </a:rPr>
+              <a:t>5. Composite Stat-Boxplot</a:t>
+            </a:r>
+          </a:p>
+        </p:txBody>
+      </p:sp>
+      <p:sp>
+        <p:nvSpPr>
+          <p:cNvPr id="3" name="TextBox 2"/>
+          <p:cNvSpPr txBox="1"/>
+          <p:nvPr/>
+        </p:nvSpPr>
+        <p:spPr>
+          <a:xfrm>
+            <a:off x="621792" y="822960"/>
+            <a:ext cx="10972800" cy="274320"/>
+          </a:xfrm>
+          <a:prstGeom prst="rect">
+            <a:avLst/>
+          </a:prstGeom>
+          <a:noFill/>
+        </p:spPr>
+        <p:txBody>
+          <a:bodyPr wrap="square" anchor="t">
+            <a:spAutoFit/>
+          </a:bodyPr>
+          <a:lstStyle/>
+          <a:p>
+            <a:pPr algn="l">
+              <a:spcAft>
+                <a:spcPts val="400"/>
+              </a:spcAft>
+            </a:pPr>
+            <a:r>
+              <a:rPr sz="1100" b="0">
+                <a:solidFill>
+                  <a:srgbClr val="5A5A5A"/>
+                </a:solidFill>
+                <a:latin typeface="Aptos"/>
+              </a:rPr>
+              <a:t>Concepto, limitación que corrige y uso recomendado</a:t>
+            </a:r>
+          </a:p>
+        </p:txBody>
+      </p:sp>
+      <p:sp>
+        <p:nvSpPr>
+          <p:cNvPr id="4" name="Rounded Rectangle 3"/>
+          <p:cNvSpPr/>
+          <p:nvPr/>
+        </p:nvSpPr>
+        <p:spPr>
+          <a:xfrm>
+            <a:off x="594360" y="1325880"/>
+            <a:ext cx="3566160" cy="4526280"/>
+          </a:xfrm>
+          <a:prstGeom prst="roundRect">
+            <a:avLst/>
+          </a:prstGeom>
+          <a:solidFill>
+            <a:srgbClr val="F2F2F2"/>
+          </a:solidFill>
+          <a:ln w="12700">
+            <a:solidFill>
+              <a:srgbClr val="0B5394"/>
+            </a:solidFill>
+          </a:ln>
+        </p:spPr>
+        <p:style>
+          <a:lnRef idx="1">
+            <a:schemeClr val="accent1"/>
+          </a:lnRef>
+          <a:fillRef idx="3">
+            <a:schemeClr val="accent1"/>
+          </a:fillRef>
+          <a:effectRef idx="2">
+            <a:schemeClr val="accent1"/>
+          </a:effectRef>
+          <a:fontRef idx="minor">
+            <a:schemeClr val="lt1"/>
+          </a:fontRef>
+        </p:style>
+        <p:txBody>
+          <a:bodyPr rtlCol="0" anchor="ctr"/>
+          <a:lstStyle/>
+          <a:p>
+            <a:pPr algn="ctr"/>
+          </a:p>
+        </p:txBody>
+      </p:sp>
+      <p:sp>
+        <p:nvSpPr>
+          <p:cNvPr id="5" name="TextBox 4"/>
+          <p:cNvSpPr txBox="1"/>
+          <p:nvPr/>
+        </p:nvSpPr>
+        <p:spPr>
+          <a:xfrm>
+            <a:off x="777240" y="1463039"/>
+            <a:ext cx="3200400" cy="292608"/>
+          </a:xfrm>
+          <a:prstGeom prst="rect">
+            <a:avLst/>
+          </a:prstGeom>
+          <a:noFill/>
+        </p:spPr>
+        <p:txBody>
+          <a:bodyPr wrap="square" anchor="t">
+            <a:spAutoFit/>
+          </a:bodyPr>
+          <a:lstStyle/>
+          <a:p>
+            <a:pPr algn="l">
+              <a:spcAft>
+                <a:spcPts val="400"/>
+              </a:spcAft>
+            </a:pPr>
+            <a:r>
+              <a:rPr sz="1000" b="1">
+                <a:solidFill>
+                  <a:srgbClr val="0B5394"/>
+                </a:solidFill>
+                <a:latin typeface="Aptos"/>
+              </a:rPr>
+              <a:t>CONCEPTO</a:t>
+            </a:r>
+          </a:p>
+        </p:txBody>
+      </p:sp>
+      <p:sp>
+        <p:nvSpPr>
+          <p:cNvPr id="6" name="TextBox 5"/>
+          <p:cNvSpPr txBox="1"/>
+          <p:nvPr/>
+        </p:nvSpPr>
+        <p:spPr>
+          <a:xfrm>
+            <a:off x="777240" y="1783080"/>
+            <a:ext cx="3200400" cy="3959352"/>
+          </a:xfrm>
+          <a:prstGeom prst="rect">
+            <a:avLst/>
+          </a:prstGeom>
+          <a:noFill/>
+        </p:spPr>
+        <p:txBody>
+          <a:bodyPr wrap="square" anchor="t">
+            <a:spAutoFit/>
+          </a:bodyPr>
+          <a:lstStyle/>
+          <a:p>
+            <a:pPr algn="l">
+              <a:spcAft>
+                <a:spcPts val="400"/>
+              </a:spcAft>
+            </a:pPr>
+            <a:r>
+              <a:rPr sz="1500" b="0">
+                <a:solidFill>
+                  <a:srgbClr val="202124"/>
+                </a:solidFill>
+                <a:latin typeface="Aptos"/>
+              </a:rPr>
+              <a:t>Integra cajas letter-value, mediana, media y puntos en una sola vista para leer centro, dispersión y sesgo juntos.</a:t>
+            </a:r>
+          </a:p>
+        </p:txBody>
+      </p:sp>
+      <p:sp>
+        <p:nvSpPr>
+          <p:cNvPr id="7" name="Rounded Rectangle 6"/>
+          <p:cNvSpPr/>
+          <p:nvPr/>
+        </p:nvSpPr>
+        <p:spPr>
+          <a:xfrm>
+            <a:off x="4315968" y="1325880"/>
+            <a:ext cx="3566160" cy="4526280"/>
+          </a:xfrm>
+          <a:prstGeom prst="roundRect">
+            <a:avLst/>
+          </a:prstGeom>
+          <a:solidFill>
+            <a:srgbClr val="F2F2F2"/>
+          </a:solidFill>
+          <a:ln w="12700">
+            <a:solidFill>
+              <a:srgbClr val="B03A2B"/>
+            </a:solidFill>
+          </a:ln>
+        </p:spPr>
+        <p:style>
+          <a:lnRef idx="1">
+            <a:schemeClr val="accent1"/>
+          </a:lnRef>
+          <a:fillRef idx="3">
+            <a:schemeClr val="accent1"/>
+          </a:fillRef>
+          <a:effectRef idx="2">
+            <a:schemeClr val="accent1"/>
+          </a:effectRef>
+          <a:fontRef idx="minor">
+            <a:schemeClr val="lt1"/>
+          </a:fontRef>
+        </p:style>
+        <p:txBody>
+          <a:bodyPr rtlCol="0" anchor="ctr"/>
+          <a:lstStyle/>
+          <a:p>
+            <a:pPr algn="ctr"/>
+          </a:p>
+        </p:txBody>
+      </p:sp>
+      <p:sp>
+        <p:nvSpPr>
+          <p:cNvPr id="8" name="TextBox 7"/>
+          <p:cNvSpPr txBox="1"/>
+          <p:nvPr/>
+        </p:nvSpPr>
+        <p:spPr>
+          <a:xfrm>
+            <a:off x="4498848" y="1463039"/>
+            <a:ext cx="3200400" cy="292608"/>
+          </a:xfrm>
+          <a:prstGeom prst="rect">
+            <a:avLst/>
+          </a:prstGeom>
+          <a:noFill/>
+        </p:spPr>
+        <p:txBody>
+          <a:bodyPr wrap="square" anchor="t">
+            <a:spAutoFit/>
+          </a:bodyPr>
+          <a:lstStyle/>
+          <a:p>
+            <a:pPr algn="l">
+              <a:spcAft>
+                <a:spcPts val="400"/>
+              </a:spcAft>
+            </a:pPr>
+            <a:r>
+              <a:rPr sz="1000" b="1">
                 <a:solidFill>
                   <a:srgbClr val="B03A2B"/>
                 </a:solidFill>
-                <a:latin typeface="Calibri"/>
-              </a:rPr>
-              <a:t>HALLAZGO</a:t>
-            </a:r>
-          </a:p>
-        </p:txBody>
-      </p:sp>
-      <p:sp>
-        <p:nvSpPr>
-          <p:cNvPr id="3" name="TextBox 2"/>
-          <p:cNvSpPr txBox="1"/>
-          <p:nvPr/>
-        </p:nvSpPr>
-        <p:spPr>
-          <a:xfrm>
-            <a:off x="548640" y="566928"/>
-            <a:ext cx="11064240" cy="731520"/>
-          </a:xfrm>
-          <a:prstGeom prst="rect">
-            <a:avLst/>
-          </a:prstGeom>
-          <a:noFill/>
-        </p:spPr>
-        <p:txBody>
-          <a:bodyPr wrap="none">
-            <a:spAutoFit/>
-          </a:bodyPr>
-          <a:lstStyle/>
-          <a:p>
-            <a:pPr algn="l">
-              <a:spcAft>
-                <a:spcPts val="600"/>
-              </a:spcAft>
-            </a:pPr>
-            <a:r>
-              <a:rPr sz="2800" b="1">
-                <a:solidFill>
-                  <a:srgbClr val="1F3A5F"/>
-                </a:solidFill>
-                <a:latin typeface="Calibri"/>
-              </a:rPr>
-              <a:t>Lo que el boxplot escondia</a:t>
-            </a:r>
-          </a:p>
-        </p:txBody>
-      </p:sp>
-      <p:sp>
-        <p:nvSpPr>
-          <p:cNvPr id="4" name="TextBox 3"/>
-          <p:cNvSpPr txBox="1"/>
-          <p:nvPr/>
-        </p:nvSpPr>
-        <p:spPr>
-          <a:xfrm>
-            <a:off x="548640" y="1225296"/>
-            <a:ext cx="11064240" cy="91440"/>
-          </a:xfrm>
-          <a:prstGeom prst="rect">
-            <a:avLst/>
-          </a:prstGeom>
-          <a:noFill/>
-        </p:spPr>
-        <p:txBody>
-          <a:bodyPr wrap="none">
-            <a:spAutoFit/>
-          </a:bodyPr>
-          <a:lstStyle/>
-          <a:p>
-            <a:pPr algn="l">
-              <a:spcAft>
-                <a:spcPts val="600"/>
-              </a:spcAft>
-            </a:pPr>
-            <a:r>
-              <a:rPr sz="200" b="0">
-                <a:solidFill>
-                  <a:srgbClr val="B03A2B"/>
-                </a:solidFill>
-                <a:latin typeface="Calibri"/>
-              </a:rPr>
-              <a:t> </a:t>
-            </a:r>
-          </a:p>
-        </p:txBody>
-      </p:sp>
-      <p:sp>
-        <p:nvSpPr>
-          <p:cNvPr id="5" name="TextBox 4"/>
-          <p:cNvSpPr txBox="1"/>
-          <p:nvPr/>
-        </p:nvSpPr>
-        <p:spPr>
-          <a:xfrm>
-            <a:off x="548640" y="1554480"/>
-            <a:ext cx="11064240" cy="4572000"/>
-          </a:xfrm>
-          <a:prstGeom prst="rect">
-            <a:avLst/>
-          </a:prstGeom>
-          <a:noFill/>
-        </p:spPr>
-        <p:txBody>
-          <a:bodyPr wrap="square">
-            <a:spAutoFit/>
-          </a:bodyPr>
-          <a:lstStyle/>
-          <a:p>
-            <a:pPr>
-              <a:spcAft>
-                <a:spcPts val="1400"/>
-              </a:spcAft>
-            </a:pPr>
-            <a:r>
-              <a:rPr sz="2000" b="1">
-                <a:solidFill>
-                  <a:srgbClr val="B03A2B"/>
-                </a:solidFill>
-                <a:latin typeface="Calibri"/>
-              </a:rPr>
-              <a:t>Half-Eye  </a:t>
-            </a:r>
-            <a:r>
-              <a:rPr sz="1800">
-                <a:solidFill>
-                  <a:srgbClr val="333333"/>
-                </a:solidFill>
-                <a:latin typeface="Calibri"/>
-              </a:rPr>
-              <a:t>- donde se apila cada grupo y su forma real</a:t>
-            </a:r>
-          </a:p>
-          <a:p>
-            <a:pPr>
-              <a:spcAft>
-                <a:spcPts val="1400"/>
-              </a:spcAft>
-            </a:pPr>
-            <a:r>
-              <a:rPr sz="2000" b="1">
-                <a:solidFill>
-                  <a:srgbClr val="B03A2B"/>
-                </a:solidFill>
-                <a:latin typeface="Calibri"/>
-              </a:rPr>
-              <a:t>Ridge  </a:t>
-            </a:r>
-            <a:r>
-              <a:rPr sz="1800">
-                <a:solidFill>
-                  <a:srgbClr val="333333"/>
-                </a:solidFill>
-                <a:latin typeface="Calibri"/>
-              </a:rPr>
-              <a:t>- si la forma cambia de un anio a otro (aqui: no cambia)</a:t>
-            </a:r>
-          </a:p>
-          <a:p>
-            <a:pPr>
-              <a:spcAft>
-                <a:spcPts val="1400"/>
-              </a:spcAft>
-            </a:pPr>
-            <a:r>
-              <a:rPr sz="2000" b="1">
-                <a:solidFill>
-                  <a:srgbClr val="B03A2B"/>
-                </a:solidFill>
-                <a:latin typeface="Calibri"/>
-              </a:rPr>
-              <a:t>Sinaplot  </a:t>
-            </a:r>
-            <a:r>
-              <a:rPr sz="1800">
-                <a:solidFill>
-                  <a:srgbClr val="333333"/>
-                </a:solidFill>
-                <a:latin typeface="Calibri"/>
-              </a:rPr>
-              <a:t>- la pila del cacao en 0,50/0,60 t/ha (~44 % de los registros)</a:t>
-            </a:r>
-          </a:p>
-          <a:p>
-            <a:pPr>
-              <a:spcAft>
-                <a:spcPts val="1400"/>
-              </a:spcAft>
-            </a:pPr>
-            <a:r>
-              <a:rPr sz="2000" b="1">
-                <a:solidFill>
-                  <a:srgbClr val="B03A2B"/>
-                </a:solidFill>
-                <a:latin typeface="Calibri"/>
-              </a:rPr>
-              <a:t>Boxenplot  </a:t>
-            </a:r>
-            <a:r>
-              <a:rPr sz="1800">
-                <a:solidFill>
-                  <a:srgbClr val="333333"/>
-                </a:solidFill>
-                <a:latin typeface="Calibri"/>
-              </a:rPr>
-              <a:t>- colas pesadas de tomate y maiz; la caja y su regla de atipicos no las ven</a:t>
-            </a:r>
-          </a:p>
-          <a:p>
-            <a:pPr>
-              <a:spcAft>
-                <a:spcPts val="1400"/>
-              </a:spcAft>
-            </a:pPr>
-            <a:r>
-              <a:rPr sz="2000" b="1">
-                <a:solidFill>
-                  <a:srgbClr val="B03A2B"/>
-                </a:solidFill>
-                <a:latin typeface="Calibri"/>
-              </a:rPr>
-              <a:t>Composite  </a:t>
-            </a:r>
-            <a:r>
-              <a:rPr sz="1800">
-                <a:solidFill>
-                  <a:srgbClr val="333333"/>
-                </a:solidFill>
-                <a:latin typeface="Calibri"/>
-              </a:rPr>
-              <a:t>- la media por debajo de la mediana: cola baja que ningun boxplot dibuja</a:t>
-            </a:r>
-          </a:p>
-        </p:txBody>
-      </p:sp>
-      <p:sp>
-        <p:nvSpPr>
-          <p:cNvPr id="6" name="TextBox 5"/>
-          <p:cNvSpPr txBox="1"/>
-          <p:nvPr/>
-        </p:nvSpPr>
-        <p:spPr>
-          <a:xfrm>
-            <a:off x="548640" y="6419088"/>
-            <a:ext cx="11064240" cy="365760"/>
-          </a:xfrm>
-          <a:prstGeom prst="rect">
-            <a:avLst/>
-          </a:prstGeom>
-          <a:noFill/>
-        </p:spPr>
-        <p:txBody>
-          <a:bodyPr wrap="none">
-            <a:spAutoFit/>
-          </a:bodyPr>
-          <a:lstStyle/>
-          <a:p>
-            <a:pPr algn="l">
-              <a:spcAft>
-                <a:spcPts val="600"/>
-              </a:spcAft>
-            </a:pPr>
-            <a:r>
-              <a:rPr sz="1000" b="0">
-                <a:solidFill>
-                  <a:srgbClr val="666666"/>
-                </a:solidFill>
-                <a:latin typeface="Calibri"/>
-              </a:rPr>
-              <a:t>Fuente: EVA 2019-2025 (UPRA) - datos.gov.co/d/uejq-wxrr</a:t>
+                <a:latin typeface="Aptos"/>
+              </a:rPr>
+              <a:t>QUÉ NO MUESTRA LA CAJA</a:t>
+            </a:r>
+          </a:p>
+        </p:txBody>
+      </p:sp>
+      <p:sp>
+        <p:nvSpPr>
+          <p:cNvPr id="9" name="TextBox 8"/>
+          <p:cNvSpPr txBox="1"/>
+          <p:nvPr/>
+        </p:nvSpPr>
+        <p:spPr>
+          <a:xfrm>
+            <a:off x="4498848" y="1783080"/>
+            <a:ext cx="3200400" cy="3959352"/>
+          </a:xfrm>
+          <a:prstGeom prst="rect">
+            <a:avLst/>
+          </a:prstGeom>
+          <a:noFill/>
+        </p:spPr>
+        <p:txBody>
+          <a:bodyPr wrap="square" anchor="t">
+            <a:spAutoFit/>
+          </a:bodyPr>
+          <a:lstStyle/>
+          <a:p>
+            <a:pPr algn="l">
+              <a:spcAft>
+                <a:spcPts val="400"/>
+              </a:spcAft>
+            </a:pPr>
+            <a:r>
+              <a:rPr sz="1500" b="0">
+                <a:solidFill>
+                  <a:srgbClr val="202124"/>
+                </a:solidFill>
+                <a:latin typeface="Aptos"/>
+              </a:rPr>
+              <a:t>El boxplot no muestra la media ni revela de inmediato si el sesgo va hacia arriba o hacia abajo.</a:t>
+            </a:r>
+          </a:p>
+        </p:txBody>
+      </p:sp>
+      <p:sp>
+        <p:nvSpPr>
+          <p:cNvPr id="10" name="Rounded Rectangle 9"/>
+          <p:cNvSpPr/>
+          <p:nvPr/>
+        </p:nvSpPr>
+        <p:spPr>
+          <a:xfrm>
+            <a:off x="8037575" y="1325880"/>
+            <a:ext cx="3566160" cy="4526280"/>
+          </a:xfrm>
+          <a:prstGeom prst="roundRect">
+            <a:avLst/>
+          </a:prstGeom>
+          <a:solidFill>
+            <a:srgbClr val="F2F2F2"/>
+          </a:solidFill>
+          <a:ln w="12700">
+            <a:solidFill>
+              <a:srgbClr val="0B5394"/>
+            </a:solidFill>
+          </a:ln>
+        </p:spPr>
+        <p:style>
+          <a:lnRef idx="1">
+            <a:schemeClr val="accent1"/>
+          </a:lnRef>
+          <a:fillRef idx="3">
+            <a:schemeClr val="accent1"/>
+          </a:fillRef>
+          <a:effectRef idx="2">
+            <a:schemeClr val="accent1"/>
+          </a:effectRef>
+          <a:fontRef idx="minor">
+            <a:schemeClr val="lt1"/>
+          </a:fontRef>
+        </p:style>
+        <p:txBody>
+          <a:bodyPr rtlCol="0" anchor="ctr"/>
+          <a:lstStyle/>
+          <a:p>
+            <a:pPr algn="ctr"/>
+          </a:p>
+        </p:txBody>
+      </p:sp>
+      <p:sp>
+        <p:nvSpPr>
+          <p:cNvPr id="11" name="TextBox 10"/>
+          <p:cNvSpPr txBox="1"/>
+          <p:nvPr/>
+        </p:nvSpPr>
+        <p:spPr>
+          <a:xfrm>
+            <a:off x="8220455" y="1463039"/>
+            <a:ext cx="3200400" cy="292608"/>
+          </a:xfrm>
+          <a:prstGeom prst="rect">
+            <a:avLst/>
+          </a:prstGeom>
+          <a:noFill/>
+        </p:spPr>
+        <p:txBody>
+          <a:bodyPr wrap="square" anchor="t">
+            <a:spAutoFit/>
+          </a:bodyPr>
+          <a:lstStyle/>
+          <a:p>
+            <a:pPr algn="l">
+              <a:spcAft>
+                <a:spcPts val="400"/>
+              </a:spcAft>
+            </a:pPr>
+            <a:r>
+              <a:rPr sz="1000" b="1">
+                <a:solidFill>
+                  <a:srgbClr val="0B5394"/>
+                </a:solidFill>
+                <a:latin typeface="Aptos"/>
+              </a:rPr>
+              <a:t>ÚSELO CUANDO</a:t>
+            </a:r>
+          </a:p>
+        </p:txBody>
+      </p:sp>
+      <p:sp>
+        <p:nvSpPr>
+          <p:cNvPr id="12" name="TextBox 11"/>
+          <p:cNvSpPr txBox="1"/>
+          <p:nvPr/>
+        </p:nvSpPr>
+        <p:spPr>
+          <a:xfrm>
+            <a:off x="8220455" y="1783080"/>
+            <a:ext cx="3200400" cy="3959352"/>
+          </a:xfrm>
+          <a:prstGeom prst="rect">
+            <a:avLst/>
+          </a:prstGeom>
+          <a:noFill/>
+        </p:spPr>
+        <p:txBody>
+          <a:bodyPr wrap="square" anchor="t">
+            <a:spAutoFit/>
+          </a:bodyPr>
+          <a:lstStyle/>
+          <a:p>
+            <a:pPr algn="l">
+              <a:spcAft>
+                <a:spcPts val="400"/>
+              </a:spcAft>
+            </a:pPr>
+            <a:r>
+              <a:rPr sz="1500" b="0">
+                <a:solidFill>
+                  <a:srgbClr val="202124"/>
+                </a:solidFill>
+                <a:latin typeface="Aptos"/>
+              </a:rPr>
+              <a:t>Pocas o varias categorías cuando hay varias preguntas estadísticas a la vez y se necesita una lectura integrada. Evítelo si la audiencia requiere una vista muy simple.</a:t>
+            </a:r>
+          </a:p>
+        </p:txBody>
+      </p:sp>
+      <p:sp>
+        <p:nvSpPr>
+          <p:cNvPr id="13" name="TextBox 12"/>
+          <p:cNvSpPr txBox="1"/>
+          <p:nvPr/>
+        </p:nvSpPr>
+        <p:spPr>
+          <a:xfrm>
+            <a:off x="640080" y="5989320"/>
+            <a:ext cx="10972800" cy="274320"/>
+          </a:xfrm>
+          <a:prstGeom prst="rect">
+            <a:avLst/>
+          </a:prstGeom>
+          <a:noFill/>
+        </p:spPr>
+        <p:txBody>
+          <a:bodyPr wrap="square" anchor="t">
+            <a:spAutoFit/>
+          </a:bodyPr>
+          <a:lstStyle/>
+          <a:p>
+            <a:pPr algn="ctr">
+              <a:spcAft>
+                <a:spcPts val="400"/>
+              </a:spcAft>
+            </a:pPr>
+            <a:r>
+              <a:rPr sz="1200" b="0">
+                <a:solidFill>
+                  <a:srgbClr val="5A5A5A"/>
+                </a:solidFill>
+                <a:latin typeface="Aptos"/>
+              </a:rPr>
+              <a:t>Corte: café con rendimiento &gt; 0 en seis departamentos; N = 2.562.</a:t>
+            </a:r>
+          </a:p>
+        </p:txBody>
+      </p:sp>
+      <p:sp>
+        <p:nvSpPr>
+          <p:cNvPr id="14" name="TextBox 13"/>
+          <p:cNvSpPr txBox="1"/>
+          <p:nvPr/>
+        </p:nvSpPr>
+        <p:spPr>
+          <a:xfrm>
+            <a:off x="594360" y="6492240"/>
+            <a:ext cx="7315200" cy="201168"/>
+          </a:xfrm>
+          <a:prstGeom prst="rect">
+            <a:avLst/>
+          </a:prstGeom>
+          <a:noFill/>
+        </p:spPr>
+        <p:txBody>
+          <a:bodyPr wrap="square" anchor="t">
+            <a:spAutoFit/>
+          </a:bodyPr>
+          <a:lstStyle/>
+          <a:p>
+            <a:pPr algn="l">
+              <a:spcAft>
+                <a:spcPts val="400"/>
+              </a:spcAft>
+            </a:pPr>
+            <a:r>
+              <a:rPr sz="900" b="0">
+                <a:solidFill>
+                  <a:srgbClr val="5A5A5A"/>
+                </a:solidFill>
+                <a:latin typeface="Aptos"/>
+              </a:rPr>
+              <a:t>Fuente: EVA 2019–2025 (UPRA) · datos.gov.co</a:t>
+            </a:r>
+          </a:p>
+        </p:txBody>
+      </p:sp>
+      <p:sp>
+        <p:nvSpPr>
+          <p:cNvPr id="15" name="TextBox 14"/>
+          <p:cNvSpPr txBox="1"/>
+          <p:nvPr/>
+        </p:nvSpPr>
+        <p:spPr>
+          <a:xfrm>
+            <a:off x="7955279" y="6492240"/>
+            <a:ext cx="3383280" cy="201168"/>
+          </a:xfrm>
+          <a:prstGeom prst="rect">
+            <a:avLst/>
+          </a:prstGeom>
+          <a:noFill/>
+        </p:spPr>
+        <p:txBody>
+          <a:bodyPr wrap="square" anchor="t">
+            <a:spAutoFit/>
+          </a:bodyPr>
+          <a:lstStyle/>
+          <a:p>
+            <a:pPr algn="r">
+              <a:spcAft>
+                <a:spcPts val="400"/>
+              </a:spcAft>
+            </a:pPr>
+            <a:r>
+              <a:rPr sz="900" b="0">
+                <a:solidFill>
+                  <a:srgbClr val="0B5394"/>
+                </a:solidFill>
+                <a:latin typeface="Aptos"/>
+                <a:hlinkClick r:id="rId2"/>
+              </a:rPr>
+              <a:t>https://www.datos.gov.co/d/uejq-wxrr</a:t>
+            </a:r>
+          </a:p>
+        </p:txBody>
+      </p:sp>
+      <p:sp>
+        <p:nvSpPr>
+          <p:cNvPr id="16" name="TextBox 15"/>
+          <p:cNvSpPr txBox="1"/>
+          <p:nvPr/>
+        </p:nvSpPr>
+        <p:spPr>
+          <a:xfrm>
+            <a:off x="11384280" y="6492240"/>
+            <a:ext cx="228600" cy="201168"/>
+          </a:xfrm>
+          <a:prstGeom prst="rect">
+            <a:avLst/>
+          </a:prstGeom>
+          <a:noFill/>
+        </p:spPr>
+        <p:txBody>
+          <a:bodyPr wrap="square" anchor="t">
+            <a:spAutoFit/>
+          </a:bodyPr>
+          <a:lstStyle/>
+          <a:p>
+            <a:pPr algn="r">
+              <a:spcAft>
+                <a:spcPts val="400"/>
+              </a:spcAft>
+            </a:pPr>
+            <a:r>
+              <a:rPr sz="900" b="0">
+                <a:solidFill>
+                  <a:srgbClr val="5A5A5A"/>
+                </a:solidFill>
+                <a:latin typeface="Aptos"/>
+              </a:rPr>
+              <a:t>11</a:t>
             </a:r>
           </a:p>
         </p:txBody>
@@ -3819,33 +4354,33 @@
         </p:nvSpPr>
         <p:spPr>
           <a:xfrm>
-            <a:off x="548640" y="292608"/>
-            <a:ext cx="11064240" cy="365760"/>
-          </a:xfrm>
-          <a:prstGeom prst="rect">
-            <a:avLst/>
-          </a:prstGeom>
-          <a:noFill/>
-        </p:spPr>
-        <p:txBody>
-          <a:bodyPr wrap="none">
-            <a:spAutoFit/>
-          </a:bodyPr>
-          <a:lstStyle/>
-          <a:p>
-            <a:pPr algn="l">
-              <a:spcAft>
-                <a:spcPts val="600"/>
-              </a:spcAft>
-            </a:pPr>
-            <a:r>
-              <a:rPr sz="1300" b="1">
-                <a:solidFill>
-                  <a:srgbClr val="B03A2B"/>
-                </a:solidFill>
-                <a:latin typeface="Calibri"/>
-              </a:rPr>
-              <a:t>IMPLICACION</a:t>
+            <a:off x="594360" y="292608"/>
+            <a:ext cx="10972800" cy="502920"/>
+          </a:xfrm>
+          <a:prstGeom prst="rect">
+            <a:avLst/>
+          </a:prstGeom>
+          <a:noFill/>
+        </p:spPr>
+        <p:txBody>
+          <a:bodyPr wrap="square" anchor="t">
+            <a:spAutoFit/>
+          </a:bodyPr>
+          <a:lstStyle/>
+          <a:p>
+            <a:pPr algn="l">
+              <a:spcAft>
+                <a:spcPts val="400"/>
+              </a:spcAft>
+            </a:pPr>
+            <a:r>
+              <a:rPr sz="2500" b="1">
+                <a:solidFill>
+                  <a:srgbClr val="0B5394"/>
+                </a:solidFill>
+                <a:latin typeface="Aptos"/>
+              </a:rPr>
+              <a:t>Composite Stat-Boxplot · café por departamento</a:t>
             </a:r>
           </a:p>
         </p:txBody>
@@ -3858,76 +4393,61 @@
         </p:nvSpPr>
         <p:spPr>
           <a:xfrm>
-            <a:off x="548640" y="566928"/>
-            <a:ext cx="11064240" cy="731520"/>
-          </a:xfrm>
-          <a:prstGeom prst="rect">
-            <a:avLst/>
-          </a:prstGeom>
-          <a:noFill/>
-        </p:spPr>
-        <p:txBody>
-          <a:bodyPr wrap="none">
-            <a:spAutoFit/>
-          </a:bodyPr>
-          <a:lstStyle/>
-          <a:p>
-            <a:pPr algn="l">
-              <a:spcAft>
-                <a:spcPts val="600"/>
-              </a:spcAft>
-            </a:pPr>
-            <a:r>
-              <a:rPr sz="2800" b="1">
-                <a:solidFill>
-                  <a:srgbClr val="1F3A5F"/>
-                </a:solidFill>
-                <a:latin typeface="Calibri"/>
-              </a:rPr>
-              <a:t>El metodo: reglas que no se negocian</a:t>
-            </a:r>
-          </a:p>
-        </p:txBody>
-      </p:sp>
-      <p:sp>
-        <p:nvSpPr>
-          <p:cNvPr id="4" name="TextBox 3"/>
-          <p:cNvSpPr txBox="1"/>
-          <p:nvPr/>
-        </p:nvSpPr>
-        <p:spPr>
-          <a:xfrm>
-            <a:off x="548640" y="1225296"/>
-            <a:ext cx="11064240" cy="91440"/>
-          </a:xfrm>
-          <a:prstGeom prst="rect">
-            <a:avLst/>
-          </a:prstGeom>
-          <a:noFill/>
-        </p:spPr>
-        <p:txBody>
-          <a:bodyPr wrap="none">
-            <a:spAutoFit/>
-          </a:bodyPr>
-          <a:lstStyle/>
-          <a:p>
-            <a:pPr algn="l">
-              <a:spcAft>
-                <a:spcPts val="600"/>
-              </a:spcAft>
-            </a:pPr>
-            <a:r>
-              <a:rPr sz="200" b="0">
-                <a:solidFill>
-                  <a:srgbClr val="B03A2B"/>
-                </a:solidFill>
-                <a:latin typeface="Calibri"/>
-              </a:rPr>
-              <a:t> </a:t>
-            </a:r>
-          </a:p>
-        </p:txBody>
-      </p:sp>
+            <a:off x="621792" y="822960"/>
+            <a:ext cx="10972800" cy="274320"/>
+          </a:xfrm>
+          <a:prstGeom prst="rect">
+            <a:avLst/>
+          </a:prstGeom>
+          <a:noFill/>
+        </p:spPr>
+        <p:txBody>
+          <a:bodyPr wrap="square" anchor="t">
+            <a:spAutoFit/>
+          </a:bodyPr>
+          <a:lstStyle/>
+          <a:p>
+            <a:pPr algn="l">
+              <a:spcAft>
+                <a:spcPts val="400"/>
+              </a:spcAft>
+            </a:pPr>
+            <a:r>
+              <a:rPr sz="1100" b="0">
+                <a:solidFill>
+                  <a:srgbClr val="5A5A5A"/>
+                </a:solidFill>
+                <a:latin typeface="Aptos"/>
+              </a:rPr>
+              <a:t>Captura de la visualización Plotly generada con datos reales EVA</a:t>
+            </a:r>
+          </a:p>
+        </p:txBody>
+      </p:sp>
+      <p:pic>
+        <p:nvPicPr>
+          <p:cNvPr id="4" name="Picture 3" descr="fig5_composite_cafe.png"/>
+          <p:cNvPicPr>
+            <a:picLocks noChangeAspect="1"/>
+          </p:cNvPicPr>
+          <p:nvPr/>
+        </p:nvPicPr>
+        <p:blipFill>
+          <a:blip r:embed="rId2"/>
+          <a:stretch>
+            <a:fillRect/>
+          </a:stretch>
+        </p:blipFill>
+        <p:spPr>
+          <a:xfrm>
+            <a:off x="457200" y="1097280"/>
+            <a:ext cx="11274552" cy="4434840"/>
+          </a:xfrm>
+          <a:prstGeom prst="rect">
+            <a:avLst/>
+          </a:prstGeom>
+        </p:spPr>
+      </p:pic>
       <p:sp>
         <p:nvSpPr>
           <p:cNvPr id="5" name="TextBox 4"/>
@@ -3936,129 +4456,33 @@
         </p:nvSpPr>
         <p:spPr>
           <a:xfrm>
-            <a:off x="548640" y="1554480"/>
-            <a:ext cx="11064240" cy="4754880"/>
-          </a:xfrm>
-          <a:prstGeom prst="rect">
-            <a:avLst/>
-          </a:prstGeom>
-          <a:noFill/>
-        </p:spPr>
-        <p:txBody>
-          <a:bodyPr wrap="square">
-            <a:spAutoFit/>
-          </a:bodyPr>
-          <a:lstStyle/>
-          <a:p>
-            <a:pPr>
-              <a:spcAft>
-                <a:spcPts val="1000"/>
-              </a:spcAft>
-            </a:pPr>
-            <a:r>
-              <a:rPr sz="1500">
-                <a:solidFill>
-                  <a:srgbClr val="333333"/>
-                </a:solidFill>
-                <a:latin typeface="Calibri"/>
-              </a:rPr>
-              <a:t>- El grafico se deriva de la pregunta, no del gusto ni del default de la libreria</a:t>
-            </a:r>
-          </a:p>
-          <a:p>
-            <a:pPr>
-              <a:spcAft>
-                <a:spcPts val="1000"/>
-              </a:spcAft>
-            </a:pPr>
-            <a:r>
-              <a:rPr sz="1500">
-                <a:solidFill>
-                  <a:srgbClr val="333333"/>
-                </a:solidFill>
-                <a:latin typeface="Calibri"/>
-              </a:rPr>
-              <a:t>- La escala se declara (lineal o log) y no cambia entre grupos comparados</a:t>
-            </a:r>
-          </a:p>
-          <a:p>
-            <a:pPr>
-              <a:spcAft>
-                <a:spcPts val="1000"/>
-              </a:spcAft>
-            </a:pPr>
-            <a:r>
-              <a:rPr sz="1500">
-                <a:solidFill>
-                  <a:srgbClr val="333333"/>
-                </a:solidFill>
-                <a:latin typeface="Calibri"/>
-              </a:rPr>
-              <a:t>- El n de cada grupo se ve; no se adivina</a:t>
-            </a:r>
-          </a:p>
-          <a:p>
-            <a:pPr>
-              <a:spcAft>
-                <a:spcPts val="1000"/>
-              </a:spcAft>
-            </a:pPr>
-            <a:r>
-              <a:rPr sz="1500">
-                <a:solidFill>
-                  <a:srgbClr val="333333"/>
-                </a:solidFill>
-                <a:latin typeface="Calibri"/>
-              </a:rPr>
-              <a:t>- Categorias ordenadas por mediana, salvo orden natural (tiempo), que se rotula</a:t>
-            </a:r>
-          </a:p>
-          <a:p>
-            <a:pPr>
-              <a:spcAft>
-                <a:spcPts val="1000"/>
-              </a:spcAft>
-            </a:pPr>
-            <a:r>
-              <a:rPr sz="1500">
-                <a:solidFill>
-                  <a:srgbClr val="333333"/>
-                </a:solidFill>
-                <a:latin typeface="Calibri"/>
-              </a:rPr>
-              <a:t>- Todo gris y el color se gana: un elemento resaltado, uno</a:t>
-            </a:r>
-          </a:p>
-          <a:p>
-            <a:pPr>
-              <a:spcAft>
-                <a:spcPts val="1000"/>
-              </a:spcAft>
-            </a:pPr>
-            <a:r>
-              <a:rPr sz="1500">
-                <a:solidFill>
-                  <a:srgbClr val="333333"/>
-                </a:solidFill>
-                <a:latin typeface="Calibri"/>
-              </a:rPr>
-              <a:t>- El color nunca es el unico canal: posicion, orden o etiqueta lo respaldan</a:t>
-            </a:r>
-          </a:p>
-          <a:p>
-            <a:pPr>
-              <a:spcAft>
-                <a:spcPts val="1000"/>
-              </a:spcAft>
-            </a:pPr>
-            <a:r>
-              <a:rPr sz="1500">
-                <a:solidFill>
-                  <a:srgbClr val="333333"/>
-                </a:solidFill>
-                <a:latin typeface="Calibri"/>
-              </a:rPr>
-              <a:t>- El titulo dice la conclusion, y la conclusion es verdadera contra la tabla</a:t>
+            <a:off x="640080" y="5559552"/>
+            <a:ext cx="10927080" cy="566928"/>
+          </a:xfrm>
+          <a:prstGeom prst="rect">
+            <a:avLst/>
+          </a:prstGeom>
+          <a:noFill/>
+        </p:spPr>
+        <p:txBody>
+          <a:bodyPr wrap="square" anchor="t">
+            <a:spAutoFit/>
+          </a:bodyPr>
+          <a:lstStyle/>
+          <a:p>
+            <a:pPr algn="l">
+              <a:spcAft>
+                <a:spcPts val="400"/>
+              </a:spcAft>
+            </a:pPr>
+            <a:r>
+              <a:rPr sz="1100" b="0">
+                <a:solidFill>
+                  <a:srgbClr val="202124"/>
+                </a:solidFill>
+                <a:latin typeface="Aptos"/>
+              </a:rPr>
+              <a:t>En los seis departamentos la media queda por debajo de la mediana, señal de cola baja. Antioquia lidera por mediana (1,21 t/ha) y Boyacá queda al final (0,95); el IQR máximo es 0,44 t/ha.</a:t>
             </a:r>
           </a:p>
         </p:txBody>
@@ -4071,33 +4495,151 @@
         </p:nvSpPr>
         <p:spPr>
           <a:xfrm>
-            <a:off x="548640" y="6419088"/>
-            <a:ext cx="11064240" cy="365760"/>
-          </a:xfrm>
-          <a:prstGeom prst="rect">
-            <a:avLst/>
-          </a:prstGeom>
-          <a:noFill/>
-        </p:spPr>
-        <p:txBody>
-          <a:bodyPr wrap="none">
-            <a:spAutoFit/>
-          </a:bodyPr>
-          <a:lstStyle/>
-          <a:p>
-            <a:pPr algn="l">
-              <a:spcAft>
-                <a:spcPts val="600"/>
-              </a:spcAft>
-            </a:pPr>
-            <a:r>
-              <a:rPr sz="1000" b="0">
-                <a:solidFill>
-                  <a:srgbClr val="666666"/>
-                </a:solidFill>
-                <a:latin typeface="Calibri"/>
-              </a:rPr>
-              <a:t>Fuente: EVA 2019-2025 (UPRA) - datos.gov.co/d/uejq-wxrr</a:t>
+            <a:off x="640080" y="6144768"/>
+            <a:ext cx="10927080" cy="201168"/>
+          </a:xfrm>
+          <a:prstGeom prst="rect">
+            <a:avLst/>
+          </a:prstGeom>
+          <a:noFill/>
+        </p:spPr>
+        <p:txBody>
+          <a:bodyPr wrap="square" anchor="t">
+            <a:spAutoFit/>
+          </a:bodyPr>
+          <a:lstStyle/>
+          <a:p>
+            <a:pPr algn="ctr">
+              <a:spcAft>
+                <a:spcPts val="400"/>
+              </a:spcAft>
+            </a:pPr>
+            <a:r>
+              <a:rPr sz="900" b="0">
+                <a:solidFill>
+                  <a:srgbClr val="5A5A5A"/>
+                </a:solidFill>
+                <a:latin typeface="Aptos"/>
+              </a:rPr>
+              <a:t>Demostración: fig5_composite_cafe.html · hover de cuantiles, media, mediana y observaciones.</a:t>
+            </a:r>
+          </a:p>
+        </p:txBody>
+      </p:sp>
+      <p:sp>
+        <p:nvSpPr>
+          <p:cNvPr id="7" name="TextBox 6"/>
+          <p:cNvSpPr txBox="1"/>
+          <p:nvPr/>
+        </p:nvSpPr>
+        <p:spPr>
+          <a:xfrm>
+            <a:off x="594360" y="6492240"/>
+            <a:ext cx="7315200" cy="201168"/>
+          </a:xfrm>
+          <a:prstGeom prst="rect">
+            <a:avLst/>
+          </a:prstGeom>
+          <a:noFill/>
+        </p:spPr>
+        <p:txBody>
+          <a:bodyPr wrap="square" anchor="t">
+            <a:spAutoFit/>
+          </a:bodyPr>
+          <a:lstStyle/>
+          <a:p>
+            <a:pPr algn="l">
+              <a:spcAft>
+                <a:spcPts val="400"/>
+              </a:spcAft>
+            </a:pPr>
+            <a:r>
+              <a:rPr sz="900" b="0">
+                <a:solidFill>
+                  <a:srgbClr val="5A5A5A"/>
+                </a:solidFill>
+                <a:latin typeface="Aptos"/>
+              </a:rPr>
+              <a:t>Fuente: EVA 2019–2025 (UPRA) · datos.gov.co</a:t>
+            </a:r>
+          </a:p>
+        </p:txBody>
+      </p:sp>
+      <p:sp>
+        <p:nvSpPr>
+          <p:cNvPr id="8" name="TextBox 7"/>
+          <p:cNvSpPr txBox="1"/>
+          <p:nvPr/>
+        </p:nvSpPr>
+        <p:spPr>
+          <a:xfrm>
+            <a:off x="7955279" y="6492240"/>
+            <a:ext cx="3383280" cy="201168"/>
+          </a:xfrm>
+          <a:prstGeom prst="rect">
+            <a:avLst/>
+          </a:prstGeom>
+          <a:noFill/>
+        </p:spPr>
+        <p:txBody>
+          <a:bodyPr wrap="square" anchor="t">
+            <a:spAutoFit/>
+          </a:bodyPr>
+          <a:lstStyle/>
+          <a:p>
+            <a:pPr algn="r">
+              <a:spcAft>
+                <a:spcPts val="400"/>
+              </a:spcAft>
+            </a:pPr>
+            <a:r>
+              <a:rPr sz="900" b="0">
+                <a:solidFill>
+                  <a:srgbClr val="0B5394"/>
+                </a:solidFill>
+                <a:latin typeface="Aptos"/>
+                <a:hlinkClick r:id="rId3"/>
+              </a:rPr>
+              <a:t>https://www.datos.gov.co/d/uejq-wxrr</a:t>
+            </a:r>
+          </a:p>
+        </p:txBody>
+      </p:sp>
+      <p:sp>
+        <p:nvSpPr>
+          <p:cNvPr id="9" name="TextBox 8"/>
+          <p:cNvSpPr txBox="1"/>
+          <p:nvPr/>
+        </p:nvSpPr>
+        <p:spPr>
+          <a:xfrm>
+            <a:off x="11384280" y="6492240"/>
+            <a:ext cx="228600" cy="201168"/>
+          </a:xfrm>
+          <a:prstGeom prst="rect">
+            <a:avLst/>
+          </a:prstGeom>
+          <a:noFill/>
+        </p:spPr>
+        <p:txBody>
+          <a:bodyPr wrap="square" anchor="t">
+            <a:spAutoFit/>
+          </a:bodyPr>
+          <a:lstStyle/>
+          <a:p>
+            <a:pPr algn="r">
+              <a:spcAft>
+                <a:spcPts val="400"/>
+              </a:spcAft>
+            </a:pPr>
+            <a:r>
+              <a:rPr sz="900" b="0">
+                <a:solidFill>
+                  <a:srgbClr val="5A5A5A"/>
+                </a:solidFill>
+                <a:latin typeface="Aptos"/>
+              </a:rPr>
+              <a:t>12</a:t>
             </a:r>
           </a:p>
         </p:txBody>
@@ -4128,33 +4670,33 @@
         </p:nvSpPr>
         <p:spPr>
           <a:xfrm>
-            <a:off x="548640" y="292608"/>
-            <a:ext cx="11064240" cy="365760"/>
-          </a:xfrm>
-          <a:prstGeom prst="rect">
-            <a:avLst/>
-          </a:prstGeom>
-          <a:noFill/>
-        </p:spPr>
-        <p:txBody>
-          <a:bodyPr wrap="none">
-            <a:spAutoFit/>
-          </a:bodyPr>
-          <a:lstStyle/>
-          <a:p>
-            <a:pPr algn="l">
-              <a:spcAft>
-                <a:spcPts val="600"/>
-              </a:spcAft>
-            </a:pPr>
-            <a:r>
-              <a:rPr sz="1300" b="1">
-                <a:solidFill>
-                  <a:srgbClr val="B03A2B"/>
-                </a:solidFill>
-                <a:latin typeface="Calibri"/>
-              </a:rPr>
-              <a:t>IMPLICACION</a:t>
+            <a:off x="594360" y="292608"/>
+            <a:ext cx="10972800" cy="502920"/>
+          </a:xfrm>
+          <a:prstGeom prst="rect">
+            <a:avLst/>
+          </a:prstGeom>
+          <a:noFill/>
+        </p:spPr>
+        <p:txBody>
+          <a:bodyPr wrap="square" anchor="t">
+            <a:spAutoFit/>
+          </a:bodyPr>
+          <a:lstStyle/>
+          <a:p>
+            <a:pPr algn="l">
+              <a:spcAft>
+                <a:spcPts val="400"/>
+              </a:spcAft>
+            </a:pPr>
+            <a:r>
+              <a:rPr sz="2500" b="1">
+                <a:solidFill>
+                  <a:srgbClr val="0B5394"/>
+                </a:solidFill>
+                <a:latin typeface="Aptos"/>
+              </a:rPr>
+              <a:t>Cierre: una técnica para cada pregunta</a:t>
             </a:r>
           </a:p>
         </p:txBody>
@@ -4167,73 +4709,79 @@
         </p:nvSpPr>
         <p:spPr>
           <a:xfrm>
-            <a:off x="548640" y="566928"/>
-            <a:ext cx="11064240" cy="731520"/>
-          </a:xfrm>
-          <a:prstGeom prst="rect">
-            <a:avLst/>
-          </a:prstGeom>
-          <a:noFill/>
-        </p:spPr>
-        <p:txBody>
-          <a:bodyPr wrap="none">
-            <a:spAutoFit/>
-          </a:bodyPr>
-          <a:lstStyle/>
-          <a:p>
-            <a:pPr algn="l">
-              <a:spcAft>
-                <a:spcPts val="600"/>
-              </a:spcAft>
-            </a:pPr>
-            <a:r>
-              <a:rPr sz="2800" b="1">
-                <a:solidFill>
-                  <a:srgbClr val="1F3A5F"/>
-                </a:solidFill>
-                <a:latin typeface="Calibri"/>
-              </a:rPr>
-              <a:t>Para que sirve esto</a:t>
-            </a:r>
-          </a:p>
-        </p:txBody>
-      </p:sp>
-      <p:sp>
-        <p:nvSpPr>
-          <p:cNvPr id="4" name="TextBox 3"/>
-          <p:cNvSpPr txBox="1"/>
-          <p:nvPr/>
-        </p:nvSpPr>
-        <p:spPr>
-          <a:xfrm>
-            <a:off x="548640" y="1225296"/>
-            <a:ext cx="11064240" cy="91440"/>
-          </a:xfrm>
-          <a:prstGeom prst="rect">
-            <a:avLst/>
-          </a:prstGeom>
-          <a:noFill/>
-        </p:spPr>
-        <p:txBody>
-          <a:bodyPr wrap="none">
-            <a:spAutoFit/>
-          </a:bodyPr>
-          <a:lstStyle/>
-          <a:p>
-            <a:pPr algn="l">
-              <a:spcAft>
-                <a:spcPts val="600"/>
-              </a:spcAft>
-            </a:pPr>
-            <a:r>
-              <a:rPr sz="200" b="0">
-                <a:solidFill>
-                  <a:srgbClr val="B03A2B"/>
-                </a:solidFill>
-                <a:latin typeface="Calibri"/>
-              </a:rPr>
-              <a:t> </a:t>
-            </a:r>
+            <a:off x="621792" y="822960"/>
+            <a:ext cx="10972800" cy="274320"/>
+          </a:xfrm>
+          <a:prstGeom prst="rect">
+            <a:avLst/>
+          </a:prstGeom>
+          <a:noFill/>
+        </p:spPr>
+        <p:txBody>
+          <a:bodyPr wrap="square" anchor="t">
+            <a:spAutoFit/>
+          </a:bodyPr>
+          <a:lstStyle/>
+          <a:p>
+            <a:pPr algn="l">
+              <a:spcAft>
+                <a:spcPts val="400"/>
+              </a:spcAft>
+            </a:pPr>
+            <a:r>
+              <a:rPr sz="1100" b="0">
+                <a:solidFill>
+                  <a:srgbClr val="5A5A5A"/>
+                </a:solidFill>
+                <a:latin typeface="Aptos"/>
+              </a:rPr>
+              <a:t>El gráfico no se elige por apariencia: se deriva de lo que se necesita comparar</a:t>
+            </a:r>
+          </a:p>
+        </p:txBody>
+      </p:sp>
+      <p:sp>
+        <p:nvSpPr>
+          <p:cNvPr id="4" name="Rounded Rectangle 3"/>
+          <p:cNvSpPr/>
+          <p:nvPr/>
+        </p:nvSpPr>
+        <p:spPr>
+          <a:xfrm>
+            <a:off x="594360" y="1325880"/>
+            <a:ext cx="3520440" cy="4206240"/>
+          </a:xfrm>
+          <a:prstGeom prst="roundRect">
+            <a:avLst/>
+          </a:prstGeom>
+          <a:solidFill>
+            <a:srgbClr val="F2F2F2"/>
+          </a:solidFill>
+          <a:ln w="12700">
+            <a:solidFill>
+              <a:srgbClr val="0B5394"/>
+            </a:solidFill>
+          </a:ln>
+        </p:spPr>
+        <p:style>
+          <a:lnRef idx="1">
+            <a:schemeClr val="accent1"/>
+          </a:lnRef>
+          <a:fillRef idx="3">
+            <a:schemeClr val="accent1"/>
+          </a:fillRef>
+          <a:effectRef idx="2">
+            <a:schemeClr val="accent1"/>
+          </a:effectRef>
+          <a:fontRef idx="minor">
+            <a:schemeClr val="lt1"/>
+          </a:fontRef>
+        </p:style>
+        <p:txBody>
+          <a:bodyPr rtlCol="0" anchor="ctr"/>
+          <a:lstStyle/>
+          <a:p>
+            <a:pPr algn="ctr"/>
           </a:p>
         </p:txBody>
       </p:sp>
@@ -4245,81 +4793,33 @@
         </p:nvSpPr>
         <p:spPr>
           <a:xfrm>
-            <a:off x="548640" y="1554480"/>
-            <a:ext cx="11064240" cy="4754880"/>
-          </a:xfrm>
-          <a:prstGeom prst="rect">
-            <a:avLst/>
-          </a:prstGeom>
-          <a:noFill/>
-        </p:spPr>
-        <p:txBody>
-          <a:bodyPr wrap="square">
-            <a:spAutoFit/>
-          </a:bodyPr>
-          <a:lstStyle/>
-          <a:p>
-            <a:pPr>
-              <a:spcAft>
-                <a:spcPts val="1000"/>
-              </a:spcAft>
-            </a:pPr>
-            <a:r>
-              <a:rPr sz="1700">
-                <a:solidFill>
-                  <a:srgbClr val="333333"/>
-                </a:solidFill>
-                <a:latin typeface="Calibri"/>
-              </a:rPr>
-              <a:t>- Leer desigualdad: comparar municipios por cultivo exige ver forma y colas, no solo la mediana</a:t>
-            </a:r>
-          </a:p>
-          <a:p>
-            <a:pPr>
-              <a:spcAft>
-                <a:spcPts val="1000"/>
-              </a:spcAft>
-            </a:pPr>
-            <a:r>
-              <a:rPr sz="1700">
-                <a:solidFill>
-                  <a:srgbClr val="333333"/>
-                </a:solidFill>
-                <a:latin typeface="Calibri"/>
-              </a:rPr>
-              <a:t>- Priorizar: donde hay cola pesada (tomate, maiz) el techo de rendimiento es la conversacion</a:t>
-            </a:r>
-          </a:p>
-          <a:p>
-            <a:pPr>
-              <a:spcAft>
-                <a:spcPts val="1000"/>
-              </a:spcAft>
-            </a:pPr>
-            <a:r>
-              <a:rPr sz="1700">
-                <a:solidFill>
-                  <a:srgbClr val="333333"/>
-                </a:solidFill>
-                <a:latin typeface="Calibri"/>
-              </a:rPr>
-              <a:t>- Decidir con honestidad: un solo grafico puede ocultar la pila (cacao) o el sesgo (cafe)</a:t>
-            </a:r>
-          </a:p>
-          <a:p>
-            <a:pPr>
-              <a:spcAft>
-                <a:spcPts val="1000"/>
-              </a:spcAft>
-            </a:pPr>
-            <a:r>
-              <a:rPr sz="1700">
-                <a:solidFill>
-                  <a:srgbClr val="333333"/>
-                </a:solidFill>
-                <a:latin typeface="Calibri"/>
-              </a:rPr>
-              <a:t>- Regla practica: si la pregunta es sobre la cola, la caja sola no alcanza</a:t>
+            <a:off x="777240" y="1463039"/>
+            <a:ext cx="3154680" cy="292608"/>
+          </a:xfrm>
+          <a:prstGeom prst="rect">
+            <a:avLst/>
+          </a:prstGeom>
+          <a:noFill/>
+        </p:spPr>
+        <p:txBody>
+          <a:bodyPr wrap="square" anchor="t">
+            <a:spAutoFit/>
+          </a:bodyPr>
+          <a:lstStyle/>
+          <a:p>
+            <a:pPr algn="l">
+              <a:spcAft>
+                <a:spcPts val="400"/>
+              </a:spcAft>
+            </a:pPr>
+            <a:r>
+              <a:rPr sz="1000" b="1">
+                <a:solidFill>
+                  <a:srgbClr val="0B5394"/>
+                </a:solidFill>
+                <a:latin typeface="Aptos"/>
+              </a:rPr>
+              <a:t>LO QUE SE CORRIGIÓ</a:t>
             </a:r>
           </a:p>
         </p:txBody>
@@ -4332,326 +4832,689 @@
         </p:nvSpPr>
         <p:spPr>
           <a:xfrm>
-            <a:off x="548640" y="6419088"/>
-            <a:ext cx="11064240" cy="365760"/>
-          </a:xfrm>
-          <a:prstGeom prst="rect">
-            <a:avLst/>
-          </a:prstGeom>
-          <a:noFill/>
-        </p:spPr>
-        <p:txBody>
-          <a:bodyPr wrap="none">
-            <a:spAutoFit/>
-          </a:bodyPr>
-          <a:lstStyle/>
-          <a:p>
-            <a:pPr algn="l">
-              <a:spcAft>
-                <a:spcPts val="600"/>
-              </a:spcAft>
-            </a:pPr>
-            <a:r>
-              <a:rPr sz="1000" b="0">
-                <a:solidFill>
-                  <a:srgbClr val="666666"/>
-                </a:solidFill>
-                <a:latin typeface="Calibri"/>
-              </a:rPr>
-              <a:t>Fuente: EVA 2019-2025 (UPRA) - datos.gov.co/d/uejq-wxrr</a:t>
-            </a:r>
-          </a:p>
-        </p:txBody>
-      </p:sp>
-    </p:spTree>
-  </p:cSld>
-  <p:clrMapOvr>
-    <a:masterClrMapping/>
-  </p:clrMapOvr>
-</p:sld>
-</file>
-
-<file path=ppt/slides/slide14.xml><?xml version="1.0" encoding="utf-8"?>
-<p:sld xmlns:a="http://schemas.openxmlformats.org/drawingml/2006/main" xmlns:p="http://schemas.openxmlformats.org/presentationml/2006/main" xmlns:r="http://schemas.openxmlformats.org/officeDocument/2006/relationships">
-  <p:cSld>
-    <p:spTree>
-      <p:nvGrpSpPr>
-        <p:cNvPr id="1" name=""/>
-        <p:cNvGrpSpPr/>
-        <p:nvPr/>
-      </p:nvGrpSpPr>
-      <p:grpSpPr/>
-      <p:sp>
-        <p:nvSpPr>
-          <p:cNvPr id="2" name="TextBox 1"/>
-          <p:cNvSpPr txBox="1"/>
-          <p:nvPr/>
-        </p:nvSpPr>
-        <p:spPr>
-          <a:xfrm>
-            <a:off x="548640" y="292608"/>
-            <a:ext cx="11064240" cy="365760"/>
-          </a:xfrm>
-          <a:prstGeom prst="rect">
-            <a:avLst/>
-          </a:prstGeom>
-          <a:noFill/>
-        </p:spPr>
-        <p:txBody>
-          <a:bodyPr wrap="none">
-            <a:spAutoFit/>
-          </a:bodyPr>
-          <a:lstStyle/>
-          <a:p>
-            <a:pPr algn="l">
-              <a:spcAft>
-                <a:spcPts val="600"/>
-              </a:spcAft>
-            </a:pPr>
-            <a:r>
-              <a:rPr sz="1300" b="1">
-                <a:solidFill>
-                  <a:srgbClr val="B03A2B"/>
-                </a:solidFill>
-                <a:latin typeface="Calibri"/>
-              </a:rPr>
-              <a:t>CIERRE</a:t>
-            </a:r>
-          </a:p>
-        </p:txBody>
-      </p:sp>
-      <p:sp>
-        <p:nvSpPr>
-          <p:cNvPr id="3" name="TextBox 2"/>
-          <p:cNvSpPr txBox="1"/>
-          <p:nvPr/>
-        </p:nvSpPr>
-        <p:spPr>
-          <a:xfrm>
-            <a:off x="548640" y="566928"/>
-            <a:ext cx="11064240" cy="731520"/>
-          </a:xfrm>
-          <a:prstGeom prst="rect">
-            <a:avLst/>
-          </a:prstGeom>
-          <a:noFill/>
-        </p:spPr>
-        <p:txBody>
-          <a:bodyPr wrap="none">
-            <a:spAutoFit/>
-          </a:bodyPr>
-          <a:lstStyle/>
-          <a:p>
-            <a:pPr algn="l">
-              <a:spcAft>
-                <a:spcPts val="600"/>
-              </a:spcAft>
-            </a:pPr>
-            <a:r>
-              <a:rPr sz="2800" b="1">
-                <a:solidFill>
-                  <a:srgbClr val="1F3A5F"/>
-                </a:solidFill>
-                <a:latin typeface="Calibri"/>
-              </a:rPr>
-              <a:t>En una frase</a:t>
-            </a:r>
-          </a:p>
-        </p:txBody>
-      </p:sp>
-      <p:sp>
-        <p:nvSpPr>
-          <p:cNvPr id="4" name="TextBox 3"/>
-          <p:cNvSpPr txBox="1"/>
-          <p:nvPr/>
-        </p:nvSpPr>
-        <p:spPr>
-          <a:xfrm>
-            <a:off x="548640" y="1225296"/>
-            <a:ext cx="11064240" cy="91440"/>
-          </a:xfrm>
-          <a:prstGeom prst="rect">
-            <a:avLst/>
-          </a:prstGeom>
-          <a:noFill/>
-        </p:spPr>
-        <p:txBody>
-          <a:bodyPr wrap="none">
-            <a:spAutoFit/>
-          </a:bodyPr>
-          <a:lstStyle/>
-          <a:p>
-            <a:pPr algn="l">
-              <a:spcAft>
-                <a:spcPts val="600"/>
-              </a:spcAft>
-            </a:pPr>
-            <a:r>
-              <a:rPr sz="200" b="0">
-                <a:solidFill>
-                  <a:srgbClr val="B03A2B"/>
-                </a:solidFill>
-                <a:latin typeface="Calibri"/>
-              </a:rPr>
-              <a:t> </a:t>
-            </a:r>
-          </a:p>
-        </p:txBody>
-      </p:sp>
-      <p:sp>
-        <p:nvSpPr>
-          <p:cNvPr id="5" name="TextBox 4"/>
-          <p:cNvSpPr txBox="1"/>
-          <p:nvPr/>
-        </p:nvSpPr>
-        <p:spPr>
-          <a:xfrm>
-            <a:off x="548640" y="1463040"/>
-            <a:ext cx="11064240" cy="4937760"/>
-          </a:xfrm>
-          <a:prstGeom prst="rect">
-            <a:avLst/>
-          </a:prstGeom>
-          <a:noFill/>
-        </p:spPr>
-        <p:txBody>
-          <a:bodyPr wrap="square">
-            <a:spAutoFit/>
-          </a:bodyPr>
-          <a:lstStyle/>
-          <a:p>
-            <a:pPr algn="l">
-              <a:spcAft>
-                <a:spcPts val="600"/>
-              </a:spcAft>
-            </a:pPr>
-            <a:r>
-              <a:rPr sz="2600" b="1">
-                <a:solidFill>
-                  <a:srgbClr val="B03A2B"/>
-                </a:solidFill>
-                <a:latin typeface="Calibri"/>
-              </a:rPr>
-              <a:t>El grafico correcto no sale del dato ni de la libreria: sale de la pregunta.</a:t>
-            </a:r>
-          </a:p>
-          <a:p>
-            <a:pPr algn="l">
-              <a:spcAft>
-                <a:spcPts val="600"/>
-              </a:spcAft>
-            </a:pPr>
-            <a:r>
-              <a:rPr sz="1000" b="0">
-                <a:solidFill>
-                  <a:srgbClr val="333333"/>
-                </a:solidFill>
-                <a:latin typeface="Calibri"/>
-              </a:rPr>
-              <a:t/>
-            </a:r>
-          </a:p>
-          <a:p>
-            <a:pPr algn="l">
-              <a:spcAft>
-                <a:spcPts val="600"/>
-              </a:spcAft>
-            </a:pPr>
-            <a:r>
-              <a:rPr sz="1800" b="0">
-                <a:solidFill>
-                  <a:srgbClr val="333333"/>
-                </a:solidFill>
-                <a:latin typeface="Calibri"/>
-              </a:rPr>
-              <a:t>Las cinco variaciones no son adornos: cada una tapa un agujero distinto del boxplot clasico. Y el agujero siempre se puede escribir antes de dibujar.</a:t>
-            </a:r>
-          </a:p>
-          <a:p>
-            <a:pPr algn="l">
-              <a:spcAft>
-                <a:spcPts val="600"/>
-              </a:spcAft>
-            </a:pPr>
-            <a:r>
-              <a:rPr sz="1000" b="0">
-                <a:solidFill>
-                  <a:srgbClr val="333333"/>
-                </a:solidFill>
-                <a:latin typeface="Calibri"/>
-              </a:rPr>
-              <a:t/>
-            </a:r>
-          </a:p>
-          <a:p>
-            <a:pPr algn="l">
-              <a:spcAft>
-                <a:spcPts val="600"/>
+            <a:off x="777240" y="1783080"/>
+            <a:ext cx="3154680" cy="3639311"/>
+          </a:xfrm>
+          <a:prstGeom prst="rect">
+            <a:avLst/>
+          </a:prstGeom>
+          <a:noFill/>
+        </p:spPr>
+        <p:txBody>
+          <a:bodyPr wrap="square" anchor="t">
+            <a:spAutoFit/>
+          </a:bodyPr>
+          <a:lstStyle/>
+          <a:p>
+            <a:pPr algn="l">
+              <a:spcAft>
+                <a:spcPts val="400"/>
               </a:spcAft>
             </a:pPr>
             <a:r>
               <a:rPr sz="1500" b="0">
                 <a:solidFill>
-                  <a:srgbClr val="666666"/>
-                </a:solidFill>
-                <a:latin typeface="Calibri"/>
-              </a:rPr>
-              <a:t>Cuaderno reproducible: boxplots_modernos_EVA.ipynb</a:t>
-            </a:r>
-          </a:p>
-          <a:p>
-            <a:pPr algn="l">
-              <a:spcAft>
-                <a:spcPts val="600"/>
+                  <a:srgbClr val="202124"/>
+                </a:solidFill>
+                <a:latin typeface="Aptos"/>
+              </a:rPr>
+              <a:t>Forma y densidad: Half-Eye y Ridge.</a:t>
+            </a:r>
+          </a:p>
+          <a:p>
+            <a:pPr algn="l">
+              <a:spcAft>
+                <a:spcPts val="400"/>
+              </a:spcAft>
+            </a:pPr>
+          </a:p>
+          <a:p>
+            <a:pPr algn="l">
+              <a:spcAft>
+                <a:spcPts val="400"/>
               </a:spcAft>
             </a:pPr>
             <a:r>
               <a:rPr sz="1500" b="0">
                 <a:solidFill>
-                  <a:srgbClr val="666666"/>
-                </a:solidFill>
-                <a:latin typeface="Calibri"/>
-              </a:rPr>
-              <a:t>Cuatro preguntas por figura: el numero cuadra, la forma cuadra, responde, y algo cambia.</a:t>
-            </a:r>
-          </a:p>
-        </p:txBody>
-      </p:sp>
-      <p:sp>
-        <p:nvSpPr>
-          <p:cNvPr id="6" name="TextBox 5"/>
-          <p:cNvSpPr txBox="1"/>
-          <p:nvPr/>
-        </p:nvSpPr>
-        <p:spPr>
-          <a:xfrm>
-            <a:off x="548640" y="6419088"/>
-            <a:ext cx="11064240" cy="365760"/>
-          </a:xfrm>
-          <a:prstGeom prst="rect">
-            <a:avLst/>
-          </a:prstGeom>
-          <a:noFill/>
-        </p:spPr>
-        <p:txBody>
-          <a:bodyPr wrap="none">
-            <a:spAutoFit/>
-          </a:bodyPr>
-          <a:lstStyle/>
-          <a:p>
-            <a:pPr algn="l">
-              <a:spcAft>
-                <a:spcPts val="600"/>
-              </a:spcAft>
-            </a:pPr>
-            <a:r>
-              <a:rPr sz="1000" b="0">
-                <a:solidFill>
-                  <a:srgbClr val="666666"/>
-                </a:solidFill>
-                <a:latin typeface="Calibri"/>
-              </a:rPr>
-              <a:t>Fuente: EVA 2019-2025 (UPRA) - datos.gov.co/d/uejq-wxrr</a:t>
+                  <a:srgbClr val="202124"/>
+                </a:solidFill>
+                <a:latin typeface="Aptos"/>
+              </a:rPr>
+              <a:t>Pilas de observaciones: Sinaplot.</a:t>
+            </a:r>
+          </a:p>
+          <a:p>
+            <a:pPr algn="l">
+              <a:spcAft>
+                <a:spcPts val="400"/>
+              </a:spcAft>
+            </a:pPr>
+          </a:p>
+          <a:p>
+            <a:pPr algn="l">
+              <a:spcAft>
+                <a:spcPts val="400"/>
+              </a:spcAft>
+            </a:pPr>
+            <a:r>
+              <a:rPr sz="1500" b="0">
+                <a:solidFill>
+                  <a:srgbClr val="202124"/>
+                </a:solidFill>
+                <a:latin typeface="Aptos"/>
+              </a:rPr>
+              <a:t>Colas con N grande: Boxenplot.</a:t>
+            </a:r>
+          </a:p>
+          <a:p>
+            <a:pPr algn="l">
+              <a:spcAft>
+                <a:spcPts val="400"/>
+              </a:spcAft>
+            </a:pPr>
+          </a:p>
+          <a:p>
+            <a:pPr algn="l">
+              <a:spcAft>
+                <a:spcPts val="400"/>
+              </a:spcAft>
+            </a:pPr>
+            <a:r>
+              <a:rPr sz="1500" b="0">
+                <a:solidFill>
+                  <a:srgbClr val="202124"/>
+                </a:solidFill>
+                <a:latin typeface="Aptos"/>
+              </a:rPr>
+              <a:t>Media, mediana y cuantiles juntos: Composite.</a:t>
+            </a:r>
+          </a:p>
+        </p:txBody>
+      </p:sp>
+      <p:sp>
+        <p:nvSpPr>
+          <p:cNvPr id="7" name="Rounded Rectangle 6"/>
+          <p:cNvSpPr/>
+          <p:nvPr/>
+        </p:nvSpPr>
+        <p:spPr>
+          <a:xfrm>
+            <a:off x="4334256" y="1325880"/>
+            <a:ext cx="3520440" cy="4206240"/>
+          </a:xfrm>
+          <a:prstGeom prst="roundRect">
+            <a:avLst/>
+          </a:prstGeom>
+          <a:solidFill>
+            <a:srgbClr val="F2F2F2"/>
+          </a:solidFill>
+          <a:ln w="12700">
+            <a:solidFill>
+              <a:srgbClr val="0B5394"/>
+            </a:solidFill>
+          </a:ln>
+        </p:spPr>
+        <p:style>
+          <a:lnRef idx="1">
+            <a:schemeClr val="accent1"/>
+          </a:lnRef>
+          <a:fillRef idx="3">
+            <a:schemeClr val="accent1"/>
+          </a:fillRef>
+          <a:effectRef idx="2">
+            <a:schemeClr val="accent1"/>
+          </a:effectRef>
+          <a:fontRef idx="minor">
+            <a:schemeClr val="lt1"/>
+          </a:fontRef>
+        </p:style>
+        <p:txBody>
+          <a:bodyPr rtlCol="0" anchor="ctr"/>
+          <a:lstStyle/>
+          <a:p>
+            <a:pPr algn="ctr"/>
+          </a:p>
+        </p:txBody>
+      </p:sp>
+      <p:sp>
+        <p:nvSpPr>
+          <p:cNvPr id="8" name="TextBox 7"/>
+          <p:cNvSpPr txBox="1"/>
+          <p:nvPr/>
+        </p:nvSpPr>
+        <p:spPr>
+          <a:xfrm>
+            <a:off x="4517136" y="1463039"/>
+            <a:ext cx="3154680" cy="292608"/>
+          </a:xfrm>
+          <a:prstGeom prst="rect">
+            <a:avLst/>
+          </a:prstGeom>
+          <a:noFill/>
+        </p:spPr>
+        <p:txBody>
+          <a:bodyPr wrap="square" anchor="t">
+            <a:spAutoFit/>
+          </a:bodyPr>
+          <a:lstStyle/>
+          <a:p>
+            <a:pPr algn="l">
+              <a:spcAft>
+                <a:spcPts val="400"/>
+              </a:spcAft>
+            </a:pPr>
+            <a:r>
+              <a:rPr sz="1000" b="1">
+                <a:solidFill>
+                  <a:srgbClr val="0B5394"/>
+                </a:solidFill>
+                <a:latin typeface="Aptos"/>
+              </a:rPr>
+              <a:t>REGLAS DE LECTURA</a:t>
+            </a:r>
+          </a:p>
+        </p:txBody>
+      </p:sp>
+      <p:sp>
+        <p:nvSpPr>
+          <p:cNvPr id="9" name="TextBox 8"/>
+          <p:cNvSpPr txBox="1"/>
+          <p:nvPr/>
+        </p:nvSpPr>
+        <p:spPr>
+          <a:xfrm>
+            <a:off x="4517136" y="1783080"/>
+            <a:ext cx="3154680" cy="3639311"/>
+          </a:xfrm>
+          <a:prstGeom prst="rect">
+            <a:avLst/>
+          </a:prstGeom>
+          <a:noFill/>
+        </p:spPr>
+        <p:txBody>
+          <a:bodyPr wrap="square" anchor="t">
+            <a:spAutoFit/>
+          </a:bodyPr>
+          <a:lstStyle/>
+          <a:p>
+            <a:pPr algn="l">
+              <a:spcAft>
+                <a:spcPts val="400"/>
+              </a:spcAft>
+            </a:pPr>
+            <a:r>
+              <a:rPr sz="1500" b="0">
+                <a:solidFill>
+                  <a:srgbClr val="202124"/>
+                </a:solidFill>
+                <a:latin typeface="Aptos"/>
+              </a:rPr>
+              <a:t>Título conclusivo y verdadero.</a:t>
+            </a:r>
+          </a:p>
+          <a:p>
+            <a:pPr algn="l">
+              <a:spcAft>
+                <a:spcPts val="400"/>
+              </a:spcAft>
+            </a:pPr>
+          </a:p>
+          <a:p>
+            <a:pPr algn="l">
+              <a:spcAft>
+                <a:spcPts val="400"/>
+              </a:spcAft>
+            </a:pPr>
+            <a:r>
+              <a:rPr sz="1500" b="0">
+                <a:solidFill>
+                  <a:srgbClr val="202124"/>
+                </a:solidFill>
+                <a:latin typeface="Aptos"/>
+              </a:rPr>
+              <a:t>Ejes con unidad y escala declarada.</a:t>
+            </a:r>
+          </a:p>
+          <a:p>
+            <a:pPr algn="l">
+              <a:spcAft>
+                <a:spcPts val="400"/>
+              </a:spcAft>
+            </a:pPr>
+          </a:p>
+          <a:p>
+            <a:pPr algn="l">
+              <a:spcAft>
+                <a:spcPts val="400"/>
+              </a:spcAft>
+            </a:pPr>
+            <a:r>
+              <a:rPr sz="1500" b="0">
+                <a:solidFill>
+                  <a:srgbClr val="202124"/>
+                </a:solidFill>
+                <a:latin typeface="Aptos"/>
+              </a:rPr>
+              <a:t>N visible por grupo.</a:t>
+            </a:r>
+          </a:p>
+          <a:p>
+            <a:pPr algn="l">
+              <a:spcAft>
+                <a:spcPts val="400"/>
+              </a:spcAft>
+            </a:pPr>
+          </a:p>
+          <a:p>
+            <a:pPr algn="l">
+              <a:spcAft>
+                <a:spcPts val="400"/>
+              </a:spcAft>
+            </a:pPr>
+            <a:r>
+              <a:rPr sz="1500" b="0">
+                <a:solidFill>
+                  <a:srgbClr val="202124"/>
+                </a:solidFill>
+                <a:latin typeface="Aptos"/>
+              </a:rPr>
+              <a:t>Orden por mediana; p99 para desempates.</a:t>
+            </a:r>
+          </a:p>
+          <a:p>
+            <a:pPr algn="l">
+              <a:spcAft>
+                <a:spcPts val="400"/>
+              </a:spcAft>
+            </a:pPr>
+          </a:p>
+          <a:p>
+            <a:pPr algn="l">
+              <a:spcAft>
+                <a:spcPts val="400"/>
+              </a:spcAft>
+            </a:pPr>
+            <a:r>
+              <a:rPr sz="1500" b="0">
+                <a:solidFill>
+                  <a:srgbClr val="202124"/>
+                </a:solidFill>
+                <a:latin typeface="Aptos"/>
+              </a:rPr>
+              <a:t>Fuente y datos reales visibles.</a:t>
+            </a:r>
+          </a:p>
+        </p:txBody>
+      </p:sp>
+      <p:sp>
+        <p:nvSpPr>
+          <p:cNvPr id="10" name="Rounded Rectangle 9"/>
+          <p:cNvSpPr/>
+          <p:nvPr/>
+        </p:nvSpPr>
+        <p:spPr>
+          <a:xfrm>
+            <a:off x="8074152" y="1325880"/>
+            <a:ext cx="3520440" cy="4206240"/>
+          </a:xfrm>
+          <a:prstGeom prst="roundRect">
+            <a:avLst/>
+          </a:prstGeom>
+          <a:solidFill>
+            <a:srgbClr val="F2F2F2"/>
+          </a:solidFill>
+          <a:ln w="12700">
+            <a:solidFill>
+              <a:srgbClr val="0B5394"/>
+            </a:solidFill>
+          </a:ln>
+        </p:spPr>
+        <p:style>
+          <a:lnRef idx="1">
+            <a:schemeClr val="accent1"/>
+          </a:lnRef>
+          <a:fillRef idx="3">
+            <a:schemeClr val="accent1"/>
+          </a:fillRef>
+          <a:effectRef idx="2">
+            <a:schemeClr val="accent1"/>
+          </a:effectRef>
+          <a:fontRef idx="minor">
+            <a:schemeClr val="lt1"/>
+          </a:fontRef>
+        </p:style>
+        <p:txBody>
+          <a:bodyPr rtlCol="0" anchor="ctr"/>
+          <a:lstStyle/>
+          <a:p>
+            <a:pPr algn="ctr"/>
+          </a:p>
+        </p:txBody>
+      </p:sp>
+      <p:sp>
+        <p:nvSpPr>
+          <p:cNvPr id="11" name="TextBox 10"/>
+          <p:cNvSpPr txBox="1"/>
+          <p:nvPr/>
+        </p:nvSpPr>
+        <p:spPr>
+          <a:xfrm>
+            <a:off x="8257031" y="1463039"/>
+            <a:ext cx="3154680" cy="292608"/>
+          </a:xfrm>
+          <a:prstGeom prst="rect">
+            <a:avLst/>
+          </a:prstGeom>
+          <a:noFill/>
+        </p:spPr>
+        <p:txBody>
+          <a:bodyPr wrap="square" anchor="t">
+            <a:spAutoFit/>
+          </a:bodyPr>
+          <a:lstStyle/>
+          <a:p>
+            <a:pPr algn="l">
+              <a:spcAft>
+                <a:spcPts val="400"/>
+              </a:spcAft>
+            </a:pPr>
+            <a:r>
+              <a:rPr sz="1000" b="1">
+                <a:solidFill>
+                  <a:srgbClr val="0B5394"/>
+                </a:solidFill>
+                <a:latin typeface="Aptos"/>
+              </a:rPr>
+              <a:t>ENTREGA</a:t>
+            </a:r>
+          </a:p>
+        </p:txBody>
+      </p:sp>
+      <p:sp>
+        <p:nvSpPr>
+          <p:cNvPr id="12" name="TextBox 11"/>
+          <p:cNvSpPr txBox="1"/>
+          <p:nvPr/>
+        </p:nvSpPr>
+        <p:spPr>
+          <a:xfrm>
+            <a:off x="8257031" y="1783080"/>
+            <a:ext cx="3154680" cy="3639311"/>
+          </a:xfrm>
+          <a:prstGeom prst="rect">
+            <a:avLst/>
+          </a:prstGeom>
+          <a:noFill/>
+        </p:spPr>
+        <p:txBody>
+          <a:bodyPr wrap="square" anchor="t">
+            <a:spAutoFit/>
+          </a:bodyPr>
+          <a:lstStyle/>
+          <a:p>
+            <a:pPr algn="l">
+              <a:spcAft>
+                <a:spcPts val="400"/>
+              </a:spcAft>
+            </a:pPr>
+            <a:r>
+              <a:rPr sz="1500" b="0">
+                <a:solidFill>
+                  <a:srgbClr val="202124"/>
+                </a:solidFill>
+                <a:latin typeface="Aptos"/>
+              </a:rPr>
+              <a:t>Presentación: este archivo.</a:t>
+            </a:r>
+          </a:p>
+          <a:p>
+            <a:pPr algn="l">
+              <a:spcAft>
+                <a:spcPts val="400"/>
+              </a:spcAft>
+            </a:pPr>
+          </a:p>
+          <a:p>
+            <a:pPr algn="l">
+              <a:spcAft>
+                <a:spcPts val="400"/>
+              </a:spcAft>
+            </a:pPr>
+            <a:r>
+              <a:rPr sz="1500" b="0">
+                <a:solidFill>
+                  <a:srgbClr val="202124"/>
+                </a:solidFill>
+                <a:latin typeface="Aptos"/>
+              </a:rPr>
+              <a:t>Reproducible: boxplots_modernos_EVA.ipynb.</a:t>
+            </a:r>
+          </a:p>
+          <a:p>
+            <a:pPr algn="l">
+              <a:spcAft>
+                <a:spcPts val="400"/>
+              </a:spcAft>
+            </a:pPr>
+          </a:p>
+          <a:p>
+            <a:pPr algn="l">
+              <a:spcAft>
+                <a:spcPts val="400"/>
+              </a:spcAft>
+            </a:pPr>
+            <a:r>
+              <a:rPr sz="1500" b="0">
+                <a:solidFill>
+                  <a:srgbClr val="202124"/>
+                </a:solidFill>
+                <a:latin typeface="Aptos"/>
+              </a:rPr>
+              <a:t>Interactivos: cinco HTML Plotly.</a:t>
+            </a:r>
+          </a:p>
+          <a:p>
+            <a:pPr algn="l">
+              <a:spcAft>
+                <a:spcPts val="400"/>
+              </a:spcAft>
+            </a:pPr>
+          </a:p>
+          <a:p>
+            <a:pPr algn="l">
+              <a:spcAft>
+                <a:spcPts val="400"/>
+              </a:spcAft>
+            </a:pPr>
+            <a:r>
+              <a:rPr sz="1500" b="0">
+                <a:solidFill>
+                  <a:srgbClr val="202124"/>
+                </a:solidFill>
+                <a:latin typeface="Aptos"/>
+              </a:rPr>
+              <a:t>Capturas: cinco PNG.</a:t>
+            </a:r>
+          </a:p>
+          <a:p>
+            <a:pPr algn="l">
+              <a:spcAft>
+                <a:spcPts val="400"/>
+              </a:spcAft>
+            </a:pPr>
+          </a:p>
+          <a:p>
+            <a:pPr algn="l">
+              <a:spcAft>
+                <a:spcPts val="400"/>
+              </a:spcAft>
+            </a:pPr>
+            <a:r>
+              <a:rPr sz="1500" b="0">
+                <a:solidFill>
+                  <a:srgbClr val="202124"/>
+                </a:solidFill>
+                <a:latin typeface="Aptos"/>
+              </a:rPr>
+              <a:t>Interpretaciones: interpretaciones.json.</a:t>
+            </a:r>
+          </a:p>
+        </p:txBody>
+      </p:sp>
+      <p:sp>
+        <p:nvSpPr>
+          <p:cNvPr id="13" name="TextBox 12"/>
+          <p:cNvSpPr txBox="1"/>
+          <p:nvPr/>
+        </p:nvSpPr>
+        <p:spPr>
+          <a:xfrm>
+            <a:off x="640080" y="5806440"/>
+            <a:ext cx="10972800" cy="320040"/>
+          </a:xfrm>
+          <a:prstGeom prst="rect">
+            <a:avLst/>
+          </a:prstGeom>
+          <a:noFill/>
+        </p:spPr>
+        <p:txBody>
+          <a:bodyPr wrap="square" anchor="t">
+            <a:spAutoFit/>
+          </a:bodyPr>
+          <a:lstStyle/>
+          <a:p>
+            <a:pPr algn="ctr">
+              <a:spcAft>
+                <a:spcPts val="400"/>
+              </a:spcAft>
+            </a:pPr>
+            <a:r>
+              <a:rPr sz="1500" b="1">
+                <a:solidFill>
+                  <a:srgbClr val="0B5394"/>
+                </a:solidFill>
+                <a:latin typeface="Aptos"/>
+              </a:rPr>
+              <a:t>El boxplot clásico resume; estas cinco variaciones devuelven forma, densidad, colas y sesgo a la decisión.</a:t>
+            </a:r>
+          </a:p>
+        </p:txBody>
+      </p:sp>
+      <p:sp>
+        <p:nvSpPr>
+          <p:cNvPr id="14" name="TextBox 13"/>
+          <p:cNvSpPr txBox="1"/>
+          <p:nvPr/>
+        </p:nvSpPr>
+        <p:spPr>
+          <a:xfrm>
+            <a:off x="594360" y="6492240"/>
+            <a:ext cx="7315200" cy="201168"/>
+          </a:xfrm>
+          <a:prstGeom prst="rect">
+            <a:avLst/>
+          </a:prstGeom>
+          <a:noFill/>
+        </p:spPr>
+        <p:txBody>
+          <a:bodyPr wrap="square" anchor="t">
+            <a:spAutoFit/>
+          </a:bodyPr>
+          <a:lstStyle/>
+          <a:p>
+            <a:pPr algn="l">
+              <a:spcAft>
+                <a:spcPts val="400"/>
+              </a:spcAft>
+            </a:pPr>
+            <a:r>
+              <a:rPr sz="900" b="0">
+                <a:solidFill>
+                  <a:srgbClr val="5A5A5A"/>
+                </a:solidFill>
+                <a:latin typeface="Aptos"/>
+              </a:rPr>
+              <a:t>Fuente: EVA 2019–2025 (UPRA) · datos.gov.co</a:t>
+            </a:r>
+          </a:p>
+        </p:txBody>
+      </p:sp>
+      <p:sp>
+        <p:nvSpPr>
+          <p:cNvPr id="15" name="TextBox 14"/>
+          <p:cNvSpPr txBox="1"/>
+          <p:nvPr/>
+        </p:nvSpPr>
+        <p:spPr>
+          <a:xfrm>
+            <a:off x="7955279" y="6492240"/>
+            <a:ext cx="3383280" cy="201168"/>
+          </a:xfrm>
+          <a:prstGeom prst="rect">
+            <a:avLst/>
+          </a:prstGeom>
+          <a:noFill/>
+        </p:spPr>
+        <p:txBody>
+          <a:bodyPr wrap="square" anchor="t">
+            <a:spAutoFit/>
+          </a:bodyPr>
+          <a:lstStyle/>
+          <a:p>
+            <a:pPr algn="r">
+              <a:spcAft>
+                <a:spcPts val="400"/>
+              </a:spcAft>
+            </a:pPr>
+            <a:r>
+              <a:rPr sz="900" b="0">
+                <a:solidFill>
+                  <a:srgbClr val="0B5394"/>
+                </a:solidFill>
+                <a:latin typeface="Aptos"/>
+                <a:hlinkClick r:id="rId2"/>
+              </a:rPr>
+              <a:t>https://www.datos.gov.co/d/uejq-wxrr</a:t>
+            </a:r>
+          </a:p>
+        </p:txBody>
+      </p:sp>
+      <p:sp>
+        <p:nvSpPr>
+          <p:cNvPr id="16" name="TextBox 15"/>
+          <p:cNvSpPr txBox="1"/>
+          <p:nvPr/>
+        </p:nvSpPr>
+        <p:spPr>
+          <a:xfrm>
+            <a:off x="11384280" y="6492240"/>
+            <a:ext cx="228600" cy="201168"/>
+          </a:xfrm>
+          <a:prstGeom prst="rect">
+            <a:avLst/>
+          </a:prstGeom>
+          <a:noFill/>
+        </p:spPr>
+        <p:txBody>
+          <a:bodyPr wrap="square" anchor="t">
+            <a:spAutoFit/>
+          </a:bodyPr>
+          <a:lstStyle/>
+          <a:p>
+            <a:pPr algn="r">
+              <a:spcAft>
+                <a:spcPts val="400"/>
+              </a:spcAft>
+            </a:pPr>
+            <a:r>
+              <a:rPr sz="900" b="0">
+                <a:solidFill>
+                  <a:srgbClr val="5A5A5A"/>
+                </a:solidFill>
+                <a:latin typeface="Aptos"/>
+              </a:rPr>
+              <a:t>13</a:t>
             </a:r>
           </a:p>
         </p:txBody>
@@ -4682,33 +5545,33 @@
         </p:nvSpPr>
         <p:spPr>
           <a:xfrm>
-            <a:off x="548640" y="292608"/>
-            <a:ext cx="11064240" cy="365760"/>
-          </a:xfrm>
-          <a:prstGeom prst="rect">
-            <a:avLst/>
-          </a:prstGeom>
-          <a:noFill/>
-        </p:spPr>
-        <p:txBody>
-          <a:bodyPr wrap="none">
-            <a:spAutoFit/>
-          </a:bodyPr>
-          <a:lstStyle/>
-          <a:p>
-            <a:pPr algn="l">
-              <a:spcAft>
-                <a:spcPts val="600"/>
-              </a:spcAft>
-            </a:pPr>
-            <a:r>
-              <a:rPr sz="1300" b="1">
-                <a:solidFill>
-                  <a:srgbClr val="B03A2B"/>
-                </a:solidFill>
-                <a:latin typeface="Calibri"/>
-              </a:rPr>
-              <a:t>CONTEXTO</a:t>
+            <a:off x="594360" y="292608"/>
+            <a:ext cx="10972800" cy="502920"/>
+          </a:xfrm>
+          <a:prstGeom prst="rect">
+            <a:avLst/>
+          </a:prstGeom>
+          <a:noFill/>
+        </p:spPr>
+        <p:txBody>
+          <a:bodyPr wrap="square" anchor="t">
+            <a:spAutoFit/>
+          </a:bodyPr>
+          <a:lstStyle/>
+          <a:p>
+            <a:pPr algn="l">
+              <a:spcAft>
+                <a:spcPts val="400"/>
+              </a:spcAft>
+            </a:pPr>
+            <a:r>
+              <a:rPr sz="2500" b="1">
+                <a:solidFill>
+                  <a:srgbClr val="0B5394"/>
+                </a:solidFill>
+                <a:latin typeface="Aptos"/>
+              </a:rPr>
+              <a:t>Datos, método y entregables</a:t>
             </a:r>
           </a:p>
         </p:txBody>
@@ -4721,73 +5584,79 @@
         </p:nvSpPr>
         <p:spPr>
           <a:xfrm>
-            <a:off x="548640" y="566928"/>
-            <a:ext cx="11064240" cy="731520"/>
-          </a:xfrm>
-          <a:prstGeom prst="rect">
-            <a:avLst/>
-          </a:prstGeom>
-          <a:noFill/>
-        </p:spPr>
-        <p:txBody>
-          <a:bodyPr wrap="none">
-            <a:spAutoFit/>
-          </a:bodyPr>
-          <a:lstStyle/>
-          <a:p>
-            <a:pPr algn="l">
-              <a:spcAft>
-                <a:spcPts val="600"/>
-              </a:spcAft>
-            </a:pPr>
-            <a:r>
-              <a:rPr sz="2800" b="1">
-                <a:solidFill>
-                  <a:srgbClr val="1F3A5F"/>
-                </a:solidFill>
-                <a:latin typeface="Calibri"/>
-              </a:rPr>
-              <a:t>La pregunta</a:t>
-            </a:r>
-          </a:p>
-        </p:txBody>
-      </p:sp>
-      <p:sp>
-        <p:nvSpPr>
-          <p:cNvPr id="4" name="TextBox 3"/>
-          <p:cNvSpPr txBox="1"/>
-          <p:nvPr/>
-        </p:nvSpPr>
-        <p:spPr>
-          <a:xfrm>
-            <a:off x="548640" y="1225296"/>
-            <a:ext cx="11064240" cy="91440"/>
-          </a:xfrm>
-          <a:prstGeom prst="rect">
-            <a:avLst/>
-          </a:prstGeom>
-          <a:noFill/>
-        </p:spPr>
-        <p:txBody>
-          <a:bodyPr wrap="none">
-            <a:spAutoFit/>
-          </a:bodyPr>
-          <a:lstStyle/>
-          <a:p>
-            <a:pPr algn="l">
-              <a:spcAft>
-                <a:spcPts val="600"/>
-              </a:spcAft>
-            </a:pPr>
-            <a:r>
-              <a:rPr sz="200" b="0">
-                <a:solidFill>
-                  <a:srgbClr val="B03A2B"/>
-                </a:solidFill>
-                <a:latin typeface="Calibri"/>
-              </a:rPr>
-              <a:t> </a:t>
-            </a:r>
+            <a:off x="621792" y="822960"/>
+            <a:ext cx="10972800" cy="274320"/>
+          </a:xfrm>
+          <a:prstGeom prst="rect">
+            <a:avLst/>
+          </a:prstGeom>
+          <a:noFill/>
+        </p:spPr>
+        <p:txBody>
+          <a:bodyPr wrap="square" anchor="t">
+            <a:spAutoFit/>
+          </a:bodyPr>
+          <a:lstStyle/>
+          <a:p>
+            <a:pPr algn="l">
+              <a:spcAft>
+                <a:spcPts val="400"/>
+              </a:spcAft>
+            </a:pPr>
+            <a:r>
+              <a:rPr sz="1100" b="0">
+                <a:solidFill>
+                  <a:srgbClr val="5A5A5A"/>
+                </a:solidFill>
+                <a:latin typeface="Aptos"/>
+              </a:rPr>
+              <a:t>Una misma fuente abierta; cinco preguntas y cinco visualizaciones interactivas</a:t>
+            </a:r>
+          </a:p>
+        </p:txBody>
+      </p:sp>
+      <p:sp>
+        <p:nvSpPr>
+          <p:cNvPr id="4" name="Rounded Rectangle 3"/>
+          <p:cNvSpPr/>
+          <p:nvPr/>
+        </p:nvSpPr>
+        <p:spPr>
+          <a:xfrm>
+            <a:off x="594360" y="1325880"/>
+            <a:ext cx="3520440" cy="4434840"/>
+          </a:xfrm>
+          <a:prstGeom prst="roundRect">
+            <a:avLst/>
+          </a:prstGeom>
+          <a:solidFill>
+            <a:srgbClr val="F2F2F2"/>
+          </a:solidFill>
+          <a:ln w="12700">
+            <a:solidFill>
+              <a:srgbClr val="0B5394"/>
+            </a:solidFill>
+          </a:ln>
+        </p:spPr>
+        <p:style>
+          <a:lnRef idx="1">
+            <a:schemeClr val="accent1"/>
+          </a:lnRef>
+          <a:fillRef idx="3">
+            <a:schemeClr val="accent1"/>
+          </a:fillRef>
+          <a:effectRef idx="2">
+            <a:schemeClr val="accent1"/>
+          </a:effectRef>
+          <a:fontRef idx="minor">
+            <a:schemeClr val="lt1"/>
+          </a:fontRef>
+        </p:style>
+        <p:txBody>
+          <a:bodyPr rtlCol="0" anchor="ctr"/>
+          <a:lstStyle/>
+          <a:p>
+            <a:pPr algn="ctr"/>
           </a:p>
         </p:txBody>
       </p:sp>
@@ -4799,81 +5668,33 @@
         </p:nvSpPr>
         <p:spPr>
           <a:xfrm>
-            <a:off x="548640" y="1463040"/>
-            <a:ext cx="11064240" cy="4937760"/>
-          </a:xfrm>
-          <a:prstGeom prst="rect">
-            <a:avLst/>
-          </a:prstGeom>
-          <a:noFill/>
-        </p:spPr>
-        <p:txBody>
-          <a:bodyPr wrap="square">
-            <a:spAutoFit/>
-          </a:bodyPr>
-          <a:lstStyle/>
-          <a:p>
-            <a:pPr algn="l">
-              <a:spcAft>
-                <a:spcPts val="600"/>
-              </a:spcAft>
-            </a:pPr>
-            <a:r>
-              <a:rPr sz="2400" b="1">
-                <a:solidFill>
-                  <a:srgbClr val="333333"/>
-                </a:solidFill>
-                <a:latin typeface="Calibri"/>
-              </a:rPr>
-              <a:t>Que tan desigual es el rendimiento de un mismo cultivo entre municipios?</a:t>
-            </a:r>
-          </a:p>
-          <a:p>
-            <a:pPr algn="l">
-              <a:spcAft>
-                <a:spcPts val="600"/>
-              </a:spcAft>
-            </a:pPr>
-            <a:r>
-              <a:rPr sz="2400" b="1">
-                <a:solidFill>
-                  <a:srgbClr val="B03A2B"/>
-                </a:solidFill>
-                <a:latin typeface="Calibri"/>
-              </a:rPr>
-              <a:t>Y, sobre todo: que muestra cada grafico que el boxplot esconde?</a:t>
-            </a:r>
-          </a:p>
-          <a:p>
-            <a:pPr algn="l">
-              <a:spcAft>
-                <a:spcPts val="600"/>
-              </a:spcAft>
-            </a:pPr>
-            <a:r>
-              <a:rPr sz="1000" b="0">
-                <a:solidFill>
-                  <a:srgbClr val="333333"/>
-                </a:solidFill>
-                <a:latin typeface="Calibri"/>
-              </a:rPr>
-              <a:t/>
-            </a:r>
-          </a:p>
-          <a:p>
-            <a:pPr algn="l">
-              <a:spcAft>
-                <a:spcPts val="600"/>
-              </a:spcAft>
-            </a:pPr>
-            <a:r>
-              <a:rPr sz="1600" b="0">
-                <a:solidFill>
-                  <a:srgbClr val="666666"/>
-                </a:solidFill>
-                <a:latin typeface="Calibri"/>
-              </a:rPr>
-              <a:t>El boxplot clasico resume una distribucion en cinco numeros. En datos de rendimiento agricola, apretados, con colas y con pilas muy marcadas, esos cinco numeros no cuentan toda la historia.</a:t>
+            <a:off x="777240" y="1463039"/>
+            <a:ext cx="3154680" cy="292608"/>
+          </a:xfrm>
+          <a:prstGeom prst="rect">
+            <a:avLst/>
+          </a:prstGeom>
+          <a:noFill/>
+        </p:spPr>
+        <p:txBody>
+          <a:bodyPr wrap="square" anchor="t">
+            <a:spAutoFit/>
+          </a:bodyPr>
+          <a:lstStyle/>
+          <a:p>
+            <a:pPr algn="l">
+              <a:spcAft>
+                <a:spcPts val="400"/>
+              </a:spcAft>
+            </a:pPr>
+            <a:r>
+              <a:rPr sz="1000" b="1">
+                <a:solidFill>
+                  <a:srgbClr val="0B5394"/>
+                </a:solidFill>
+                <a:latin typeface="Aptos"/>
+              </a:rPr>
+              <a:t>DATASET REAL</a:t>
             </a:r>
           </a:p>
         </p:txBody>
@@ -4886,33 +5707,535 @@
         </p:nvSpPr>
         <p:spPr>
           <a:xfrm>
-            <a:off x="548640" y="6419088"/>
-            <a:ext cx="11064240" cy="365760"/>
-          </a:xfrm>
-          <a:prstGeom prst="rect">
-            <a:avLst/>
-          </a:prstGeom>
-          <a:noFill/>
-        </p:spPr>
-        <p:txBody>
-          <a:bodyPr wrap="none">
-            <a:spAutoFit/>
-          </a:bodyPr>
-          <a:lstStyle/>
-          <a:p>
-            <a:pPr algn="l">
-              <a:spcAft>
-                <a:spcPts val="600"/>
-              </a:spcAft>
-            </a:pPr>
-            <a:r>
-              <a:rPr sz="1000" b="0">
-                <a:solidFill>
-                  <a:srgbClr val="666666"/>
-                </a:solidFill>
-                <a:latin typeface="Calibri"/>
-              </a:rPr>
-              <a:t>Fuente: EVA 2019-2025 (UPRA) - datos.gov.co/d/uejq-wxrr</a:t>
+            <a:off x="777240" y="1783080"/>
+            <a:ext cx="3154680" cy="3867911"/>
+          </a:xfrm>
+          <a:prstGeom prst="rect">
+            <a:avLst/>
+          </a:prstGeom>
+          <a:noFill/>
+        </p:spPr>
+        <p:txBody>
+          <a:bodyPr wrap="square" anchor="t">
+            <a:spAutoFit/>
+          </a:bodyPr>
+          <a:lstStyle/>
+          <a:p>
+            <a:pPr algn="l">
+              <a:spcAft>
+                <a:spcPts val="400"/>
+              </a:spcAft>
+            </a:pPr>
+            <a:r>
+              <a:rPr sz="1500" b="0">
+                <a:solidFill>
+                  <a:srgbClr val="202124"/>
+                </a:solidFill>
+                <a:latin typeface="Aptos"/>
+              </a:rPr>
+              <a:t>Evaluaciones Agropecuarias Municipales – EVA. 2019–2025, Base Agrícola (UPRA).</a:t>
+            </a:r>
+          </a:p>
+          <a:p>
+            <a:pPr algn="l">
+              <a:spcAft>
+                <a:spcPts val="400"/>
+              </a:spcAft>
+            </a:pPr>
+          </a:p>
+          <a:p>
+            <a:pPr algn="l">
+              <a:spcAft>
+                <a:spcPts val="400"/>
+              </a:spcAft>
+            </a:pPr>
+            <a:r>
+              <a:rPr sz="1500" b="0">
+                <a:solidFill>
+                  <a:srgbClr val="202124"/>
+                </a:solidFill>
+                <a:latin typeface="Aptos"/>
+              </a:rPr>
+              <a:t>166.732 registros; 32 departamentos; 1.103 municipios; 165 cultivos.</a:t>
+            </a:r>
+          </a:p>
+          <a:p>
+            <a:pPr algn="l">
+              <a:spcAft>
+                <a:spcPts val="400"/>
+              </a:spcAft>
+            </a:pPr>
+          </a:p>
+          <a:p>
+            <a:pPr algn="l">
+              <a:spcAft>
+                <a:spcPts val="400"/>
+              </a:spcAft>
+            </a:pPr>
+            <a:r>
+              <a:rPr sz="1500" b="0">
+                <a:solidFill>
+                  <a:srgbClr val="202124"/>
+                </a:solidFill>
+                <a:latin typeface="Aptos"/>
+              </a:rPr>
+              <a:t>Cada punto representa municipio × cultivo × período.</a:t>
+            </a:r>
+          </a:p>
+        </p:txBody>
+      </p:sp>
+      <p:sp>
+        <p:nvSpPr>
+          <p:cNvPr id="7" name="Rounded Rectangle 6"/>
+          <p:cNvSpPr/>
+          <p:nvPr/>
+        </p:nvSpPr>
+        <p:spPr>
+          <a:xfrm>
+            <a:off x="4334256" y="1325880"/>
+            <a:ext cx="3520440" cy="4434840"/>
+          </a:xfrm>
+          <a:prstGeom prst="roundRect">
+            <a:avLst/>
+          </a:prstGeom>
+          <a:solidFill>
+            <a:srgbClr val="F2F2F2"/>
+          </a:solidFill>
+          <a:ln w="12700">
+            <a:solidFill>
+              <a:srgbClr val="0B5394"/>
+            </a:solidFill>
+          </a:ln>
+        </p:spPr>
+        <p:style>
+          <a:lnRef idx="1">
+            <a:schemeClr val="accent1"/>
+          </a:lnRef>
+          <a:fillRef idx="3">
+            <a:schemeClr val="accent1"/>
+          </a:fillRef>
+          <a:effectRef idx="2">
+            <a:schemeClr val="accent1"/>
+          </a:effectRef>
+          <a:fontRef idx="minor">
+            <a:schemeClr val="lt1"/>
+          </a:fontRef>
+        </p:style>
+        <p:txBody>
+          <a:bodyPr rtlCol="0" anchor="ctr"/>
+          <a:lstStyle/>
+          <a:p>
+            <a:pPr algn="ctr"/>
+          </a:p>
+        </p:txBody>
+      </p:sp>
+      <p:sp>
+        <p:nvSpPr>
+          <p:cNvPr id="8" name="TextBox 7"/>
+          <p:cNvSpPr txBox="1"/>
+          <p:nvPr/>
+        </p:nvSpPr>
+        <p:spPr>
+          <a:xfrm>
+            <a:off x="4517136" y="1463039"/>
+            <a:ext cx="3154680" cy="292608"/>
+          </a:xfrm>
+          <a:prstGeom prst="rect">
+            <a:avLst/>
+          </a:prstGeom>
+          <a:noFill/>
+        </p:spPr>
+        <p:txBody>
+          <a:bodyPr wrap="square" anchor="t">
+            <a:spAutoFit/>
+          </a:bodyPr>
+          <a:lstStyle/>
+          <a:p>
+            <a:pPr algn="l">
+              <a:spcAft>
+                <a:spcPts val="400"/>
+              </a:spcAft>
+            </a:pPr>
+            <a:r>
+              <a:rPr sz="1000" b="1">
+                <a:solidFill>
+                  <a:srgbClr val="0B5394"/>
+                </a:solidFill>
+                <a:latin typeface="Aptos"/>
+              </a:rPr>
+              <a:t>REPRODUCIBILIDAD</a:t>
+            </a:r>
+          </a:p>
+        </p:txBody>
+      </p:sp>
+      <p:sp>
+        <p:nvSpPr>
+          <p:cNvPr id="9" name="TextBox 8"/>
+          <p:cNvSpPr txBox="1"/>
+          <p:nvPr/>
+        </p:nvSpPr>
+        <p:spPr>
+          <a:xfrm>
+            <a:off x="4517136" y="1783080"/>
+            <a:ext cx="3154680" cy="3867911"/>
+          </a:xfrm>
+          <a:prstGeom prst="rect">
+            <a:avLst/>
+          </a:prstGeom>
+          <a:noFill/>
+        </p:spPr>
+        <p:txBody>
+          <a:bodyPr wrap="square" anchor="t">
+            <a:spAutoFit/>
+          </a:bodyPr>
+          <a:lstStyle/>
+          <a:p>
+            <a:pPr algn="l">
+              <a:spcAft>
+                <a:spcPts val="400"/>
+              </a:spcAft>
+            </a:pPr>
+            <a:r>
+              <a:rPr sz="1500" b="0">
+                <a:solidFill>
+                  <a:srgbClr val="202124"/>
+                </a:solidFill>
+                <a:latin typeface="Aptos"/>
+              </a:rPr>
+              <a:t>Cuaderno Python: proyecto_boxplots/boxplots_modernos_EVA.ipynb.</a:t>
+            </a:r>
+          </a:p>
+          <a:p>
+            <a:pPr algn="l">
+              <a:spcAft>
+                <a:spcPts val="400"/>
+              </a:spcAft>
+            </a:pPr>
+          </a:p>
+          <a:p>
+            <a:pPr algn="l">
+              <a:spcAft>
+                <a:spcPts val="400"/>
+              </a:spcAft>
+            </a:pPr>
+            <a:r>
+              <a:rPr sz="1500" b="0">
+                <a:solidFill>
+                  <a:srgbClr val="202124"/>
+                </a:solidFill>
+                <a:latin typeface="Aptos"/>
+              </a:rPr>
+              <a:t>Genera cinco HTML Plotly autónomos, cinco PNG y las interpretaciones.</a:t>
+            </a:r>
+          </a:p>
+          <a:p>
+            <a:pPr algn="l">
+              <a:spcAft>
+                <a:spcPts val="400"/>
+              </a:spcAft>
+            </a:pPr>
+          </a:p>
+          <a:p>
+            <a:pPr algn="l">
+              <a:spcAft>
+                <a:spcPts val="400"/>
+              </a:spcAft>
+            </a:pPr>
+            <a:r>
+              <a:rPr sz="1500" b="0">
+                <a:solidFill>
+                  <a:srgbClr val="202124"/>
+                </a:solidFill>
+                <a:latin typeface="Aptos"/>
+              </a:rPr>
+              <a:t>No se usaron datos simulados.</a:t>
+            </a:r>
+          </a:p>
+        </p:txBody>
+      </p:sp>
+      <p:sp>
+        <p:nvSpPr>
+          <p:cNvPr id="10" name="Rounded Rectangle 9"/>
+          <p:cNvSpPr/>
+          <p:nvPr/>
+        </p:nvSpPr>
+        <p:spPr>
+          <a:xfrm>
+            <a:off x="8074152" y="1325880"/>
+            <a:ext cx="3520440" cy="4434840"/>
+          </a:xfrm>
+          <a:prstGeom prst="roundRect">
+            <a:avLst/>
+          </a:prstGeom>
+          <a:solidFill>
+            <a:srgbClr val="F2F2F2"/>
+          </a:solidFill>
+          <a:ln w="12700">
+            <a:solidFill>
+              <a:srgbClr val="0B5394"/>
+            </a:solidFill>
+          </a:ln>
+        </p:spPr>
+        <p:style>
+          <a:lnRef idx="1">
+            <a:schemeClr val="accent1"/>
+          </a:lnRef>
+          <a:fillRef idx="3">
+            <a:schemeClr val="accent1"/>
+          </a:fillRef>
+          <a:effectRef idx="2">
+            <a:schemeClr val="accent1"/>
+          </a:effectRef>
+          <a:fontRef idx="minor">
+            <a:schemeClr val="lt1"/>
+          </a:fontRef>
+        </p:style>
+        <p:txBody>
+          <a:bodyPr rtlCol="0" anchor="ctr"/>
+          <a:lstStyle/>
+          <a:p>
+            <a:pPr algn="ctr"/>
+          </a:p>
+        </p:txBody>
+      </p:sp>
+      <p:sp>
+        <p:nvSpPr>
+          <p:cNvPr id="11" name="TextBox 10"/>
+          <p:cNvSpPr txBox="1"/>
+          <p:nvPr/>
+        </p:nvSpPr>
+        <p:spPr>
+          <a:xfrm>
+            <a:off x="8257031" y="1463039"/>
+            <a:ext cx="3154680" cy="292608"/>
+          </a:xfrm>
+          <a:prstGeom prst="rect">
+            <a:avLst/>
+          </a:prstGeom>
+          <a:noFill/>
+        </p:spPr>
+        <p:txBody>
+          <a:bodyPr wrap="square" anchor="t">
+            <a:spAutoFit/>
+          </a:bodyPr>
+          <a:lstStyle/>
+          <a:p>
+            <a:pPr algn="l">
+              <a:spcAft>
+                <a:spcPts val="400"/>
+              </a:spcAft>
+            </a:pPr>
+            <a:r>
+              <a:rPr sz="1000" b="1">
+                <a:solidFill>
+                  <a:srgbClr val="0B5394"/>
+                </a:solidFill>
+                <a:latin typeface="Aptos"/>
+              </a:rPr>
+              <a:t>CÓMO SE DEMUESTRA</a:t>
+            </a:r>
+          </a:p>
+        </p:txBody>
+      </p:sp>
+      <p:sp>
+        <p:nvSpPr>
+          <p:cNvPr id="12" name="TextBox 11"/>
+          <p:cNvSpPr txBox="1"/>
+          <p:nvPr/>
+        </p:nvSpPr>
+        <p:spPr>
+          <a:xfrm>
+            <a:off x="8257031" y="1783080"/>
+            <a:ext cx="3154680" cy="3867911"/>
+          </a:xfrm>
+          <a:prstGeom prst="rect">
+            <a:avLst/>
+          </a:prstGeom>
+          <a:noFill/>
+        </p:spPr>
+        <p:txBody>
+          <a:bodyPr wrap="square" anchor="t">
+            <a:spAutoFit/>
+          </a:bodyPr>
+          <a:lstStyle/>
+          <a:p>
+            <a:pPr algn="l">
+              <a:spcAft>
+                <a:spcPts val="400"/>
+              </a:spcAft>
+            </a:pPr>
+            <a:r>
+              <a:rPr sz="1500" b="0">
+                <a:solidFill>
+                  <a:srgbClr val="202124"/>
+                </a:solidFill>
+                <a:latin typeface="Aptos"/>
+              </a:rPr>
+              <a:t>En esta presentación: captura de cada gráfico interactivo.</a:t>
+            </a:r>
+          </a:p>
+          <a:p>
+            <a:pPr algn="l">
+              <a:spcAft>
+                <a:spcPts val="400"/>
+              </a:spcAft>
+            </a:pPr>
+          </a:p>
+          <a:p>
+            <a:pPr algn="l">
+              <a:spcAft>
+                <a:spcPts val="400"/>
+              </a:spcAft>
+            </a:pPr>
+            <a:r>
+              <a:rPr sz="1500" b="0">
+                <a:solidFill>
+                  <a:srgbClr val="202124"/>
+                </a:solidFill>
+                <a:latin typeface="Aptos"/>
+              </a:rPr>
+              <a:t>En la entrega: abra los archivos HTML en proyecto_boxplots/figuras_interactivas/.</a:t>
+            </a:r>
+          </a:p>
+          <a:p>
+            <a:pPr algn="l">
+              <a:spcAft>
+                <a:spcPts val="400"/>
+              </a:spcAft>
+            </a:pPr>
+          </a:p>
+          <a:p>
+            <a:pPr algn="l">
+              <a:spcAft>
+                <a:spcPts val="400"/>
+              </a:spcAft>
+            </a:pPr>
+            <a:r>
+              <a:rPr sz="1500" b="0">
+                <a:solidFill>
+                  <a:srgbClr val="202124"/>
+                </a:solidFill>
+                <a:latin typeface="Aptos"/>
+              </a:rPr>
+              <a:t>Los títulos fueron contrastados contra las tablas del cuaderno.</a:t>
+            </a:r>
+          </a:p>
+        </p:txBody>
+      </p:sp>
+      <p:sp>
+        <p:nvSpPr>
+          <p:cNvPr id="13" name="TextBox 12"/>
+          <p:cNvSpPr txBox="1"/>
+          <p:nvPr/>
+        </p:nvSpPr>
+        <p:spPr>
+          <a:xfrm>
+            <a:off x="594360" y="6492240"/>
+            <a:ext cx="7315200" cy="201168"/>
+          </a:xfrm>
+          <a:prstGeom prst="rect">
+            <a:avLst/>
+          </a:prstGeom>
+          <a:noFill/>
+        </p:spPr>
+        <p:txBody>
+          <a:bodyPr wrap="square" anchor="t">
+            <a:spAutoFit/>
+          </a:bodyPr>
+          <a:lstStyle/>
+          <a:p>
+            <a:pPr algn="l">
+              <a:spcAft>
+                <a:spcPts val="400"/>
+              </a:spcAft>
+            </a:pPr>
+            <a:r>
+              <a:rPr sz="900" b="0">
+                <a:solidFill>
+                  <a:srgbClr val="5A5A5A"/>
+                </a:solidFill>
+                <a:latin typeface="Aptos"/>
+              </a:rPr>
+              <a:t>Fuente: EVA 2019–2025 (UPRA) · datos.gov.co</a:t>
+            </a:r>
+          </a:p>
+        </p:txBody>
+      </p:sp>
+      <p:sp>
+        <p:nvSpPr>
+          <p:cNvPr id="14" name="TextBox 13"/>
+          <p:cNvSpPr txBox="1"/>
+          <p:nvPr/>
+        </p:nvSpPr>
+        <p:spPr>
+          <a:xfrm>
+            <a:off x="7955279" y="6492240"/>
+            <a:ext cx="3383280" cy="201168"/>
+          </a:xfrm>
+          <a:prstGeom prst="rect">
+            <a:avLst/>
+          </a:prstGeom>
+          <a:noFill/>
+        </p:spPr>
+        <p:txBody>
+          <a:bodyPr wrap="square" anchor="t">
+            <a:spAutoFit/>
+          </a:bodyPr>
+          <a:lstStyle/>
+          <a:p>
+            <a:pPr algn="r">
+              <a:spcAft>
+                <a:spcPts val="400"/>
+              </a:spcAft>
+            </a:pPr>
+            <a:r>
+              <a:rPr sz="900" b="0">
+                <a:solidFill>
+                  <a:srgbClr val="0B5394"/>
+                </a:solidFill>
+                <a:latin typeface="Aptos"/>
+                <a:hlinkClick r:id="rId2"/>
+              </a:rPr>
+              <a:t>https://www.datos.gov.co/d/uejq-wxrr</a:t>
+            </a:r>
+          </a:p>
+        </p:txBody>
+      </p:sp>
+      <p:sp>
+        <p:nvSpPr>
+          <p:cNvPr id="15" name="TextBox 14"/>
+          <p:cNvSpPr txBox="1"/>
+          <p:nvPr/>
+        </p:nvSpPr>
+        <p:spPr>
+          <a:xfrm>
+            <a:off x="11384280" y="6492240"/>
+            <a:ext cx="228600" cy="201168"/>
+          </a:xfrm>
+          <a:prstGeom prst="rect">
+            <a:avLst/>
+          </a:prstGeom>
+          <a:noFill/>
+        </p:spPr>
+        <p:txBody>
+          <a:bodyPr wrap="square" anchor="t">
+            <a:spAutoFit/>
+          </a:bodyPr>
+          <a:lstStyle/>
+          <a:p>
+            <a:pPr algn="r">
+              <a:spcAft>
+                <a:spcPts val="400"/>
+              </a:spcAft>
+            </a:pPr>
+            <a:r>
+              <a:rPr sz="900" b="0">
+                <a:solidFill>
+                  <a:srgbClr val="5A5A5A"/>
+                </a:solidFill>
+                <a:latin typeface="Aptos"/>
+              </a:rPr>
+              <a:t>2</a:t>
             </a:r>
           </a:p>
         </p:txBody>
@@ -4943,253 +6266,598 @@
         </p:nvSpPr>
         <p:spPr>
           <a:xfrm>
-            <a:off x="548640" y="292608"/>
-            <a:ext cx="11064240" cy="365760"/>
-          </a:xfrm>
-          <a:prstGeom prst="rect">
-            <a:avLst/>
-          </a:prstGeom>
-          <a:noFill/>
-        </p:spPr>
-        <p:txBody>
-          <a:bodyPr wrap="none">
-            <a:spAutoFit/>
-          </a:bodyPr>
-          <a:lstStyle/>
-          <a:p>
-            <a:pPr algn="l">
-              <a:spcAft>
-                <a:spcPts val="600"/>
-              </a:spcAft>
-            </a:pPr>
-            <a:r>
-              <a:rPr sz="1300" b="1">
+            <a:off x="594360" y="292608"/>
+            <a:ext cx="10972800" cy="502920"/>
+          </a:xfrm>
+          <a:prstGeom prst="rect">
+            <a:avLst/>
+          </a:prstGeom>
+          <a:noFill/>
+        </p:spPr>
+        <p:txBody>
+          <a:bodyPr wrap="square" anchor="t">
+            <a:spAutoFit/>
+          </a:bodyPr>
+          <a:lstStyle/>
+          <a:p>
+            <a:pPr algn="l">
+              <a:spcAft>
+                <a:spcPts val="400"/>
+              </a:spcAft>
+            </a:pPr>
+            <a:r>
+              <a:rPr sz="2500" b="1">
+                <a:solidFill>
+                  <a:srgbClr val="0B5394"/>
+                </a:solidFill>
+                <a:latin typeface="Aptos"/>
+              </a:rPr>
+              <a:t>1. Half-Eye Plot</a:t>
+            </a:r>
+          </a:p>
+        </p:txBody>
+      </p:sp>
+      <p:sp>
+        <p:nvSpPr>
+          <p:cNvPr id="3" name="TextBox 2"/>
+          <p:cNvSpPr txBox="1"/>
+          <p:nvPr/>
+        </p:nvSpPr>
+        <p:spPr>
+          <a:xfrm>
+            <a:off x="621792" y="822960"/>
+            <a:ext cx="10972800" cy="274320"/>
+          </a:xfrm>
+          <a:prstGeom prst="rect">
+            <a:avLst/>
+          </a:prstGeom>
+          <a:noFill/>
+        </p:spPr>
+        <p:txBody>
+          <a:bodyPr wrap="square" anchor="t">
+            <a:spAutoFit/>
+          </a:bodyPr>
+          <a:lstStyle/>
+          <a:p>
+            <a:pPr algn="l">
+              <a:spcAft>
+                <a:spcPts val="400"/>
+              </a:spcAft>
+            </a:pPr>
+            <a:r>
+              <a:rPr sz="1100" b="0">
+                <a:solidFill>
+                  <a:srgbClr val="5A5A5A"/>
+                </a:solidFill>
+                <a:latin typeface="Aptos"/>
+              </a:rPr>
+              <a:t>Concepto, limitación que corrige y uso recomendado</a:t>
+            </a:r>
+          </a:p>
+        </p:txBody>
+      </p:sp>
+      <p:sp>
+        <p:nvSpPr>
+          <p:cNvPr id="4" name="Rounded Rectangle 3"/>
+          <p:cNvSpPr/>
+          <p:nvPr/>
+        </p:nvSpPr>
+        <p:spPr>
+          <a:xfrm>
+            <a:off x="594360" y="1325880"/>
+            <a:ext cx="3566160" cy="4526280"/>
+          </a:xfrm>
+          <a:prstGeom prst="roundRect">
+            <a:avLst/>
+          </a:prstGeom>
+          <a:solidFill>
+            <a:srgbClr val="F2F2F2"/>
+          </a:solidFill>
+          <a:ln w="12700">
+            <a:solidFill>
+              <a:srgbClr val="0B5394"/>
+            </a:solidFill>
+          </a:ln>
+        </p:spPr>
+        <p:style>
+          <a:lnRef idx="1">
+            <a:schemeClr val="accent1"/>
+          </a:lnRef>
+          <a:fillRef idx="3">
+            <a:schemeClr val="accent1"/>
+          </a:fillRef>
+          <a:effectRef idx="2">
+            <a:schemeClr val="accent1"/>
+          </a:effectRef>
+          <a:fontRef idx="minor">
+            <a:schemeClr val="lt1"/>
+          </a:fontRef>
+        </p:style>
+        <p:txBody>
+          <a:bodyPr rtlCol="0" anchor="ctr"/>
+          <a:lstStyle/>
+          <a:p>
+            <a:pPr algn="ctr"/>
+          </a:p>
+        </p:txBody>
+      </p:sp>
+      <p:sp>
+        <p:nvSpPr>
+          <p:cNvPr id="5" name="TextBox 4"/>
+          <p:cNvSpPr txBox="1"/>
+          <p:nvPr/>
+        </p:nvSpPr>
+        <p:spPr>
+          <a:xfrm>
+            <a:off x="777240" y="1463039"/>
+            <a:ext cx="3200400" cy="292608"/>
+          </a:xfrm>
+          <a:prstGeom prst="rect">
+            <a:avLst/>
+          </a:prstGeom>
+          <a:noFill/>
+        </p:spPr>
+        <p:txBody>
+          <a:bodyPr wrap="square" anchor="t">
+            <a:spAutoFit/>
+          </a:bodyPr>
+          <a:lstStyle/>
+          <a:p>
+            <a:pPr algn="l">
+              <a:spcAft>
+                <a:spcPts val="400"/>
+              </a:spcAft>
+            </a:pPr>
+            <a:r>
+              <a:rPr sz="1000" b="1">
+                <a:solidFill>
+                  <a:srgbClr val="0B5394"/>
+                </a:solidFill>
+                <a:latin typeface="Aptos"/>
+              </a:rPr>
+              <a:t>CONCEPTO</a:t>
+            </a:r>
+          </a:p>
+        </p:txBody>
+      </p:sp>
+      <p:sp>
+        <p:nvSpPr>
+          <p:cNvPr id="6" name="TextBox 5"/>
+          <p:cNvSpPr txBox="1"/>
+          <p:nvPr/>
+        </p:nvSpPr>
+        <p:spPr>
+          <a:xfrm>
+            <a:off x="777240" y="1783080"/>
+            <a:ext cx="3200400" cy="3959352"/>
+          </a:xfrm>
+          <a:prstGeom prst="rect">
+            <a:avLst/>
+          </a:prstGeom>
+          <a:noFill/>
+        </p:spPr>
+        <p:txBody>
+          <a:bodyPr wrap="square" anchor="t">
+            <a:spAutoFit/>
+          </a:bodyPr>
+          <a:lstStyle/>
+          <a:p>
+            <a:pPr algn="l">
+              <a:spcAft>
+                <a:spcPts val="400"/>
+              </a:spcAft>
+            </a:pPr>
+            <a:r>
+              <a:rPr sz="1500" b="0">
+                <a:solidFill>
+                  <a:srgbClr val="202124"/>
+                </a:solidFill>
+                <a:latin typeface="Aptos"/>
+              </a:rPr>
+              <a:t>Una densidad KDE reflejada con mediana e intervalos empíricos; hace visible dónde se concentra la distribución.</a:t>
+            </a:r>
+          </a:p>
+        </p:txBody>
+      </p:sp>
+      <p:sp>
+        <p:nvSpPr>
+          <p:cNvPr id="7" name="Rounded Rectangle 6"/>
+          <p:cNvSpPr/>
+          <p:nvPr/>
+        </p:nvSpPr>
+        <p:spPr>
+          <a:xfrm>
+            <a:off x="4315968" y="1325880"/>
+            <a:ext cx="3566160" cy="4526280"/>
+          </a:xfrm>
+          <a:prstGeom prst="roundRect">
+            <a:avLst/>
+          </a:prstGeom>
+          <a:solidFill>
+            <a:srgbClr val="F2F2F2"/>
+          </a:solidFill>
+          <a:ln w="12700">
+            <a:solidFill>
+              <a:srgbClr val="B03A2B"/>
+            </a:solidFill>
+          </a:ln>
+        </p:spPr>
+        <p:style>
+          <a:lnRef idx="1">
+            <a:schemeClr val="accent1"/>
+          </a:lnRef>
+          <a:fillRef idx="3">
+            <a:schemeClr val="accent1"/>
+          </a:fillRef>
+          <a:effectRef idx="2">
+            <a:schemeClr val="accent1"/>
+          </a:effectRef>
+          <a:fontRef idx="minor">
+            <a:schemeClr val="lt1"/>
+          </a:fontRef>
+        </p:style>
+        <p:txBody>
+          <a:bodyPr rtlCol="0" anchor="ctr"/>
+          <a:lstStyle/>
+          <a:p>
+            <a:pPr algn="ctr"/>
+          </a:p>
+        </p:txBody>
+      </p:sp>
+      <p:sp>
+        <p:nvSpPr>
+          <p:cNvPr id="8" name="TextBox 7"/>
+          <p:cNvSpPr txBox="1"/>
+          <p:nvPr/>
+        </p:nvSpPr>
+        <p:spPr>
+          <a:xfrm>
+            <a:off x="4498848" y="1463039"/>
+            <a:ext cx="3200400" cy="292608"/>
+          </a:xfrm>
+          <a:prstGeom prst="rect">
+            <a:avLst/>
+          </a:prstGeom>
+          <a:noFill/>
+        </p:spPr>
+        <p:txBody>
+          <a:bodyPr wrap="square" anchor="t">
+            <a:spAutoFit/>
+          </a:bodyPr>
+          <a:lstStyle/>
+          <a:p>
+            <a:pPr algn="l">
+              <a:spcAft>
+                <a:spcPts val="400"/>
+              </a:spcAft>
+            </a:pPr>
+            <a:r>
+              <a:rPr sz="1000" b="1">
                 <a:solidFill>
                   <a:srgbClr val="B03A2B"/>
                 </a:solidFill>
-                <a:latin typeface="Calibri"/>
-              </a:rPr>
-              <a:t>CONTEXTO</a:t>
-            </a:r>
-          </a:p>
-        </p:txBody>
-      </p:sp>
-      <p:sp>
-        <p:nvSpPr>
-          <p:cNvPr id="3" name="TextBox 2"/>
-          <p:cNvSpPr txBox="1"/>
-          <p:nvPr/>
-        </p:nvSpPr>
-        <p:spPr>
-          <a:xfrm>
-            <a:off x="548640" y="566928"/>
-            <a:ext cx="11064240" cy="731520"/>
-          </a:xfrm>
-          <a:prstGeom prst="rect">
-            <a:avLst/>
-          </a:prstGeom>
-          <a:noFill/>
-        </p:spPr>
-        <p:txBody>
-          <a:bodyPr wrap="none">
-            <a:spAutoFit/>
-          </a:bodyPr>
-          <a:lstStyle/>
-          <a:p>
-            <a:pPr algn="l">
-              <a:spcAft>
-                <a:spcPts val="600"/>
-              </a:spcAft>
-            </a:pPr>
-            <a:r>
-              <a:rPr sz="2800" b="1">
-                <a:solidFill>
-                  <a:srgbClr val="1F3A5F"/>
-                </a:solidFill>
-                <a:latin typeface="Calibri"/>
-              </a:rPr>
-              <a:t>El dato</a:t>
-            </a:r>
-          </a:p>
-        </p:txBody>
-      </p:sp>
-      <p:sp>
-        <p:nvSpPr>
-          <p:cNvPr id="4" name="TextBox 3"/>
-          <p:cNvSpPr txBox="1"/>
-          <p:nvPr/>
-        </p:nvSpPr>
-        <p:spPr>
-          <a:xfrm>
-            <a:off x="548640" y="1225296"/>
-            <a:ext cx="11064240" cy="91440"/>
-          </a:xfrm>
-          <a:prstGeom prst="rect">
-            <a:avLst/>
-          </a:prstGeom>
-          <a:noFill/>
-        </p:spPr>
-        <p:txBody>
-          <a:bodyPr wrap="none">
-            <a:spAutoFit/>
-          </a:bodyPr>
-          <a:lstStyle/>
-          <a:p>
-            <a:pPr algn="l">
-              <a:spcAft>
-                <a:spcPts val="600"/>
-              </a:spcAft>
-            </a:pPr>
-            <a:r>
-              <a:rPr sz="200" b="0">
-                <a:solidFill>
-                  <a:srgbClr val="B03A2B"/>
-                </a:solidFill>
-                <a:latin typeface="Calibri"/>
-              </a:rPr>
-              <a:t> </a:t>
-            </a:r>
-          </a:p>
-        </p:txBody>
-      </p:sp>
-      <p:sp>
-        <p:nvSpPr>
-          <p:cNvPr id="5" name="TextBox 4"/>
-          <p:cNvSpPr txBox="1"/>
-          <p:nvPr/>
-        </p:nvSpPr>
-        <p:spPr>
-          <a:xfrm>
-            <a:off x="548640" y="1554480"/>
-            <a:ext cx="11064240" cy="4754880"/>
-          </a:xfrm>
-          <a:prstGeom prst="rect">
-            <a:avLst/>
-          </a:prstGeom>
-          <a:noFill/>
-        </p:spPr>
-        <p:txBody>
-          <a:bodyPr wrap="square">
-            <a:spAutoFit/>
-          </a:bodyPr>
-          <a:lstStyle/>
-          <a:p>
-            <a:pPr>
-              <a:spcAft>
-                <a:spcPts val="1000"/>
-              </a:spcAft>
-            </a:pPr>
-            <a:r>
-              <a:rPr sz="1600">
-                <a:solidFill>
-                  <a:srgbClr val="333333"/>
-                </a:solidFill>
-                <a:latin typeface="Calibri"/>
-              </a:rPr>
-              <a:t>- EVA 2019-2025, Base Agricola (UPRA). Fuente abierta: datos.gov.co/d/uejq-wxrr</a:t>
-            </a:r>
-          </a:p>
-          <a:p>
-            <a:pPr>
-              <a:spcAft>
-                <a:spcPts val="1000"/>
-              </a:spcAft>
-            </a:pPr>
-            <a:r>
-              <a:rPr sz="1600">
-                <a:solidFill>
-                  <a:srgbClr val="333333"/>
-                </a:solidFill>
-                <a:latin typeface="Calibri"/>
-              </a:rPr>
-              <a:t>- 166 732 registros, 32 departamentos, 1 103 municipios, 165 cultivos</a:t>
-            </a:r>
-          </a:p>
-          <a:p>
-            <a:pPr>
-              <a:spcAft>
-                <a:spcPts val="1000"/>
-              </a:spcAft>
-            </a:pPr>
-            <a:r>
-              <a:rPr sz="1600">
-                <a:solidFill>
-                  <a:srgbClr val="333333"/>
-                </a:solidFill>
-                <a:latin typeface="Calibri"/>
-              </a:rPr>
-              <a:t>- Unidad de analisis: municipio x desagregacion de cultivo x periodo</a:t>
-            </a:r>
-          </a:p>
-          <a:p>
-            <a:pPr>
-              <a:spcAft>
-                <a:spcPts val="1000"/>
-              </a:spcAft>
-            </a:pPr>
-            <a:r>
-              <a:rPr sz="1600">
-                <a:solidFill>
-                  <a:srgbClr val="333333"/>
-                </a:solidFill>
-                <a:latin typeface="Calibri"/>
-              </a:rPr>
-              <a:t>- Cero datos simulados: todo sale del archivo descargado por la API</a:t>
-            </a:r>
-          </a:p>
-          <a:p>
-            <a:pPr>
-              <a:spcAft>
-                <a:spcPts val="1000"/>
-              </a:spcAft>
-            </a:pPr>
-            <a:r>
-              <a:rPr sz="1600">
-                <a:solidFill>
-                  <a:srgbClr val="333333"/>
-                </a:solidFill>
-                <a:latin typeface="Calibri"/>
-              </a:rPr>
-              <a:t>- Filtro transversal: se descartan los registros con rendimiento = 0 (sin cosecha)</a:t>
-            </a:r>
-          </a:p>
-        </p:txBody>
-      </p:sp>
-      <p:sp>
-        <p:nvSpPr>
-          <p:cNvPr id="6" name="TextBox 5"/>
-          <p:cNvSpPr txBox="1"/>
-          <p:nvPr/>
-        </p:nvSpPr>
-        <p:spPr>
-          <a:xfrm>
-            <a:off x="548640" y="6419088"/>
-            <a:ext cx="11064240" cy="365760"/>
-          </a:xfrm>
-          <a:prstGeom prst="rect">
-            <a:avLst/>
-          </a:prstGeom>
-          <a:noFill/>
-        </p:spPr>
-        <p:txBody>
-          <a:bodyPr wrap="none">
-            <a:spAutoFit/>
-          </a:bodyPr>
-          <a:lstStyle/>
-          <a:p>
-            <a:pPr algn="l">
-              <a:spcAft>
-                <a:spcPts val="600"/>
-              </a:spcAft>
-            </a:pPr>
-            <a:r>
-              <a:rPr sz="1000" b="0">
-                <a:solidFill>
-                  <a:srgbClr val="666666"/>
-                </a:solidFill>
-                <a:latin typeface="Calibri"/>
-              </a:rPr>
-              <a:t>Fuente: EVA 2019-2025 (UPRA) - datos.gov.co/d/uejq-wxrr</a:t>
+                <a:latin typeface="Aptos"/>
+              </a:rPr>
+              <a:t>QUÉ NO MUESTRA LA CAJA</a:t>
+            </a:r>
+          </a:p>
+        </p:txBody>
+      </p:sp>
+      <p:sp>
+        <p:nvSpPr>
+          <p:cNvPr id="9" name="TextBox 8"/>
+          <p:cNvSpPr txBox="1"/>
+          <p:nvPr/>
+        </p:nvSpPr>
+        <p:spPr>
+          <a:xfrm>
+            <a:off x="4498848" y="1783080"/>
+            <a:ext cx="3200400" cy="3959352"/>
+          </a:xfrm>
+          <a:prstGeom prst="rect">
+            <a:avLst/>
+          </a:prstGeom>
+          <a:noFill/>
+        </p:spPr>
+        <p:txBody>
+          <a:bodyPr wrap="square" anchor="t">
+            <a:spAutoFit/>
+          </a:bodyPr>
+          <a:lstStyle/>
+          <a:p>
+            <a:pPr algn="l">
+              <a:spcAft>
+                <a:spcPts val="400"/>
+              </a:spcAft>
+            </a:pPr>
+            <a:r>
+              <a:rPr sz="1500" b="0">
+                <a:solidFill>
+                  <a:srgbClr val="202124"/>
+                </a:solidFill>
+                <a:latin typeface="Aptos"/>
+              </a:rPr>
+              <a:t>La caja no muestra forma, acumulaciones ni huecos dentro de los cuartiles.</a:t>
+            </a:r>
+          </a:p>
+        </p:txBody>
+      </p:sp>
+      <p:sp>
+        <p:nvSpPr>
+          <p:cNvPr id="10" name="Rounded Rectangle 9"/>
+          <p:cNvSpPr/>
+          <p:nvPr/>
+        </p:nvSpPr>
+        <p:spPr>
+          <a:xfrm>
+            <a:off x="8037575" y="1325880"/>
+            <a:ext cx="3566160" cy="4526280"/>
+          </a:xfrm>
+          <a:prstGeom prst="roundRect">
+            <a:avLst/>
+          </a:prstGeom>
+          <a:solidFill>
+            <a:srgbClr val="F2F2F2"/>
+          </a:solidFill>
+          <a:ln w="12700">
+            <a:solidFill>
+              <a:srgbClr val="0B5394"/>
+            </a:solidFill>
+          </a:ln>
+        </p:spPr>
+        <p:style>
+          <a:lnRef idx="1">
+            <a:schemeClr val="accent1"/>
+          </a:lnRef>
+          <a:fillRef idx="3">
+            <a:schemeClr val="accent1"/>
+          </a:fillRef>
+          <a:effectRef idx="2">
+            <a:schemeClr val="accent1"/>
+          </a:effectRef>
+          <a:fontRef idx="minor">
+            <a:schemeClr val="lt1"/>
+          </a:fontRef>
+        </p:style>
+        <p:txBody>
+          <a:bodyPr rtlCol="0" anchor="ctr"/>
+          <a:lstStyle/>
+          <a:p>
+            <a:pPr algn="ctr"/>
+          </a:p>
+        </p:txBody>
+      </p:sp>
+      <p:sp>
+        <p:nvSpPr>
+          <p:cNvPr id="11" name="TextBox 10"/>
+          <p:cNvSpPr txBox="1"/>
+          <p:nvPr/>
+        </p:nvSpPr>
+        <p:spPr>
+          <a:xfrm>
+            <a:off x="8220455" y="1463039"/>
+            <a:ext cx="3200400" cy="292608"/>
+          </a:xfrm>
+          <a:prstGeom prst="rect">
+            <a:avLst/>
+          </a:prstGeom>
+          <a:noFill/>
+        </p:spPr>
+        <p:txBody>
+          <a:bodyPr wrap="square" anchor="t">
+            <a:spAutoFit/>
+          </a:bodyPr>
+          <a:lstStyle/>
+          <a:p>
+            <a:pPr algn="l">
+              <a:spcAft>
+                <a:spcPts val="400"/>
+              </a:spcAft>
+            </a:pPr>
+            <a:r>
+              <a:rPr sz="1000" b="1">
+                <a:solidFill>
+                  <a:srgbClr val="0B5394"/>
+                </a:solidFill>
+                <a:latin typeface="Aptos"/>
+              </a:rPr>
+              <a:t>ÚSELO CUANDO</a:t>
+            </a:r>
+          </a:p>
+        </p:txBody>
+      </p:sp>
+      <p:sp>
+        <p:nvSpPr>
+          <p:cNvPr id="12" name="TextBox 11"/>
+          <p:cNvSpPr txBox="1"/>
+          <p:nvPr/>
+        </p:nvSpPr>
+        <p:spPr>
+          <a:xfrm>
+            <a:off x="8220455" y="1783080"/>
+            <a:ext cx="3200400" cy="3959352"/>
+          </a:xfrm>
+          <a:prstGeom prst="rect">
+            <a:avLst/>
+          </a:prstGeom>
+          <a:noFill/>
+        </p:spPr>
+        <p:txBody>
+          <a:bodyPr wrap="square" anchor="t">
+            <a:spAutoFit/>
+          </a:bodyPr>
+          <a:lstStyle/>
+          <a:p>
+            <a:pPr algn="l">
+              <a:spcAft>
+                <a:spcPts val="400"/>
+              </a:spcAft>
+            </a:pPr>
+            <a:r>
+              <a:rPr sz="1500" b="0">
+                <a:solidFill>
+                  <a:srgbClr val="202124"/>
+                </a:solidFill>
+                <a:latin typeface="Aptos"/>
+              </a:rPr>
+              <a:t>Variable continua y pocas o varias categorías con suficientes observaciones por grupo. Es útil si importa comparar forma, centro y colas.</a:t>
+            </a:r>
+          </a:p>
+        </p:txBody>
+      </p:sp>
+      <p:sp>
+        <p:nvSpPr>
+          <p:cNvPr id="13" name="TextBox 12"/>
+          <p:cNvSpPr txBox="1"/>
+          <p:nvPr/>
+        </p:nvSpPr>
+        <p:spPr>
+          <a:xfrm>
+            <a:off x="640080" y="5989320"/>
+            <a:ext cx="10972800" cy="274320"/>
+          </a:xfrm>
+          <a:prstGeom prst="rect">
+            <a:avLst/>
+          </a:prstGeom>
+          <a:noFill/>
+        </p:spPr>
+        <p:txBody>
+          <a:bodyPr wrap="square" anchor="t">
+            <a:spAutoFit/>
+          </a:bodyPr>
+          <a:lstStyle/>
+          <a:p>
+            <a:pPr algn="ctr">
+              <a:spcAft>
+                <a:spcPts val="400"/>
+              </a:spcAft>
+            </a:pPr>
+            <a:r>
+              <a:rPr sz="1200" b="0">
+                <a:solidFill>
+                  <a:srgbClr val="5A5A5A"/>
+                </a:solidFill>
+                <a:latin typeface="Aptos"/>
+              </a:rPr>
+              <a:t>Corte: papa con rendimiento &gt; 0 en cinco departamentos; N = 4.622.</a:t>
+            </a:r>
+          </a:p>
+        </p:txBody>
+      </p:sp>
+      <p:sp>
+        <p:nvSpPr>
+          <p:cNvPr id="14" name="TextBox 13"/>
+          <p:cNvSpPr txBox="1"/>
+          <p:nvPr/>
+        </p:nvSpPr>
+        <p:spPr>
+          <a:xfrm>
+            <a:off x="594360" y="6492240"/>
+            <a:ext cx="7315200" cy="201168"/>
+          </a:xfrm>
+          <a:prstGeom prst="rect">
+            <a:avLst/>
+          </a:prstGeom>
+          <a:noFill/>
+        </p:spPr>
+        <p:txBody>
+          <a:bodyPr wrap="square" anchor="t">
+            <a:spAutoFit/>
+          </a:bodyPr>
+          <a:lstStyle/>
+          <a:p>
+            <a:pPr algn="l">
+              <a:spcAft>
+                <a:spcPts val="400"/>
+              </a:spcAft>
+            </a:pPr>
+            <a:r>
+              <a:rPr sz="900" b="0">
+                <a:solidFill>
+                  <a:srgbClr val="5A5A5A"/>
+                </a:solidFill>
+                <a:latin typeface="Aptos"/>
+              </a:rPr>
+              <a:t>Fuente: EVA 2019–2025 (UPRA) · datos.gov.co</a:t>
+            </a:r>
+          </a:p>
+        </p:txBody>
+      </p:sp>
+      <p:sp>
+        <p:nvSpPr>
+          <p:cNvPr id="15" name="TextBox 14"/>
+          <p:cNvSpPr txBox="1"/>
+          <p:nvPr/>
+        </p:nvSpPr>
+        <p:spPr>
+          <a:xfrm>
+            <a:off x="7955279" y="6492240"/>
+            <a:ext cx="3383280" cy="201168"/>
+          </a:xfrm>
+          <a:prstGeom prst="rect">
+            <a:avLst/>
+          </a:prstGeom>
+          <a:noFill/>
+        </p:spPr>
+        <p:txBody>
+          <a:bodyPr wrap="square" anchor="t">
+            <a:spAutoFit/>
+          </a:bodyPr>
+          <a:lstStyle/>
+          <a:p>
+            <a:pPr algn="r">
+              <a:spcAft>
+                <a:spcPts val="400"/>
+              </a:spcAft>
+            </a:pPr>
+            <a:r>
+              <a:rPr sz="900" b="0">
+                <a:solidFill>
+                  <a:srgbClr val="0B5394"/>
+                </a:solidFill>
+                <a:latin typeface="Aptos"/>
+                <a:hlinkClick r:id="rId2"/>
+              </a:rPr>
+              <a:t>https://www.datos.gov.co/d/uejq-wxrr</a:t>
+            </a:r>
+          </a:p>
+        </p:txBody>
+      </p:sp>
+      <p:sp>
+        <p:nvSpPr>
+          <p:cNvPr id="16" name="TextBox 15"/>
+          <p:cNvSpPr txBox="1"/>
+          <p:nvPr/>
+        </p:nvSpPr>
+        <p:spPr>
+          <a:xfrm>
+            <a:off x="11384280" y="6492240"/>
+            <a:ext cx="228600" cy="201168"/>
+          </a:xfrm>
+          <a:prstGeom prst="rect">
+            <a:avLst/>
+          </a:prstGeom>
+          <a:noFill/>
+        </p:spPr>
+        <p:txBody>
+          <a:bodyPr wrap="square" anchor="t">
+            <a:spAutoFit/>
+          </a:bodyPr>
+          <a:lstStyle/>
+          <a:p>
+            <a:pPr algn="r">
+              <a:spcAft>
+                <a:spcPts val="400"/>
+              </a:spcAft>
+            </a:pPr>
+            <a:r>
+              <a:rPr sz="900" b="0">
+                <a:solidFill>
+                  <a:srgbClr val="5A5A5A"/>
+                </a:solidFill>
+                <a:latin typeface="Aptos"/>
+              </a:rPr>
+              <a:t>3</a:t>
             </a:r>
           </a:p>
         </p:txBody>
@@ -5220,33 +6888,33 @@
         </p:nvSpPr>
         <p:spPr>
           <a:xfrm>
-            <a:off x="548640" y="292608"/>
-            <a:ext cx="11064240" cy="365760"/>
-          </a:xfrm>
-          <a:prstGeom prst="rect">
-            <a:avLst/>
-          </a:prstGeom>
-          <a:noFill/>
-        </p:spPr>
-        <p:txBody>
-          <a:bodyPr wrap="none">
-            <a:spAutoFit/>
-          </a:bodyPr>
-          <a:lstStyle/>
-          <a:p>
-            <a:pPr algn="l">
-              <a:spcAft>
-                <a:spcPts val="600"/>
-              </a:spcAft>
-            </a:pPr>
-            <a:r>
-              <a:rPr sz="1300" b="1">
-                <a:solidFill>
-                  <a:srgbClr val="B03A2B"/>
-                </a:solidFill>
-                <a:latin typeface="Calibri"/>
-              </a:rPr>
-              <a:t>CONTEXTO</a:t>
+            <a:off x="594360" y="292608"/>
+            <a:ext cx="10972800" cy="502920"/>
+          </a:xfrm>
+          <a:prstGeom prst="rect">
+            <a:avLst/>
+          </a:prstGeom>
+          <a:noFill/>
+        </p:spPr>
+        <p:txBody>
+          <a:bodyPr wrap="square" anchor="t">
+            <a:spAutoFit/>
+          </a:bodyPr>
+          <a:lstStyle/>
+          <a:p>
+            <a:pPr algn="l">
+              <a:spcAft>
+                <a:spcPts val="400"/>
+              </a:spcAft>
+            </a:pPr>
+            <a:r>
+              <a:rPr sz="2500" b="1">
+                <a:solidFill>
+                  <a:srgbClr val="0B5394"/>
+                </a:solidFill>
+                <a:latin typeface="Aptos"/>
+              </a:rPr>
+              <a:t>Half-Eye · papa por departamento</a:t>
             </a:r>
           </a:p>
         </p:txBody>
@@ -5259,76 +6927,61 @@
         </p:nvSpPr>
         <p:spPr>
           <a:xfrm>
-            <a:off x="548640" y="566928"/>
-            <a:ext cx="11064240" cy="731520"/>
-          </a:xfrm>
-          <a:prstGeom prst="rect">
-            <a:avLst/>
-          </a:prstGeom>
-          <a:noFill/>
-        </p:spPr>
-        <p:txBody>
-          <a:bodyPr wrap="none">
-            <a:spAutoFit/>
-          </a:bodyPr>
-          <a:lstStyle/>
-          <a:p>
-            <a:pPr algn="l">
-              <a:spcAft>
-                <a:spcPts val="600"/>
-              </a:spcAft>
-            </a:pPr>
-            <a:r>
-              <a:rPr sz="2800" b="1">
-                <a:solidFill>
-                  <a:srgbClr val="1F3A5F"/>
-                </a:solidFill>
-                <a:latin typeface="Calibri"/>
-              </a:rPr>
-              <a:t>El boxplot y sus limites</a:t>
-            </a:r>
-          </a:p>
-        </p:txBody>
-      </p:sp>
-      <p:sp>
-        <p:nvSpPr>
-          <p:cNvPr id="4" name="TextBox 3"/>
-          <p:cNvSpPr txBox="1"/>
-          <p:nvPr/>
-        </p:nvSpPr>
-        <p:spPr>
-          <a:xfrm>
-            <a:off x="548640" y="1225296"/>
-            <a:ext cx="11064240" cy="91440"/>
-          </a:xfrm>
-          <a:prstGeom prst="rect">
-            <a:avLst/>
-          </a:prstGeom>
-          <a:noFill/>
-        </p:spPr>
-        <p:txBody>
-          <a:bodyPr wrap="none">
-            <a:spAutoFit/>
-          </a:bodyPr>
-          <a:lstStyle/>
-          <a:p>
-            <a:pPr algn="l">
-              <a:spcAft>
-                <a:spcPts val="600"/>
-              </a:spcAft>
-            </a:pPr>
-            <a:r>
-              <a:rPr sz="200" b="0">
-                <a:solidFill>
-                  <a:srgbClr val="B03A2B"/>
-                </a:solidFill>
-                <a:latin typeface="Calibri"/>
-              </a:rPr>
-              <a:t> </a:t>
-            </a:r>
-          </a:p>
-        </p:txBody>
-      </p:sp>
+            <a:off x="621792" y="822960"/>
+            <a:ext cx="10972800" cy="274320"/>
+          </a:xfrm>
+          <a:prstGeom prst="rect">
+            <a:avLst/>
+          </a:prstGeom>
+          <a:noFill/>
+        </p:spPr>
+        <p:txBody>
+          <a:bodyPr wrap="square" anchor="t">
+            <a:spAutoFit/>
+          </a:bodyPr>
+          <a:lstStyle/>
+          <a:p>
+            <a:pPr algn="l">
+              <a:spcAft>
+                <a:spcPts val="400"/>
+              </a:spcAft>
+            </a:pPr>
+            <a:r>
+              <a:rPr sz="1100" b="0">
+                <a:solidFill>
+                  <a:srgbClr val="5A5A5A"/>
+                </a:solidFill>
+                <a:latin typeface="Aptos"/>
+              </a:rPr>
+              <a:t>Captura de la visualización Plotly generada con datos reales EVA</a:t>
+            </a:r>
+          </a:p>
+        </p:txBody>
+      </p:sp>
+      <p:pic>
+        <p:nvPicPr>
+          <p:cNvPr id="4" name="Picture 3" descr="fig1_halfeye_papa.png"/>
+          <p:cNvPicPr>
+            <a:picLocks noChangeAspect="1"/>
+          </p:cNvPicPr>
+          <p:nvPr/>
+        </p:nvPicPr>
+        <p:blipFill>
+          <a:blip r:embed="rId2"/>
+          <a:stretch>
+            <a:fillRect/>
+          </a:stretch>
+        </p:blipFill>
+        <p:spPr>
+          <a:xfrm>
+            <a:off x="457200" y="1097280"/>
+            <a:ext cx="11274552" cy="4434840"/>
+          </a:xfrm>
+          <a:prstGeom prst="rect">
+            <a:avLst/>
+          </a:prstGeom>
+        </p:spPr>
+      </p:pic>
       <p:sp>
         <p:nvSpPr>
           <p:cNvPr id="5" name="TextBox 4"/>
@@ -5337,97 +6990,33 @@
         </p:nvSpPr>
         <p:spPr>
           <a:xfrm>
-            <a:off x="548640" y="1554480"/>
-            <a:ext cx="11064240" cy="4754880"/>
-          </a:xfrm>
-          <a:prstGeom prst="rect">
-            <a:avLst/>
-          </a:prstGeom>
-          <a:noFill/>
-        </p:spPr>
-        <p:txBody>
-          <a:bodyPr wrap="square">
-            <a:spAutoFit/>
-          </a:bodyPr>
-          <a:lstStyle/>
-          <a:p>
-            <a:pPr>
-              <a:spcAft>
-                <a:spcPts val="1000"/>
-              </a:spcAft>
-            </a:pPr>
-            <a:r>
-              <a:rPr sz="1600">
-                <a:solidFill>
-                  <a:srgbClr val="333333"/>
-                </a:solidFill>
-                <a:latin typeface="Calibri"/>
-              </a:rPr>
-              <a:t>- Cinco numeros: minimo, cuartil 1, mediana, cuartil 3, maximo (mas la regla de atipicos)</a:t>
-            </a:r>
-          </a:p>
-          <a:p>
-            <a:pPr>
-              <a:spcAft>
-                <a:spcPts val="1000"/>
-              </a:spcAft>
-            </a:pPr>
-            <a:r>
-              <a:rPr sz="1600">
-                <a:solidFill>
-                  <a:srgbClr val="333333"/>
-                </a:solidFill>
-                <a:latin typeface="Calibri"/>
-              </a:rPr>
-              <a:t>- No muestra la forma de la distribucion</a:t>
-            </a:r>
-          </a:p>
-          <a:p>
-            <a:pPr>
-              <a:spcAft>
-                <a:spcPts val="1000"/>
-              </a:spcAft>
-            </a:pPr>
-            <a:r>
-              <a:rPr sz="1600">
-                <a:solidFill>
-                  <a:srgbClr val="333333"/>
-                </a:solidFill>
-                <a:latin typeface="Calibri"/>
-              </a:rPr>
-              <a:t>- No muestra si hay dos grupos (multimodalidad)</a:t>
-            </a:r>
-          </a:p>
-          <a:p>
-            <a:pPr>
-              <a:spcAft>
-                <a:spcPts val="1000"/>
-              </a:spcAft>
-            </a:pPr>
-            <a:r>
-              <a:rPr sz="1600">
-                <a:solidFill>
-                  <a:srgbClr val="333333"/>
-                </a:solidFill>
-                <a:latin typeface="Calibri"/>
-              </a:rPr>
-              <a:t>- No muestra cuantos datos hay en cada franja (densidad)</a:t>
-            </a:r>
-          </a:p>
-          <a:p>
-            <a:pPr>
-              <a:spcAft>
-                <a:spcPts val="1000"/>
-              </a:spcAft>
-            </a:pPr>
-            <a:r>
-              <a:rPr sz="1600">
-                <a:solidFill>
-                  <a:srgbClr val="333333"/>
-                </a:solidFill>
-                <a:latin typeface="Calibri"/>
-              </a:rPr>
-              <a:t>- No muestra la media, ni si esta cae por encima o por debajo de la mediana</a:t>
+            <a:off x="640080" y="5559552"/>
+            <a:ext cx="10927080" cy="566928"/>
+          </a:xfrm>
+          <a:prstGeom prst="rect">
+            <a:avLst/>
+          </a:prstGeom>
+          <a:noFill/>
+        </p:spPr>
+        <p:txBody>
+          <a:bodyPr wrap="square" anchor="t">
+            <a:spAutoFit/>
+          </a:bodyPr>
+          <a:lstStyle/>
+          <a:p>
+            <a:pPr algn="l">
+              <a:spcAft>
+                <a:spcPts val="400"/>
+              </a:spcAft>
+            </a:pPr>
+            <a:r>
+              <a:rPr sz="1100" b="0">
+                <a:solidFill>
+                  <a:srgbClr val="202124"/>
+                </a:solidFill>
+                <a:latin typeface="Aptos"/>
+              </a:rPr>
+              <a:t>Cundinamarca (20,0 t/ha) y Boyacá superan a Antioquia (14,0) y Nariño en mediana. Los cinco departamentos presentan dispersión amplia; el intervalo central del 95 % mide entre 22,0 y 37,0 t/ha.</a:t>
             </a:r>
           </a:p>
         </p:txBody>
@@ -5440,33 +7029,151 @@
         </p:nvSpPr>
         <p:spPr>
           <a:xfrm>
-            <a:off x="548640" y="6419088"/>
-            <a:ext cx="11064240" cy="365760"/>
-          </a:xfrm>
-          <a:prstGeom prst="rect">
-            <a:avLst/>
-          </a:prstGeom>
-          <a:noFill/>
-        </p:spPr>
-        <p:txBody>
-          <a:bodyPr wrap="none">
-            <a:spAutoFit/>
-          </a:bodyPr>
-          <a:lstStyle/>
-          <a:p>
-            <a:pPr algn="l">
-              <a:spcAft>
-                <a:spcPts val="600"/>
-              </a:spcAft>
-            </a:pPr>
-            <a:r>
-              <a:rPr sz="1000" b="0">
-                <a:solidFill>
-                  <a:srgbClr val="666666"/>
-                </a:solidFill>
-                <a:latin typeface="Calibri"/>
-              </a:rPr>
-              <a:t>Fuente: EVA 2019-2025 (UPRA) - datos.gov.co/d/uejq-wxrr</a:t>
+            <a:off x="640080" y="6144768"/>
+            <a:ext cx="10927080" cy="201168"/>
+          </a:xfrm>
+          <a:prstGeom prst="rect">
+            <a:avLst/>
+          </a:prstGeom>
+          <a:noFill/>
+        </p:spPr>
+        <p:txBody>
+          <a:bodyPr wrap="square" anchor="t">
+            <a:spAutoFit/>
+          </a:bodyPr>
+          <a:lstStyle/>
+          <a:p>
+            <a:pPr algn="ctr">
+              <a:spcAft>
+                <a:spcPts val="400"/>
+              </a:spcAft>
+            </a:pPr>
+            <a:r>
+              <a:rPr sz="900" b="0">
+                <a:solidFill>
+                  <a:srgbClr val="5A5A5A"/>
+                </a:solidFill>
+                <a:latin typeface="Aptos"/>
+              </a:rPr>
+              <a:t>Demostración: fig1_halfeye_papa.html · hover por municipio, período y rendimiento.</a:t>
+            </a:r>
+          </a:p>
+        </p:txBody>
+      </p:sp>
+      <p:sp>
+        <p:nvSpPr>
+          <p:cNvPr id="7" name="TextBox 6"/>
+          <p:cNvSpPr txBox="1"/>
+          <p:nvPr/>
+        </p:nvSpPr>
+        <p:spPr>
+          <a:xfrm>
+            <a:off x="594360" y="6492240"/>
+            <a:ext cx="7315200" cy="201168"/>
+          </a:xfrm>
+          <a:prstGeom prst="rect">
+            <a:avLst/>
+          </a:prstGeom>
+          <a:noFill/>
+        </p:spPr>
+        <p:txBody>
+          <a:bodyPr wrap="square" anchor="t">
+            <a:spAutoFit/>
+          </a:bodyPr>
+          <a:lstStyle/>
+          <a:p>
+            <a:pPr algn="l">
+              <a:spcAft>
+                <a:spcPts val="400"/>
+              </a:spcAft>
+            </a:pPr>
+            <a:r>
+              <a:rPr sz="900" b="0">
+                <a:solidFill>
+                  <a:srgbClr val="5A5A5A"/>
+                </a:solidFill>
+                <a:latin typeface="Aptos"/>
+              </a:rPr>
+              <a:t>Fuente: EVA 2019–2025 (UPRA) · datos.gov.co</a:t>
+            </a:r>
+          </a:p>
+        </p:txBody>
+      </p:sp>
+      <p:sp>
+        <p:nvSpPr>
+          <p:cNvPr id="8" name="TextBox 7"/>
+          <p:cNvSpPr txBox="1"/>
+          <p:nvPr/>
+        </p:nvSpPr>
+        <p:spPr>
+          <a:xfrm>
+            <a:off x="7955279" y="6492240"/>
+            <a:ext cx="3383280" cy="201168"/>
+          </a:xfrm>
+          <a:prstGeom prst="rect">
+            <a:avLst/>
+          </a:prstGeom>
+          <a:noFill/>
+        </p:spPr>
+        <p:txBody>
+          <a:bodyPr wrap="square" anchor="t">
+            <a:spAutoFit/>
+          </a:bodyPr>
+          <a:lstStyle/>
+          <a:p>
+            <a:pPr algn="r">
+              <a:spcAft>
+                <a:spcPts val="400"/>
+              </a:spcAft>
+            </a:pPr>
+            <a:r>
+              <a:rPr sz="900" b="0">
+                <a:solidFill>
+                  <a:srgbClr val="0B5394"/>
+                </a:solidFill>
+                <a:latin typeface="Aptos"/>
+                <a:hlinkClick r:id="rId3"/>
+              </a:rPr>
+              <a:t>https://www.datos.gov.co/d/uejq-wxrr</a:t>
+            </a:r>
+          </a:p>
+        </p:txBody>
+      </p:sp>
+      <p:sp>
+        <p:nvSpPr>
+          <p:cNvPr id="9" name="TextBox 8"/>
+          <p:cNvSpPr txBox="1"/>
+          <p:nvPr/>
+        </p:nvSpPr>
+        <p:spPr>
+          <a:xfrm>
+            <a:off x="11384280" y="6492240"/>
+            <a:ext cx="228600" cy="201168"/>
+          </a:xfrm>
+          <a:prstGeom prst="rect">
+            <a:avLst/>
+          </a:prstGeom>
+          <a:noFill/>
+        </p:spPr>
+        <p:txBody>
+          <a:bodyPr wrap="square" anchor="t">
+            <a:spAutoFit/>
+          </a:bodyPr>
+          <a:lstStyle/>
+          <a:p>
+            <a:pPr algn="r">
+              <a:spcAft>
+                <a:spcPts val="400"/>
+              </a:spcAft>
+            </a:pPr>
+            <a:r>
+              <a:rPr sz="900" b="0">
+                <a:solidFill>
+                  <a:srgbClr val="5A5A5A"/>
+                </a:solidFill>
+                <a:latin typeface="Aptos"/>
+              </a:rPr>
+              <a:t>4</a:t>
             </a:r>
           </a:p>
         </p:txBody>
@@ -5497,298 +7204,598 @@
         </p:nvSpPr>
         <p:spPr>
           <a:xfrm>
-            <a:off x="548640" y="292608"/>
-            <a:ext cx="11064240" cy="365760"/>
-          </a:xfrm>
-          <a:prstGeom prst="rect">
-            <a:avLst/>
-          </a:prstGeom>
-          <a:noFill/>
-        </p:spPr>
-        <p:txBody>
-          <a:bodyPr wrap="none">
-            <a:spAutoFit/>
-          </a:bodyPr>
-          <a:lstStyle/>
-          <a:p>
-            <a:pPr algn="l">
-              <a:spcAft>
-                <a:spcPts val="600"/>
-              </a:spcAft>
-            </a:pPr>
-            <a:r>
-              <a:rPr sz="1300" b="1">
+            <a:off x="594360" y="292608"/>
+            <a:ext cx="10972800" cy="502920"/>
+          </a:xfrm>
+          <a:prstGeom prst="rect">
+            <a:avLst/>
+          </a:prstGeom>
+          <a:noFill/>
+        </p:spPr>
+        <p:txBody>
+          <a:bodyPr wrap="square" anchor="t">
+            <a:spAutoFit/>
+          </a:bodyPr>
+          <a:lstStyle/>
+          <a:p>
+            <a:pPr algn="l">
+              <a:spcAft>
+                <a:spcPts val="400"/>
+              </a:spcAft>
+            </a:pPr>
+            <a:r>
+              <a:rPr sz="2500" b="1">
+                <a:solidFill>
+                  <a:srgbClr val="0B5394"/>
+                </a:solidFill>
+                <a:latin typeface="Aptos"/>
+              </a:rPr>
+              <a:t>2. Ridge Plot (gráfico de crestas)</a:t>
+            </a:r>
+          </a:p>
+        </p:txBody>
+      </p:sp>
+      <p:sp>
+        <p:nvSpPr>
+          <p:cNvPr id="3" name="TextBox 2"/>
+          <p:cNvSpPr txBox="1"/>
+          <p:nvPr/>
+        </p:nvSpPr>
+        <p:spPr>
+          <a:xfrm>
+            <a:off x="621792" y="822960"/>
+            <a:ext cx="10972800" cy="274320"/>
+          </a:xfrm>
+          <a:prstGeom prst="rect">
+            <a:avLst/>
+          </a:prstGeom>
+          <a:noFill/>
+        </p:spPr>
+        <p:txBody>
+          <a:bodyPr wrap="square" anchor="t">
+            <a:spAutoFit/>
+          </a:bodyPr>
+          <a:lstStyle/>
+          <a:p>
+            <a:pPr algn="l">
+              <a:spcAft>
+                <a:spcPts val="400"/>
+              </a:spcAft>
+            </a:pPr>
+            <a:r>
+              <a:rPr sz="1100" b="0">
+                <a:solidFill>
+                  <a:srgbClr val="5A5A5A"/>
+                </a:solidFill>
+                <a:latin typeface="Aptos"/>
+              </a:rPr>
+              <a:t>Concepto, limitación que corrige y uso recomendado</a:t>
+            </a:r>
+          </a:p>
+        </p:txBody>
+      </p:sp>
+      <p:sp>
+        <p:nvSpPr>
+          <p:cNvPr id="4" name="Rounded Rectangle 3"/>
+          <p:cNvSpPr/>
+          <p:nvPr/>
+        </p:nvSpPr>
+        <p:spPr>
+          <a:xfrm>
+            <a:off x="594360" y="1325880"/>
+            <a:ext cx="3566160" cy="4526280"/>
+          </a:xfrm>
+          <a:prstGeom prst="roundRect">
+            <a:avLst/>
+          </a:prstGeom>
+          <a:solidFill>
+            <a:srgbClr val="F2F2F2"/>
+          </a:solidFill>
+          <a:ln w="12700">
+            <a:solidFill>
+              <a:srgbClr val="0B5394"/>
+            </a:solidFill>
+          </a:ln>
+        </p:spPr>
+        <p:style>
+          <a:lnRef idx="1">
+            <a:schemeClr val="accent1"/>
+          </a:lnRef>
+          <a:fillRef idx="3">
+            <a:schemeClr val="accent1"/>
+          </a:fillRef>
+          <a:effectRef idx="2">
+            <a:schemeClr val="accent1"/>
+          </a:effectRef>
+          <a:fontRef idx="minor">
+            <a:schemeClr val="lt1"/>
+          </a:fontRef>
+        </p:style>
+        <p:txBody>
+          <a:bodyPr rtlCol="0" anchor="ctr"/>
+          <a:lstStyle/>
+          <a:p>
+            <a:pPr algn="ctr"/>
+          </a:p>
+        </p:txBody>
+      </p:sp>
+      <p:sp>
+        <p:nvSpPr>
+          <p:cNvPr id="5" name="TextBox 4"/>
+          <p:cNvSpPr txBox="1"/>
+          <p:nvPr/>
+        </p:nvSpPr>
+        <p:spPr>
+          <a:xfrm>
+            <a:off x="777240" y="1463039"/>
+            <a:ext cx="3200400" cy="292608"/>
+          </a:xfrm>
+          <a:prstGeom prst="rect">
+            <a:avLst/>
+          </a:prstGeom>
+          <a:noFill/>
+        </p:spPr>
+        <p:txBody>
+          <a:bodyPr wrap="square" anchor="t">
+            <a:spAutoFit/>
+          </a:bodyPr>
+          <a:lstStyle/>
+          <a:p>
+            <a:pPr algn="l">
+              <a:spcAft>
+                <a:spcPts val="400"/>
+              </a:spcAft>
+            </a:pPr>
+            <a:r>
+              <a:rPr sz="1000" b="1">
+                <a:solidFill>
+                  <a:srgbClr val="0B5394"/>
+                </a:solidFill>
+                <a:latin typeface="Aptos"/>
+              </a:rPr>
+              <a:t>CONCEPTO</a:t>
+            </a:r>
+          </a:p>
+        </p:txBody>
+      </p:sp>
+      <p:sp>
+        <p:nvSpPr>
+          <p:cNvPr id="6" name="TextBox 5"/>
+          <p:cNvSpPr txBox="1"/>
+          <p:nvPr/>
+        </p:nvSpPr>
+        <p:spPr>
+          <a:xfrm>
+            <a:off x="777240" y="1783080"/>
+            <a:ext cx="3200400" cy="3959352"/>
+          </a:xfrm>
+          <a:prstGeom prst="rect">
+            <a:avLst/>
+          </a:prstGeom>
+          <a:noFill/>
+        </p:spPr>
+        <p:txBody>
+          <a:bodyPr wrap="square" anchor="t">
+            <a:spAutoFit/>
+          </a:bodyPr>
+          <a:lstStyle/>
+          <a:p>
+            <a:pPr algn="l">
+              <a:spcAft>
+                <a:spcPts val="400"/>
+              </a:spcAft>
+            </a:pPr>
+            <a:r>
+              <a:rPr sz="1500" b="0">
+                <a:solidFill>
+                  <a:srgbClr val="202124"/>
+                </a:solidFill>
+                <a:latin typeface="Aptos"/>
+              </a:rPr>
+              <a:t>Apila una densidad por grupo en un eje x común para comparar formas sin que una distribución tape a otra.</a:t>
+            </a:r>
+          </a:p>
+        </p:txBody>
+      </p:sp>
+      <p:sp>
+        <p:nvSpPr>
+          <p:cNvPr id="7" name="Rounded Rectangle 6"/>
+          <p:cNvSpPr/>
+          <p:nvPr/>
+        </p:nvSpPr>
+        <p:spPr>
+          <a:xfrm>
+            <a:off x="4315968" y="1325880"/>
+            <a:ext cx="3566160" cy="4526280"/>
+          </a:xfrm>
+          <a:prstGeom prst="roundRect">
+            <a:avLst/>
+          </a:prstGeom>
+          <a:solidFill>
+            <a:srgbClr val="F2F2F2"/>
+          </a:solidFill>
+          <a:ln w="12700">
+            <a:solidFill>
+              <a:srgbClr val="B03A2B"/>
+            </a:solidFill>
+          </a:ln>
+        </p:spPr>
+        <p:style>
+          <a:lnRef idx="1">
+            <a:schemeClr val="accent1"/>
+          </a:lnRef>
+          <a:fillRef idx="3">
+            <a:schemeClr val="accent1"/>
+          </a:fillRef>
+          <a:effectRef idx="2">
+            <a:schemeClr val="accent1"/>
+          </a:effectRef>
+          <a:fontRef idx="minor">
+            <a:schemeClr val="lt1"/>
+          </a:fontRef>
+        </p:style>
+        <p:txBody>
+          <a:bodyPr rtlCol="0" anchor="ctr"/>
+          <a:lstStyle/>
+          <a:p>
+            <a:pPr algn="ctr"/>
+          </a:p>
+        </p:txBody>
+      </p:sp>
+      <p:sp>
+        <p:nvSpPr>
+          <p:cNvPr id="8" name="TextBox 7"/>
+          <p:cNvSpPr txBox="1"/>
+          <p:nvPr/>
+        </p:nvSpPr>
+        <p:spPr>
+          <a:xfrm>
+            <a:off x="4498848" y="1463039"/>
+            <a:ext cx="3200400" cy="292608"/>
+          </a:xfrm>
+          <a:prstGeom prst="rect">
+            <a:avLst/>
+          </a:prstGeom>
+          <a:noFill/>
+        </p:spPr>
+        <p:txBody>
+          <a:bodyPr wrap="square" anchor="t">
+            <a:spAutoFit/>
+          </a:bodyPr>
+          <a:lstStyle/>
+          <a:p>
+            <a:pPr algn="l">
+              <a:spcAft>
+                <a:spcPts val="400"/>
+              </a:spcAft>
+            </a:pPr>
+            <a:r>
+              <a:rPr sz="1000" b="1">
                 <a:solidFill>
                   <a:srgbClr val="B03A2B"/>
                 </a:solidFill>
-                <a:latin typeface="Calibri"/>
-              </a:rPr>
-              <a:t>HALLAZGO</a:t>
-            </a:r>
-          </a:p>
-        </p:txBody>
-      </p:sp>
-      <p:sp>
-        <p:nvSpPr>
-          <p:cNvPr id="3" name="TextBox 2"/>
-          <p:cNvSpPr txBox="1"/>
-          <p:nvPr/>
-        </p:nvSpPr>
-        <p:spPr>
-          <a:xfrm>
-            <a:off x="548640" y="566928"/>
-            <a:ext cx="11064240" cy="731520"/>
-          </a:xfrm>
-          <a:prstGeom prst="rect">
-            <a:avLst/>
-          </a:prstGeom>
-          <a:noFill/>
-        </p:spPr>
-        <p:txBody>
-          <a:bodyPr wrap="none">
-            <a:spAutoFit/>
-          </a:bodyPr>
-          <a:lstStyle/>
-          <a:p>
-            <a:pPr algn="l">
-              <a:spcAft>
-                <a:spcPts val="600"/>
-              </a:spcAft>
-            </a:pPr>
-            <a:r>
-              <a:rPr sz="2800" b="1">
-                <a:solidFill>
-                  <a:srgbClr val="1F3A5F"/>
-                </a:solidFill>
-                <a:latin typeface="Calibri"/>
-              </a:rPr>
-              <a:t>Las cinco variaciones y que corrige cada una</a:t>
-            </a:r>
-          </a:p>
-        </p:txBody>
-      </p:sp>
-      <p:sp>
-        <p:nvSpPr>
-          <p:cNvPr id="4" name="TextBox 3"/>
-          <p:cNvSpPr txBox="1"/>
-          <p:nvPr/>
-        </p:nvSpPr>
-        <p:spPr>
-          <a:xfrm>
-            <a:off x="548640" y="1225296"/>
-            <a:ext cx="11064240" cy="91440"/>
-          </a:xfrm>
-          <a:prstGeom prst="rect">
-            <a:avLst/>
-          </a:prstGeom>
-          <a:noFill/>
-        </p:spPr>
-        <p:txBody>
-          <a:bodyPr wrap="none">
-            <a:spAutoFit/>
-          </a:bodyPr>
-          <a:lstStyle/>
-          <a:p>
-            <a:pPr algn="l">
-              <a:spcAft>
-                <a:spcPts val="600"/>
-              </a:spcAft>
-            </a:pPr>
-            <a:r>
-              <a:rPr sz="200" b="0">
-                <a:solidFill>
-                  <a:srgbClr val="B03A2B"/>
-                </a:solidFill>
-                <a:latin typeface="Calibri"/>
-              </a:rPr>
-              <a:t> </a:t>
-            </a:r>
-          </a:p>
-        </p:txBody>
-      </p:sp>
-      <p:sp>
-        <p:nvSpPr>
-          <p:cNvPr id="5" name="TextBox 4"/>
-          <p:cNvSpPr txBox="1"/>
-          <p:nvPr/>
-        </p:nvSpPr>
-        <p:spPr>
-          <a:xfrm>
-            <a:off x="548640" y="1554480"/>
-            <a:ext cx="11064240" cy="4572000"/>
-          </a:xfrm>
-          <a:prstGeom prst="rect">
-            <a:avLst/>
-          </a:prstGeom>
-          <a:noFill/>
-        </p:spPr>
-        <p:txBody>
-          <a:bodyPr wrap="square">
-            <a:spAutoFit/>
-          </a:bodyPr>
-          <a:lstStyle/>
-          <a:p>
-            <a:pPr>
-              <a:spcAft>
-                <a:spcPts val="1400"/>
-              </a:spcAft>
-            </a:pPr>
-            <a:r>
-              <a:rPr sz="2000" b="1">
-                <a:solidFill>
-                  <a:srgbClr val="B03A2B"/>
-                </a:solidFill>
-                <a:latin typeface="Calibri"/>
-              </a:rPr>
-              <a:t>Half-Eye  </a:t>
-            </a:r>
-            <a:r>
-              <a:rPr sz="1800">
-                <a:solidFill>
-                  <a:srgbClr val="333333"/>
-                </a:solidFill>
-                <a:latin typeface="Calibri"/>
-              </a:rPr>
-              <a:t>- agrega la densidad y la forma; revela donde se apila cada grupo</a:t>
-            </a:r>
-          </a:p>
-          <a:p>
-            <a:pPr>
-              <a:spcAft>
-                <a:spcPts val="1400"/>
-              </a:spcAft>
-            </a:pPr>
-            <a:r>
-              <a:rPr sz="2000" b="1">
-                <a:solidFill>
-                  <a:srgbClr val="B03A2B"/>
-                </a:solidFill>
-                <a:latin typeface="Calibri"/>
-              </a:rPr>
-              <a:t>Ridge  </a:t>
-            </a:r>
-            <a:r>
-              <a:rPr sz="1800">
-                <a:solidFill>
-                  <a:srgbClr val="333333"/>
-                </a:solidFill>
-                <a:latin typeface="Calibri"/>
-              </a:rPr>
-              <a:t>- compara muchas distribuciones a la vez sobre un eje comun</a:t>
-            </a:r>
-          </a:p>
-          <a:p>
-            <a:pPr>
-              <a:spcAft>
-                <a:spcPts val="1400"/>
-              </a:spcAft>
-            </a:pPr>
-            <a:r>
-              <a:rPr sz="2000" b="1">
-                <a:solidFill>
-                  <a:srgbClr val="B03A2B"/>
-                </a:solidFill>
-                <a:latin typeface="Calibri"/>
-              </a:rPr>
-              <a:t>Sinaplot  </a:t>
-            </a:r>
-            <a:r>
-              <a:rPr sz="1800">
-                <a:solidFill>
-                  <a:srgbClr val="333333"/>
-                </a:solidFill>
-                <a:latin typeface="Calibri"/>
-              </a:rPr>
-              <a:t>- dibuja todos los puntos con jitter proporcional a la densidad</a:t>
-            </a:r>
-          </a:p>
-          <a:p>
-            <a:pPr>
-              <a:spcAft>
-                <a:spcPts val="1400"/>
-              </a:spcAft>
-            </a:pPr>
-            <a:r>
-              <a:rPr sz="2000" b="1">
-                <a:solidFill>
-                  <a:srgbClr val="B03A2B"/>
-                </a:solidFill>
-                <a:latin typeface="Calibri"/>
-              </a:rPr>
-              <a:t>Boxenplot  </a:t>
-            </a:r>
-            <a:r>
-              <a:rPr sz="1800">
-                <a:solidFill>
-                  <a:srgbClr val="333333"/>
-                </a:solidFill>
-                <a:latin typeface="Calibri"/>
-              </a:rPr>
-              <a:t>- dibuja muchos cuantiles; muestra las colas con detalle</a:t>
-            </a:r>
-          </a:p>
-          <a:p>
-            <a:pPr>
-              <a:spcAft>
-                <a:spcPts val="1400"/>
-              </a:spcAft>
-            </a:pPr>
-            <a:r>
-              <a:rPr sz="2000" b="1">
-                <a:solidFill>
-                  <a:srgbClr val="B03A2B"/>
-                </a:solidFill>
-                <a:latin typeface="Calibri"/>
-              </a:rPr>
-              <a:t>Composite  </a:t>
-            </a:r>
-            <a:r>
-              <a:rPr sz="1800">
-                <a:solidFill>
-                  <a:srgbClr val="333333"/>
-                </a:solidFill>
-                <a:latin typeface="Calibri"/>
-              </a:rPr>
-              <a:t>- superpone caja + media + puntos en una sola vista</a:t>
-            </a:r>
-          </a:p>
-        </p:txBody>
-      </p:sp>
-      <p:sp>
-        <p:nvSpPr>
-          <p:cNvPr id="6" name="TextBox 5"/>
-          <p:cNvSpPr txBox="1"/>
-          <p:nvPr/>
-        </p:nvSpPr>
-        <p:spPr>
-          <a:xfrm>
-            <a:off x="548640" y="6419088"/>
-            <a:ext cx="11064240" cy="365760"/>
-          </a:xfrm>
-          <a:prstGeom prst="rect">
-            <a:avLst/>
-          </a:prstGeom>
-          <a:noFill/>
-        </p:spPr>
-        <p:txBody>
-          <a:bodyPr wrap="none">
-            <a:spAutoFit/>
-          </a:bodyPr>
-          <a:lstStyle/>
-          <a:p>
-            <a:pPr algn="l">
-              <a:spcAft>
-                <a:spcPts val="600"/>
-              </a:spcAft>
-            </a:pPr>
-            <a:r>
-              <a:rPr sz="1000" b="0">
-                <a:solidFill>
-                  <a:srgbClr val="666666"/>
-                </a:solidFill>
-                <a:latin typeface="Calibri"/>
-              </a:rPr>
-              <a:t>Fuente: EVA 2019-2025 (UPRA) - datos.gov.co/d/uejq-wxrr</a:t>
+                <a:latin typeface="Aptos"/>
+              </a:rPr>
+              <a:t>QUÉ NO MUESTRA LA CAJA</a:t>
+            </a:r>
+          </a:p>
+        </p:txBody>
+      </p:sp>
+      <p:sp>
+        <p:nvSpPr>
+          <p:cNvPr id="9" name="TextBox 8"/>
+          <p:cNvSpPr txBox="1"/>
+          <p:nvPr/>
+        </p:nvSpPr>
+        <p:spPr>
+          <a:xfrm>
+            <a:off x="4498848" y="1783080"/>
+            <a:ext cx="3200400" cy="3959352"/>
+          </a:xfrm>
+          <a:prstGeom prst="rect">
+            <a:avLst/>
+          </a:prstGeom>
+          <a:noFill/>
+        </p:spPr>
+        <p:txBody>
+          <a:bodyPr wrap="square" anchor="t">
+            <a:spAutoFit/>
+          </a:bodyPr>
+          <a:lstStyle/>
+          <a:p>
+            <a:pPr algn="l">
+              <a:spcAft>
+                <a:spcPts val="400"/>
+              </a:spcAft>
+            </a:pPr>
+            <a:r>
+              <a:rPr sz="1500" b="0">
+                <a:solidFill>
+                  <a:srgbClr val="202124"/>
+                </a:solidFill>
+                <a:latin typeface="Aptos"/>
+              </a:rPr>
+              <a:t>El boxplot dificulta ver si la forma cambia entre muchos grupos ordenados, como una serie temporal.</a:t>
+            </a:r>
+          </a:p>
+        </p:txBody>
+      </p:sp>
+      <p:sp>
+        <p:nvSpPr>
+          <p:cNvPr id="10" name="Rounded Rectangle 9"/>
+          <p:cNvSpPr/>
+          <p:nvPr/>
+        </p:nvSpPr>
+        <p:spPr>
+          <a:xfrm>
+            <a:off x="8037575" y="1325880"/>
+            <a:ext cx="3566160" cy="4526280"/>
+          </a:xfrm>
+          <a:prstGeom prst="roundRect">
+            <a:avLst/>
+          </a:prstGeom>
+          <a:solidFill>
+            <a:srgbClr val="F2F2F2"/>
+          </a:solidFill>
+          <a:ln w="12700">
+            <a:solidFill>
+              <a:srgbClr val="0B5394"/>
+            </a:solidFill>
+          </a:ln>
+        </p:spPr>
+        <p:style>
+          <a:lnRef idx="1">
+            <a:schemeClr val="accent1"/>
+          </a:lnRef>
+          <a:fillRef idx="3">
+            <a:schemeClr val="accent1"/>
+          </a:fillRef>
+          <a:effectRef idx="2">
+            <a:schemeClr val="accent1"/>
+          </a:effectRef>
+          <a:fontRef idx="minor">
+            <a:schemeClr val="lt1"/>
+          </a:fontRef>
+        </p:style>
+        <p:txBody>
+          <a:bodyPr rtlCol="0" anchor="ctr"/>
+          <a:lstStyle/>
+          <a:p>
+            <a:pPr algn="ctr"/>
+          </a:p>
+        </p:txBody>
+      </p:sp>
+      <p:sp>
+        <p:nvSpPr>
+          <p:cNvPr id="11" name="TextBox 10"/>
+          <p:cNvSpPr txBox="1"/>
+          <p:nvPr/>
+        </p:nvSpPr>
+        <p:spPr>
+          <a:xfrm>
+            <a:off x="8220455" y="1463039"/>
+            <a:ext cx="3200400" cy="292608"/>
+          </a:xfrm>
+          <a:prstGeom prst="rect">
+            <a:avLst/>
+          </a:prstGeom>
+          <a:noFill/>
+        </p:spPr>
+        <p:txBody>
+          <a:bodyPr wrap="square" anchor="t">
+            <a:spAutoFit/>
+          </a:bodyPr>
+          <a:lstStyle/>
+          <a:p>
+            <a:pPr algn="l">
+              <a:spcAft>
+                <a:spcPts val="400"/>
+              </a:spcAft>
+            </a:pPr>
+            <a:r>
+              <a:rPr sz="1000" b="1">
+                <a:solidFill>
+                  <a:srgbClr val="0B5394"/>
+                </a:solidFill>
+                <a:latin typeface="Aptos"/>
+              </a:rPr>
+              <a:t>ÚSELO CUANDO</a:t>
+            </a:r>
+          </a:p>
+        </p:txBody>
+      </p:sp>
+      <p:sp>
+        <p:nvSpPr>
+          <p:cNvPr id="12" name="TextBox 11"/>
+          <p:cNvSpPr txBox="1"/>
+          <p:nvPr/>
+        </p:nvSpPr>
+        <p:spPr>
+          <a:xfrm>
+            <a:off x="8220455" y="1783080"/>
+            <a:ext cx="3200400" cy="3959352"/>
+          </a:xfrm>
+          <a:prstGeom prst="rect">
+            <a:avLst/>
+          </a:prstGeom>
+          <a:noFill/>
+        </p:spPr>
+        <p:txBody>
+          <a:bodyPr wrap="square" anchor="t">
+            <a:spAutoFit/>
+          </a:bodyPr>
+          <a:lstStyle/>
+          <a:p>
+            <a:pPr algn="l">
+              <a:spcAft>
+                <a:spcPts val="400"/>
+              </a:spcAft>
+            </a:pPr>
+            <a:r>
+              <a:rPr sz="1500" b="0">
+                <a:solidFill>
+                  <a:srgbClr val="202124"/>
+                </a:solidFill>
+                <a:latin typeface="Aptos"/>
+              </a:rPr>
+              <a:t>Muchas categorías ordenadas —años, tratamientos o sitios— con N suficiente en cada una. No conviene cuando hay pocas categorías.</a:t>
+            </a:r>
+          </a:p>
+        </p:txBody>
+      </p:sp>
+      <p:sp>
+        <p:nvSpPr>
+          <p:cNvPr id="13" name="TextBox 12"/>
+          <p:cNvSpPr txBox="1"/>
+          <p:nvPr/>
+        </p:nvSpPr>
+        <p:spPr>
+          <a:xfrm>
+            <a:off x="640080" y="5989320"/>
+            <a:ext cx="10972800" cy="274320"/>
+          </a:xfrm>
+          <a:prstGeom prst="rect">
+            <a:avLst/>
+          </a:prstGeom>
+          <a:noFill/>
+        </p:spPr>
+        <p:txBody>
+          <a:bodyPr wrap="square" anchor="t">
+            <a:spAutoFit/>
+          </a:bodyPr>
+          <a:lstStyle/>
+          <a:p>
+            <a:pPr algn="ctr">
+              <a:spcAft>
+                <a:spcPts val="400"/>
+              </a:spcAft>
+            </a:pPr>
+            <a:r>
+              <a:rPr sz="1200" b="0">
+                <a:solidFill>
+                  <a:srgbClr val="5A5A5A"/>
+                </a:solidFill>
+                <a:latin typeface="Aptos"/>
+              </a:rPr>
+              <a:t>Corte: plátano con rendimiento &gt; 0 por año, 2019–2025; N anual entre 784 y 824.</a:t>
+            </a:r>
+          </a:p>
+        </p:txBody>
+      </p:sp>
+      <p:sp>
+        <p:nvSpPr>
+          <p:cNvPr id="14" name="TextBox 13"/>
+          <p:cNvSpPr txBox="1"/>
+          <p:nvPr/>
+        </p:nvSpPr>
+        <p:spPr>
+          <a:xfrm>
+            <a:off x="594360" y="6492240"/>
+            <a:ext cx="7315200" cy="201168"/>
+          </a:xfrm>
+          <a:prstGeom prst="rect">
+            <a:avLst/>
+          </a:prstGeom>
+          <a:noFill/>
+        </p:spPr>
+        <p:txBody>
+          <a:bodyPr wrap="square" anchor="t">
+            <a:spAutoFit/>
+          </a:bodyPr>
+          <a:lstStyle/>
+          <a:p>
+            <a:pPr algn="l">
+              <a:spcAft>
+                <a:spcPts val="400"/>
+              </a:spcAft>
+            </a:pPr>
+            <a:r>
+              <a:rPr sz="900" b="0">
+                <a:solidFill>
+                  <a:srgbClr val="5A5A5A"/>
+                </a:solidFill>
+                <a:latin typeface="Aptos"/>
+              </a:rPr>
+              <a:t>Fuente: EVA 2019–2025 (UPRA) · datos.gov.co</a:t>
+            </a:r>
+          </a:p>
+        </p:txBody>
+      </p:sp>
+      <p:sp>
+        <p:nvSpPr>
+          <p:cNvPr id="15" name="TextBox 14"/>
+          <p:cNvSpPr txBox="1"/>
+          <p:nvPr/>
+        </p:nvSpPr>
+        <p:spPr>
+          <a:xfrm>
+            <a:off x="7955279" y="6492240"/>
+            <a:ext cx="3383280" cy="201168"/>
+          </a:xfrm>
+          <a:prstGeom prst="rect">
+            <a:avLst/>
+          </a:prstGeom>
+          <a:noFill/>
+        </p:spPr>
+        <p:txBody>
+          <a:bodyPr wrap="square" anchor="t">
+            <a:spAutoFit/>
+          </a:bodyPr>
+          <a:lstStyle/>
+          <a:p>
+            <a:pPr algn="r">
+              <a:spcAft>
+                <a:spcPts val="400"/>
+              </a:spcAft>
+            </a:pPr>
+            <a:r>
+              <a:rPr sz="900" b="0">
+                <a:solidFill>
+                  <a:srgbClr val="0B5394"/>
+                </a:solidFill>
+                <a:latin typeface="Aptos"/>
+                <a:hlinkClick r:id="rId2"/>
+              </a:rPr>
+              <a:t>https://www.datos.gov.co/d/uejq-wxrr</a:t>
+            </a:r>
+          </a:p>
+        </p:txBody>
+      </p:sp>
+      <p:sp>
+        <p:nvSpPr>
+          <p:cNvPr id="16" name="TextBox 15"/>
+          <p:cNvSpPr txBox="1"/>
+          <p:nvPr/>
+        </p:nvSpPr>
+        <p:spPr>
+          <a:xfrm>
+            <a:off x="11384280" y="6492240"/>
+            <a:ext cx="228600" cy="201168"/>
+          </a:xfrm>
+          <a:prstGeom prst="rect">
+            <a:avLst/>
+          </a:prstGeom>
+          <a:noFill/>
+        </p:spPr>
+        <p:txBody>
+          <a:bodyPr wrap="square" anchor="t">
+            <a:spAutoFit/>
+          </a:bodyPr>
+          <a:lstStyle/>
+          <a:p>
+            <a:pPr algn="r">
+              <a:spcAft>
+                <a:spcPts val="400"/>
+              </a:spcAft>
+            </a:pPr>
+            <a:r>
+              <a:rPr sz="900" b="0">
+                <a:solidFill>
+                  <a:srgbClr val="5A5A5A"/>
+                </a:solidFill>
+                <a:latin typeface="Aptos"/>
+              </a:rPr>
+              <a:t>5</a:t>
             </a:r>
           </a:p>
         </p:txBody>
@@ -5819,33 +7826,33 @@
         </p:nvSpPr>
         <p:spPr>
           <a:xfrm>
-            <a:off x="548640" y="292608"/>
-            <a:ext cx="11064240" cy="365760"/>
-          </a:xfrm>
-          <a:prstGeom prst="rect">
-            <a:avLst/>
-          </a:prstGeom>
-          <a:noFill/>
-        </p:spPr>
-        <p:txBody>
-          <a:bodyPr wrap="none">
-            <a:spAutoFit/>
-          </a:bodyPr>
-          <a:lstStyle/>
-          <a:p>
-            <a:pPr algn="l">
-              <a:spcAft>
-                <a:spcPts val="600"/>
-              </a:spcAft>
-            </a:pPr>
-            <a:r>
-              <a:rPr sz="1300" b="1">
-                <a:solidFill>
-                  <a:srgbClr val="B03A2B"/>
-                </a:solidFill>
-                <a:latin typeface="Calibri"/>
-              </a:rPr>
-              <a:t>HALLAZGO 1 / HALF-EYE</a:t>
+            <a:off x="594360" y="292608"/>
+            <a:ext cx="10972800" cy="502920"/>
+          </a:xfrm>
+          <a:prstGeom prst="rect">
+            <a:avLst/>
+          </a:prstGeom>
+          <a:noFill/>
+        </p:spPr>
+        <p:txBody>
+          <a:bodyPr wrap="square" anchor="t">
+            <a:spAutoFit/>
+          </a:bodyPr>
+          <a:lstStyle/>
+          <a:p>
+            <a:pPr algn="l">
+              <a:spcAft>
+                <a:spcPts val="400"/>
+              </a:spcAft>
+            </a:pPr>
+            <a:r>
+              <a:rPr sz="2500" b="1">
+                <a:solidFill>
+                  <a:srgbClr val="0B5394"/>
+                </a:solidFill>
+                <a:latin typeface="Aptos"/>
+              </a:rPr>
+              <a:t>Ridge · plátano por año</a:t>
             </a:r>
           </a:p>
         </p:txBody>
@@ -5858,79 +7865,40 @@
         </p:nvSpPr>
         <p:spPr>
           <a:xfrm>
-            <a:off x="548640" y="566928"/>
-            <a:ext cx="11064240" cy="731520"/>
-          </a:xfrm>
-          <a:prstGeom prst="rect">
-            <a:avLst/>
-          </a:prstGeom>
-          <a:noFill/>
-        </p:spPr>
-        <p:txBody>
-          <a:bodyPr wrap="none">
-            <a:spAutoFit/>
-          </a:bodyPr>
-          <a:lstStyle/>
-          <a:p>
-            <a:pPr algn="l">
-              <a:spcAft>
-                <a:spcPts val="600"/>
-              </a:spcAft>
-            </a:pPr>
-            <a:r>
-              <a:rPr sz="2800" b="1">
-                <a:solidFill>
-                  <a:srgbClr val="1F3A5F"/>
-                </a:solidFill>
-                <a:latin typeface="Calibri"/>
-              </a:rPr>
-              <a:t>Figura 1 - Papa por departamento</a:t>
-            </a:r>
-          </a:p>
-        </p:txBody>
-      </p:sp>
-      <p:sp>
-        <p:nvSpPr>
-          <p:cNvPr id="4" name="TextBox 3"/>
-          <p:cNvSpPr txBox="1"/>
-          <p:nvPr/>
-        </p:nvSpPr>
-        <p:spPr>
-          <a:xfrm>
-            <a:off x="548640" y="1225296"/>
-            <a:ext cx="11064240" cy="91440"/>
-          </a:xfrm>
-          <a:prstGeom prst="rect">
-            <a:avLst/>
-          </a:prstGeom>
-          <a:noFill/>
-        </p:spPr>
-        <p:txBody>
-          <a:bodyPr wrap="none">
-            <a:spAutoFit/>
-          </a:bodyPr>
-          <a:lstStyle/>
-          <a:p>
-            <a:pPr algn="l">
-              <a:spcAft>
-                <a:spcPts val="600"/>
-              </a:spcAft>
-            </a:pPr>
-            <a:r>
-              <a:rPr sz="200" b="0">
-                <a:solidFill>
-                  <a:srgbClr val="B03A2B"/>
-                </a:solidFill>
-                <a:latin typeface="Calibri"/>
-              </a:rPr>
-              <a:t> </a:t>
+            <a:off x="621792" y="822960"/>
+            <a:ext cx="10972800" cy="274320"/>
+          </a:xfrm>
+          <a:prstGeom prst="rect">
+            <a:avLst/>
+          </a:prstGeom>
+          <a:noFill/>
+        </p:spPr>
+        <p:txBody>
+          <a:bodyPr wrap="square" anchor="t">
+            <a:spAutoFit/>
+          </a:bodyPr>
+          <a:lstStyle/>
+          <a:p>
+            <a:pPr algn="l">
+              <a:spcAft>
+                <a:spcPts val="400"/>
+              </a:spcAft>
+            </a:pPr>
+            <a:r>
+              <a:rPr sz="1100" b="0">
+                <a:solidFill>
+                  <a:srgbClr val="5A5A5A"/>
+                </a:solidFill>
+                <a:latin typeface="Aptos"/>
+              </a:rPr>
+              <a:t>Captura de la visualización Plotly generada con datos reales EVA</a:t>
             </a:r>
           </a:p>
         </p:txBody>
       </p:sp>
       <p:pic>
         <p:nvPicPr>
-          <p:cNvPr id="5" name="Picture 4" descr="fig1_halfeye_papa.png"/>
+          <p:cNvPr id="4" name="Picture 3" descr="fig2_ridge_platano.png"/>
           <p:cNvPicPr>
             <a:picLocks noChangeAspect="1"/>
           </p:cNvPicPr>
@@ -5944,8 +7912,8 @@
         </p:blipFill>
         <p:spPr>
           <a:xfrm>
-            <a:off x="548640" y="1417320"/>
-            <a:ext cx="11064240" cy="5327227"/>
+            <a:off x="457200" y="1097280"/>
+            <a:ext cx="11274552" cy="4434840"/>
           </a:xfrm>
           <a:prstGeom prst="rect">
             <a:avLst/>
@@ -5954,39 +7922,78 @@
       </p:pic>
       <p:sp>
         <p:nvSpPr>
+          <p:cNvPr id="5" name="TextBox 4"/>
+          <p:cNvSpPr txBox="1"/>
+          <p:nvPr/>
+        </p:nvSpPr>
+        <p:spPr>
+          <a:xfrm>
+            <a:off x="640080" y="5559552"/>
+            <a:ext cx="10927080" cy="566928"/>
+          </a:xfrm>
+          <a:prstGeom prst="rect">
+            <a:avLst/>
+          </a:prstGeom>
+          <a:noFill/>
+        </p:spPr>
+        <p:txBody>
+          <a:bodyPr wrap="square" anchor="t">
+            <a:spAutoFit/>
+          </a:bodyPr>
+          <a:lstStyle/>
+          <a:p>
+            <a:pPr algn="l">
+              <a:spcAft>
+                <a:spcPts val="400"/>
+              </a:spcAft>
+            </a:pPr>
+            <a:r>
+              <a:rPr sz="1100" b="0">
+                <a:solidFill>
+                  <a:srgbClr val="202124"/>
+                </a:solidFill>
+                <a:latin typeface="Aptos"/>
+              </a:rPr>
+              <a:t>La mediana se mantiene entre 7,0 y 7,6 t/ha y el IQR entre 4,2 y 5,0. El único movimiento visible es el leve repunte de 2025; persiste una cola alta en todos los años.</a:t>
+            </a:r>
+          </a:p>
+        </p:txBody>
+      </p:sp>
+      <p:sp>
+        <p:nvSpPr>
           <p:cNvPr id="6" name="TextBox 5"/>
           <p:cNvSpPr txBox="1"/>
           <p:nvPr/>
         </p:nvSpPr>
         <p:spPr>
           <a:xfrm>
-            <a:off x="548640" y="5806440"/>
-            <a:ext cx="11064240" cy="640080"/>
-          </a:xfrm>
-          <a:prstGeom prst="rect">
-            <a:avLst/>
-          </a:prstGeom>
-          <a:noFill/>
-        </p:spPr>
-        <p:txBody>
-          <a:bodyPr wrap="none">
-            <a:spAutoFit/>
-          </a:bodyPr>
-          <a:lstStyle/>
-          <a:p>
-            <a:pPr algn="l">
-              <a:spcAft>
-                <a:spcPts val="600"/>
-              </a:spcAft>
-            </a:pPr>
-            <a:r>
-              <a:rPr sz="1500" b="1">
-                <a:solidFill>
-                  <a:srgbClr val="333333"/>
-                </a:solidFill>
-                <a:latin typeface="Calibri"/>
-              </a:rPr>
-              <a:t>Cundinamarca y Boyaca rinden mas en mediana que Antioquia y Narino; la densidad muestra donde se apila cada uno.</a:t>
+            <a:off x="640080" y="6144768"/>
+            <a:ext cx="10927080" cy="201168"/>
+          </a:xfrm>
+          <a:prstGeom prst="rect">
+            <a:avLst/>
+          </a:prstGeom>
+          <a:noFill/>
+        </p:spPr>
+        <p:txBody>
+          <a:bodyPr wrap="square" anchor="t">
+            <a:spAutoFit/>
+          </a:bodyPr>
+          <a:lstStyle/>
+          <a:p>
+            <a:pPr algn="ctr">
+              <a:spcAft>
+                <a:spcPts val="400"/>
+              </a:spcAft>
+            </a:pPr>
+            <a:r>
+              <a:rPr sz="900" b="0">
+                <a:solidFill>
+                  <a:srgbClr val="5A5A5A"/>
+                </a:solidFill>
+                <a:latin typeface="Aptos"/>
+              </a:rPr>
+              <a:t>Demostración: fig2_ridge_platano.html · hover por municipio, departamento, período y rendimiento.</a:t>
             </a:r>
           </a:p>
         </p:txBody>
@@ -5999,33 +8006,112 @@
         </p:nvSpPr>
         <p:spPr>
           <a:xfrm>
-            <a:off x="548640" y="6419088"/>
-            <a:ext cx="11064240" cy="365760"/>
-          </a:xfrm>
-          <a:prstGeom prst="rect">
-            <a:avLst/>
-          </a:prstGeom>
-          <a:noFill/>
-        </p:spPr>
-        <p:txBody>
-          <a:bodyPr wrap="none">
-            <a:spAutoFit/>
-          </a:bodyPr>
-          <a:lstStyle/>
-          <a:p>
-            <a:pPr algn="l">
-              <a:spcAft>
-                <a:spcPts val="600"/>
-              </a:spcAft>
-            </a:pPr>
-            <a:r>
-              <a:rPr sz="1000" b="0">
-                <a:solidFill>
-                  <a:srgbClr val="666666"/>
-                </a:solidFill>
-                <a:latin typeface="Calibri"/>
-              </a:rPr>
-              <a:t>Fuente: EVA 2019-2025 (UPRA) - datos.gov.co/d/uejq-wxrr</a:t>
+            <a:off x="594360" y="6492240"/>
+            <a:ext cx="7315200" cy="201168"/>
+          </a:xfrm>
+          <a:prstGeom prst="rect">
+            <a:avLst/>
+          </a:prstGeom>
+          <a:noFill/>
+        </p:spPr>
+        <p:txBody>
+          <a:bodyPr wrap="square" anchor="t">
+            <a:spAutoFit/>
+          </a:bodyPr>
+          <a:lstStyle/>
+          <a:p>
+            <a:pPr algn="l">
+              <a:spcAft>
+                <a:spcPts val="400"/>
+              </a:spcAft>
+            </a:pPr>
+            <a:r>
+              <a:rPr sz="900" b="0">
+                <a:solidFill>
+                  <a:srgbClr val="5A5A5A"/>
+                </a:solidFill>
+                <a:latin typeface="Aptos"/>
+              </a:rPr>
+              <a:t>Fuente: EVA 2019–2025 (UPRA) · datos.gov.co</a:t>
+            </a:r>
+          </a:p>
+        </p:txBody>
+      </p:sp>
+      <p:sp>
+        <p:nvSpPr>
+          <p:cNvPr id="8" name="TextBox 7"/>
+          <p:cNvSpPr txBox="1"/>
+          <p:nvPr/>
+        </p:nvSpPr>
+        <p:spPr>
+          <a:xfrm>
+            <a:off x="7955279" y="6492240"/>
+            <a:ext cx="3383280" cy="201168"/>
+          </a:xfrm>
+          <a:prstGeom prst="rect">
+            <a:avLst/>
+          </a:prstGeom>
+          <a:noFill/>
+        </p:spPr>
+        <p:txBody>
+          <a:bodyPr wrap="square" anchor="t">
+            <a:spAutoFit/>
+          </a:bodyPr>
+          <a:lstStyle/>
+          <a:p>
+            <a:pPr algn="r">
+              <a:spcAft>
+                <a:spcPts val="400"/>
+              </a:spcAft>
+            </a:pPr>
+            <a:r>
+              <a:rPr sz="900" b="0">
+                <a:solidFill>
+                  <a:srgbClr val="0B5394"/>
+                </a:solidFill>
+                <a:latin typeface="Aptos"/>
+                <a:hlinkClick r:id="rId3"/>
+              </a:rPr>
+              <a:t>https://www.datos.gov.co/d/uejq-wxrr</a:t>
+            </a:r>
+          </a:p>
+        </p:txBody>
+      </p:sp>
+      <p:sp>
+        <p:nvSpPr>
+          <p:cNvPr id="9" name="TextBox 8"/>
+          <p:cNvSpPr txBox="1"/>
+          <p:nvPr/>
+        </p:nvSpPr>
+        <p:spPr>
+          <a:xfrm>
+            <a:off x="11384280" y="6492240"/>
+            <a:ext cx="228600" cy="201168"/>
+          </a:xfrm>
+          <a:prstGeom prst="rect">
+            <a:avLst/>
+          </a:prstGeom>
+          <a:noFill/>
+        </p:spPr>
+        <p:txBody>
+          <a:bodyPr wrap="square" anchor="t">
+            <a:spAutoFit/>
+          </a:bodyPr>
+          <a:lstStyle/>
+          <a:p>
+            <a:pPr algn="r">
+              <a:spcAft>
+                <a:spcPts val="400"/>
+              </a:spcAft>
+            </a:pPr>
+            <a:r>
+              <a:rPr sz="900" b="0">
+                <a:solidFill>
+                  <a:srgbClr val="5A5A5A"/>
+                </a:solidFill>
+                <a:latin typeface="Aptos"/>
+              </a:rPr>
+              <a:t>6</a:t>
             </a:r>
           </a:p>
         </p:txBody>
@@ -6056,213 +8142,598 @@
         </p:nvSpPr>
         <p:spPr>
           <a:xfrm>
-            <a:off x="548640" y="292608"/>
-            <a:ext cx="11064240" cy="365760"/>
-          </a:xfrm>
-          <a:prstGeom prst="rect">
-            <a:avLst/>
-          </a:prstGeom>
-          <a:noFill/>
-        </p:spPr>
-        <p:txBody>
-          <a:bodyPr wrap="none">
-            <a:spAutoFit/>
-          </a:bodyPr>
-          <a:lstStyle/>
-          <a:p>
-            <a:pPr algn="l">
-              <a:spcAft>
-                <a:spcPts val="600"/>
-              </a:spcAft>
-            </a:pPr>
-            <a:r>
-              <a:rPr sz="1300" b="1">
+            <a:off x="594360" y="292608"/>
+            <a:ext cx="10972800" cy="502920"/>
+          </a:xfrm>
+          <a:prstGeom prst="rect">
+            <a:avLst/>
+          </a:prstGeom>
+          <a:noFill/>
+        </p:spPr>
+        <p:txBody>
+          <a:bodyPr wrap="square" anchor="t">
+            <a:spAutoFit/>
+          </a:bodyPr>
+          <a:lstStyle/>
+          <a:p>
+            <a:pPr algn="l">
+              <a:spcAft>
+                <a:spcPts val="400"/>
+              </a:spcAft>
+            </a:pPr>
+            <a:r>
+              <a:rPr sz="2500" b="1">
+                <a:solidFill>
+                  <a:srgbClr val="0B5394"/>
+                </a:solidFill>
+                <a:latin typeface="Aptos"/>
+              </a:rPr>
+              <a:t>3. Sinaplot</a:t>
+            </a:r>
+          </a:p>
+        </p:txBody>
+      </p:sp>
+      <p:sp>
+        <p:nvSpPr>
+          <p:cNvPr id="3" name="TextBox 2"/>
+          <p:cNvSpPr txBox="1"/>
+          <p:nvPr/>
+        </p:nvSpPr>
+        <p:spPr>
+          <a:xfrm>
+            <a:off x="621792" y="822960"/>
+            <a:ext cx="10972800" cy="274320"/>
+          </a:xfrm>
+          <a:prstGeom prst="rect">
+            <a:avLst/>
+          </a:prstGeom>
+          <a:noFill/>
+        </p:spPr>
+        <p:txBody>
+          <a:bodyPr wrap="square" anchor="t">
+            <a:spAutoFit/>
+          </a:bodyPr>
+          <a:lstStyle/>
+          <a:p>
+            <a:pPr algn="l">
+              <a:spcAft>
+                <a:spcPts val="400"/>
+              </a:spcAft>
+            </a:pPr>
+            <a:r>
+              <a:rPr sz="1100" b="0">
+                <a:solidFill>
+                  <a:srgbClr val="5A5A5A"/>
+                </a:solidFill>
+                <a:latin typeface="Aptos"/>
+              </a:rPr>
+              <a:t>Concepto, limitación que corrige y uso recomendado</a:t>
+            </a:r>
+          </a:p>
+        </p:txBody>
+      </p:sp>
+      <p:sp>
+        <p:nvSpPr>
+          <p:cNvPr id="4" name="Rounded Rectangle 3"/>
+          <p:cNvSpPr/>
+          <p:nvPr/>
+        </p:nvSpPr>
+        <p:spPr>
+          <a:xfrm>
+            <a:off x="594360" y="1325880"/>
+            <a:ext cx="3566160" cy="4526280"/>
+          </a:xfrm>
+          <a:prstGeom prst="roundRect">
+            <a:avLst/>
+          </a:prstGeom>
+          <a:solidFill>
+            <a:srgbClr val="F2F2F2"/>
+          </a:solidFill>
+          <a:ln w="12700">
+            <a:solidFill>
+              <a:srgbClr val="0B5394"/>
+            </a:solidFill>
+          </a:ln>
+        </p:spPr>
+        <p:style>
+          <a:lnRef idx="1">
+            <a:schemeClr val="accent1"/>
+          </a:lnRef>
+          <a:fillRef idx="3">
+            <a:schemeClr val="accent1"/>
+          </a:fillRef>
+          <a:effectRef idx="2">
+            <a:schemeClr val="accent1"/>
+          </a:effectRef>
+          <a:fontRef idx="minor">
+            <a:schemeClr val="lt1"/>
+          </a:fontRef>
+        </p:style>
+        <p:txBody>
+          <a:bodyPr rtlCol="0" anchor="ctr"/>
+          <a:lstStyle/>
+          <a:p>
+            <a:pPr algn="ctr"/>
+          </a:p>
+        </p:txBody>
+      </p:sp>
+      <p:sp>
+        <p:nvSpPr>
+          <p:cNvPr id="5" name="TextBox 4"/>
+          <p:cNvSpPr txBox="1"/>
+          <p:nvPr/>
+        </p:nvSpPr>
+        <p:spPr>
+          <a:xfrm>
+            <a:off x="777240" y="1463039"/>
+            <a:ext cx="3200400" cy="292608"/>
+          </a:xfrm>
+          <a:prstGeom prst="rect">
+            <a:avLst/>
+          </a:prstGeom>
+          <a:noFill/>
+        </p:spPr>
+        <p:txBody>
+          <a:bodyPr wrap="square" anchor="t">
+            <a:spAutoFit/>
+          </a:bodyPr>
+          <a:lstStyle/>
+          <a:p>
+            <a:pPr algn="l">
+              <a:spcAft>
+                <a:spcPts val="400"/>
+              </a:spcAft>
+            </a:pPr>
+            <a:r>
+              <a:rPr sz="1000" b="1">
+                <a:solidFill>
+                  <a:srgbClr val="0B5394"/>
+                </a:solidFill>
+                <a:latin typeface="Aptos"/>
+              </a:rPr>
+              <a:t>CONCEPTO</a:t>
+            </a:r>
+          </a:p>
+        </p:txBody>
+      </p:sp>
+      <p:sp>
+        <p:nvSpPr>
+          <p:cNvPr id="6" name="TextBox 5"/>
+          <p:cNvSpPr txBox="1"/>
+          <p:nvPr/>
+        </p:nvSpPr>
+        <p:spPr>
+          <a:xfrm>
+            <a:off x="777240" y="1783080"/>
+            <a:ext cx="3200400" cy="3959352"/>
+          </a:xfrm>
+          <a:prstGeom prst="rect">
+            <a:avLst/>
+          </a:prstGeom>
+          <a:noFill/>
+        </p:spPr>
+        <p:txBody>
+          <a:bodyPr wrap="square" anchor="t">
+            <a:spAutoFit/>
+          </a:bodyPr>
+          <a:lstStyle/>
+          <a:p>
+            <a:pPr algn="l">
+              <a:spcAft>
+                <a:spcPts val="400"/>
+              </a:spcAft>
+            </a:pPr>
+            <a:r>
+              <a:rPr sz="1500" b="0">
+                <a:solidFill>
+                  <a:srgbClr val="202124"/>
+                </a:solidFill>
+                <a:latin typeface="Aptos"/>
+              </a:rPr>
+              <a:t>Ubica cada observación y ensancha su desplazamiento horizontal según la densidad local; combina puntos y forma de distribución.</a:t>
+            </a:r>
+          </a:p>
+        </p:txBody>
+      </p:sp>
+      <p:sp>
+        <p:nvSpPr>
+          <p:cNvPr id="7" name="Rounded Rectangle 6"/>
+          <p:cNvSpPr/>
+          <p:nvPr/>
+        </p:nvSpPr>
+        <p:spPr>
+          <a:xfrm>
+            <a:off x="4315968" y="1325880"/>
+            <a:ext cx="3566160" cy="4526280"/>
+          </a:xfrm>
+          <a:prstGeom prst="roundRect">
+            <a:avLst/>
+          </a:prstGeom>
+          <a:solidFill>
+            <a:srgbClr val="F2F2F2"/>
+          </a:solidFill>
+          <a:ln w="12700">
+            <a:solidFill>
+              <a:srgbClr val="B03A2B"/>
+            </a:solidFill>
+          </a:ln>
+        </p:spPr>
+        <p:style>
+          <a:lnRef idx="1">
+            <a:schemeClr val="accent1"/>
+          </a:lnRef>
+          <a:fillRef idx="3">
+            <a:schemeClr val="accent1"/>
+          </a:fillRef>
+          <a:effectRef idx="2">
+            <a:schemeClr val="accent1"/>
+          </a:effectRef>
+          <a:fontRef idx="minor">
+            <a:schemeClr val="lt1"/>
+          </a:fontRef>
+        </p:style>
+        <p:txBody>
+          <a:bodyPr rtlCol="0" anchor="ctr"/>
+          <a:lstStyle/>
+          <a:p>
+            <a:pPr algn="ctr"/>
+          </a:p>
+        </p:txBody>
+      </p:sp>
+      <p:sp>
+        <p:nvSpPr>
+          <p:cNvPr id="8" name="TextBox 7"/>
+          <p:cNvSpPr txBox="1"/>
+          <p:nvPr/>
+        </p:nvSpPr>
+        <p:spPr>
+          <a:xfrm>
+            <a:off x="4498848" y="1463039"/>
+            <a:ext cx="3200400" cy="292608"/>
+          </a:xfrm>
+          <a:prstGeom prst="rect">
+            <a:avLst/>
+          </a:prstGeom>
+          <a:noFill/>
+        </p:spPr>
+        <p:txBody>
+          <a:bodyPr wrap="square" anchor="t">
+            <a:spAutoFit/>
+          </a:bodyPr>
+          <a:lstStyle/>
+          <a:p>
+            <a:pPr algn="l">
+              <a:spcAft>
+                <a:spcPts val="400"/>
+              </a:spcAft>
+            </a:pPr>
+            <a:r>
+              <a:rPr sz="1000" b="1">
                 <a:solidFill>
                   <a:srgbClr val="B03A2B"/>
                 </a:solidFill>
-                <a:latin typeface="Calibri"/>
-              </a:rPr>
-              <a:t>HALLAZGO 2 / RIDGE</a:t>
-            </a:r>
-          </a:p>
-        </p:txBody>
-      </p:sp>
-      <p:sp>
-        <p:nvSpPr>
-          <p:cNvPr id="3" name="TextBox 2"/>
-          <p:cNvSpPr txBox="1"/>
-          <p:nvPr/>
-        </p:nvSpPr>
-        <p:spPr>
-          <a:xfrm>
-            <a:off x="548640" y="566928"/>
-            <a:ext cx="11064240" cy="731520"/>
-          </a:xfrm>
-          <a:prstGeom prst="rect">
-            <a:avLst/>
-          </a:prstGeom>
-          <a:noFill/>
-        </p:spPr>
-        <p:txBody>
-          <a:bodyPr wrap="none">
-            <a:spAutoFit/>
-          </a:bodyPr>
-          <a:lstStyle/>
-          <a:p>
-            <a:pPr algn="l">
-              <a:spcAft>
-                <a:spcPts val="600"/>
-              </a:spcAft>
-            </a:pPr>
-            <a:r>
-              <a:rPr sz="2800" b="1">
-                <a:solidFill>
-                  <a:srgbClr val="1F3A5F"/>
-                </a:solidFill>
-                <a:latin typeface="Calibri"/>
-              </a:rPr>
-              <a:t>Figura 2 - Platano por anio (2019-2025)</a:t>
-            </a:r>
-          </a:p>
-        </p:txBody>
-      </p:sp>
-      <p:sp>
-        <p:nvSpPr>
-          <p:cNvPr id="4" name="TextBox 3"/>
-          <p:cNvSpPr txBox="1"/>
-          <p:nvPr/>
-        </p:nvSpPr>
-        <p:spPr>
-          <a:xfrm>
-            <a:off x="548640" y="1225296"/>
-            <a:ext cx="11064240" cy="91440"/>
-          </a:xfrm>
-          <a:prstGeom prst="rect">
-            <a:avLst/>
-          </a:prstGeom>
-          <a:noFill/>
-        </p:spPr>
-        <p:txBody>
-          <a:bodyPr wrap="none">
-            <a:spAutoFit/>
-          </a:bodyPr>
-          <a:lstStyle/>
-          <a:p>
-            <a:pPr algn="l">
-              <a:spcAft>
-                <a:spcPts val="600"/>
-              </a:spcAft>
-            </a:pPr>
-            <a:r>
-              <a:rPr sz="200" b="0">
-                <a:solidFill>
-                  <a:srgbClr val="B03A2B"/>
-                </a:solidFill>
-                <a:latin typeface="Calibri"/>
-              </a:rPr>
-              <a:t> </a:t>
-            </a:r>
-          </a:p>
-        </p:txBody>
-      </p:sp>
-      <p:pic>
-        <p:nvPicPr>
-          <p:cNvPr id="5" name="Picture 4" descr="fig2_ridge_platano.png"/>
-          <p:cNvPicPr>
-            <a:picLocks noChangeAspect="1"/>
-          </p:cNvPicPr>
-          <p:nvPr/>
-        </p:nvPicPr>
-        <p:blipFill>
-          <a:blip r:embed="rId2"/>
-          <a:stretch>
-            <a:fillRect/>
-          </a:stretch>
-        </p:blipFill>
-        <p:spPr>
-          <a:xfrm>
-            <a:off x="548640" y="1417320"/>
-            <a:ext cx="11064240" cy="5737013"/>
-          </a:xfrm>
-          <a:prstGeom prst="rect">
-            <a:avLst/>
-          </a:prstGeom>
-        </p:spPr>
-      </p:pic>
-      <p:sp>
-        <p:nvSpPr>
-          <p:cNvPr id="6" name="TextBox 5"/>
-          <p:cNvSpPr txBox="1"/>
-          <p:nvPr/>
-        </p:nvSpPr>
-        <p:spPr>
-          <a:xfrm>
-            <a:off x="548640" y="5806440"/>
-            <a:ext cx="11064240" cy="640080"/>
-          </a:xfrm>
-          <a:prstGeom prst="rect">
-            <a:avLst/>
-          </a:prstGeom>
-          <a:noFill/>
-        </p:spPr>
-        <p:txBody>
-          <a:bodyPr wrap="none">
-            <a:spAutoFit/>
-          </a:bodyPr>
-          <a:lstStyle/>
-          <a:p>
-            <a:pPr algn="l">
-              <a:spcAft>
-                <a:spcPts val="600"/>
-              </a:spcAft>
-            </a:pPr>
-            <a:r>
-              <a:rPr sz="1500" b="1">
-                <a:solidFill>
-                  <a:srgbClr val="333333"/>
-                </a:solidFill>
-                <a:latin typeface="Calibri"/>
-              </a:rPr>
-              <a:t>La forma del rendimiento es estable en el tiempo, con mediana cerca de 7 t/ha y una cola alta moderada.</a:t>
-            </a:r>
-          </a:p>
-        </p:txBody>
-      </p:sp>
-      <p:sp>
-        <p:nvSpPr>
-          <p:cNvPr id="7" name="TextBox 6"/>
-          <p:cNvSpPr txBox="1"/>
-          <p:nvPr/>
-        </p:nvSpPr>
-        <p:spPr>
-          <a:xfrm>
-            <a:off x="548640" y="6419088"/>
-            <a:ext cx="11064240" cy="365760"/>
-          </a:xfrm>
-          <a:prstGeom prst="rect">
-            <a:avLst/>
-          </a:prstGeom>
-          <a:noFill/>
-        </p:spPr>
-        <p:txBody>
-          <a:bodyPr wrap="none">
-            <a:spAutoFit/>
-          </a:bodyPr>
-          <a:lstStyle/>
-          <a:p>
-            <a:pPr algn="l">
-              <a:spcAft>
-                <a:spcPts val="600"/>
-              </a:spcAft>
-            </a:pPr>
-            <a:r>
-              <a:rPr sz="1000" b="0">
-                <a:solidFill>
-                  <a:srgbClr val="666666"/>
-                </a:solidFill>
-                <a:latin typeface="Calibri"/>
-              </a:rPr>
-              <a:t>Fuente: EVA 2019-2025 (UPRA) - datos.gov.co/d/uejq-wxrr</a:t>
+                <a:latin typeface="Aptos"/>
+              </a:rPr>
+              <a:t>QUÉ NO MUESTRA LA CAJA</a:t>
+            </a:r>
+          </a:p>
+        </p:txBody>
+      </p:sp>
+      <p:sp>
+        <p:nvSpPr>
+          <p:cNvPr id="9" name="TextBox 8"/>
+          <p:cNvSpPr txBox="1"/>
+          <p:nvPr/>
+        </p:nvSpPr>
+        <p:spPr>
+          <a:xfrm>
+            <a:off x="4498848" y="1783080"/>
+            <a:ext cx="3200400" cy="3959352"/>
+          </a:xfrm>
+          <a:prstGeom prst="rect">
+            <a:avLst/>
+          </a:prstGeom>
+          <a:noFill/>
+        </p:spPr>
+        <p:txBody>
+          <a:bodyPr wrap="square" anchor="t">
+            <a:spAutoFit/>
+          </a:bodyPr>
+          <a:lstStyle/>
+          <a:p>
+            <a:pPr algn="l">
+              <a:spcAft>
+                <a:spcPts val="400"/>
+              </a:spcAft>
+            </a:pPr>
+            <a:r>
+              <a:rPr sz="1500" b="0">
+                <a:solidFill>
+                  <a:srgbClr val="202124"/>
+                </a:solidFill>
+                <a:latin typeface="Aptos"/>
+              </a:rPr>
+              <a:t>La caja resume y oculta cuántas observaciones se apilan en cada valor.</a:t>
+            </a:r>
+          </a:p>
+        </p:txBody>
+      </p:sp>
+      <p:sp>
+        <p:nvSpPr>
+          <p:cNvPr id="10" name="Rounded Rectangle 9"/>
+          <p:cNvSpPr/>
+          <p:nvPr/>
+        </p:nvSpPr>
+        <p:spPr>
+          <a:xfrm>
+            <a:off x="8037575" y="1325880"/>
+            <a:ext cx="3566160" cy="4526280"/>
+          </a:xfrm>
+          <a:prstGeom prst="roundRect">
+            <a:avLst/>
+          </a:prstGeom>
+          <a:solidFill>
+            <a:srgbClr val="F2F2F2"/>
+          </a:solidFill>
+          <a:ln w="12700">
+            <a:solidFill>
+              <a:srgbClr val="0B5394"/>
+            </a:solidFill>
+          </a:ln>
+        </p:spPr>
+        <p:style>
+          <a:lnRef idx="1">
+            <a:schemeClr val="accent1"/>
+          </a:lnRef>
+          <a:fillRef idx="3">
+            <a:schemeClr val="accent1"/>
+          </a:fillRef>
+          <a:effectRef idx="2">
+            <a:schemeClr val="accent1"/>
+          </a:effectRef>
+          <a:fontRef idx="minor">
+            <a:schemeClr val="lt1"/>
+          </a:fontRef>
+        </p:style>
+        <p:txBody>
+          <a:bodyPr rtlCol="0" anchor="ctr"/>
+          <a:lstStyle/>
+          <a:p>
+            <a:pPr algn="ctr"/>
+          </a:p>
+        </p:txBody>
+      </p:sp>
+      <p:sp>
+        <p:nvSpPr>
+          <p:cNvPr id="11" name="TextBox 10"/>
+          <p:cNvSpPr txBox="1"/>
+          <p:nvPr/>
+        </p:nvSpPr>
+        <p:spPr>
+          <a:xfrm>
+            <a:off x="8220455" y="1463039"/>
+            <a:ext cx="3200400" cy="292608"/>
+          </a:xfrm>
+          <a:prstGeom prst="rect">
+            <a:avLst/>
+          </a:prstGeom>
+          <a:noFill/>
+        </p:spPr>
+        <p:txBody>
+          <a:bodyPr wrap="square" anchor="t">
+            <a:spAutoFit/>
+          </a:bodyPr>
+          <a:lstStyle/>
+          <a:p>
+            <a:pPr algn="l">
+              <a:spcAft>
+                <a:spcPts val="400"/>
+              </a:spcAft>
+            </a:pPr>
+            <a:r>
+              <a:rPr sz="1000" b="1">
+                <a:solidFill>
+                  <a:srgbClr val="0B5394"/>
+                </a:solidFill>
+                <a:latin typeface="Aptos"/>
+              </a:rPr>
+              <a:t>ÚSELO CUANDO</a:t>
+            </a:r>
+          </a:p>
+        </p:txBody>
+      </p:sp>
+      <p:sp>
+        <p:nvSpPr>
+          <p:cNvPr id="12" name="TextBox 11"/>
+          <p:cNvSpPr txBox="1"/>
+          <p:nvPr/>
+        </p:nvSpPr>
+        <p:spPr>
+          <a:xfrm>
+            <a:off x="8220455" y="1783080"/>
+            <a:ext cx="3200400" cy="3959352"/>
+          </a:xfrm>
+          <a:prstGeom prst="rect">
+            <a:avLst/>
+          </a:prstGeom>
+          <a:noFill/>
+        </p:spPr>
+        <p:txBody>
+          <a:bodyPr wrap="square" anchor="t">
+            <a:spAutoFit/>
+          </a:bodyPr>
+          <a:lstStyle/>
+          <a:p>
+            <a:pPr algn="l">
+              <a:spcAft>
+                <a:spcPts val="400"/>
+              </a:spcAft>
+            </a:pPr>
+            <a:r>
+              <a:rPr sz="1500" b="0">
+                <a:solidFill>
+                  <a:srgbClr val="202124"/>
+                </a:solidFill>
+                <a:latin typeface="Aptos"/>
+              </a:rPr>
+              <a:t>N moderado por categoría, cuando se necesitan ver todos los datos y su densidad. Con N masivo se satura; con muy pocos puntos el jitter pierde sentido.</a:t>
+            </a:r>
+          </a:p>
+        </p:txBody>
+      </p:sp>
+      <p:sp>
+        <p:nvSpPr>
+          <p:cNvPr id="13" name="TextBox 12"/>
+          <p:cNvSpPr txBox="1"/>
+          <p:nvPr/>
+        </p:nvSpPr>
+        <p:spPr>
+          <a:xfrm>
+            <a:off x="640080" y="5989320"/>
+            <a:ext cx="10972800" cy="274320"/>
+          </a:xfrm>
+          <a:prstGeom prst="rect">
+            <a:avLst/>
+          </a:prstGeom>
+          <a:noFill/>
+        </p:spPr>
+        <p:txBody>
+          <a:bodyPr wrap="square" anchor="t">
+            <a:spAutoFit/>
+          </a:bodyPr>
+          <a:lstStyle/>
+          <a:p>
+            <a:pPr algn="ctr">
+              <a:spcAft>
+                <a:spcPts val="400"/>
+              </a:spcAft>
+            </a:pPr>
+            <a:r>
+              <a:rPr sz="1200" b="0">
+                <a:solidFill>
+                  <a:srgbClr val="5A5A5A"/>
+                </a:solidFill>
+                <a:latin typeface="Aptos"/>
+              </a:rPr>
+              <a:t>Corte: cacao con rendimiento &gt; 0 en seis departamentos; N por grupo entre 187 y 247.</a:t>
+            </a:r>
+          </a:p>
+        </p:txBody>
+      </p:sp>
+      <p:sp>
+        <p:nvSpPr>
+          <p:cNvPr id="14" name="TextBox 13"/>
+          <p:cNvSpPr txBox="1"/>
+          <p:nvPr/>
+        </p:nvSpPr>
+        <p:spPr>
+          <a:xfrm>
+            <a:off x="594360" y="6492240"/>
+            <a:ext cx="7315200" cy="201168"/>
+          </a:xfrm>
+          <a:prstGeom prst="rect">
+            <a:avLst/>
+          </a:prstGeom>
+          <a:noFill/>
+        </p:spPr>
+        <p:txBody>
+          <a:bodyPr wrap="square" anchor="t">
+            <a:spAutoFit/>
+          </a:bodyPr>
+          <a:lstStyle/>
+          <a:p>
+            <a:pPr algn="l">
+              <a:spcAft>
+                <a:spcPts val="400"/>
+              </a:spcAft>
+            </a:pPr>
+            <a:r>
+              <a:rPr sz="900" b="0">
+                <a:solidFill>
+                  <a:srgbClr val="5A5A5A"/>
+                </a:solidFill>
+                <a:latin typeface="Aptos"/>
+              </a:rPr>
+              <a:t>Fuente: EVA 2019–2025 (UPRA) · datos.gov.co</a:t>
+            </a:r>
+          </a:p>
+        </p:txBody>
+      </p:sp>
+      <p:sp>
+        <p:nvSpPr>
+          <p:cNvPr id="15" name="TextBox 14"/>
+          <p:cNvSpPr txBox="1"/>
+          <p:nvPr/>
+        </p:nvSpPr>
+        <p:spPr>
+          <a:xfrm>
+            <a:off x="7955279" y="6492240"/>
+            <a:ext cx="3383280" cy="201168"/>
+          </a:xfrm>
+          <a:prstGeom prst="rect">
+            <a:avLst/>
+          </a:prstGeom>
+          <a:noFill/>
+        </p:spPr>
+        <p:txBody>
+          <a:bodyPr wrap="square" anchor="t">
+            <a:spAutoFit/>
+          </a:bodyPr>
+          <a:lstStyle/>
+          <a:p>
+            <a:pPr algn="r">
+              <a:spcAft>
+                <a:spcPts val="400"/>
+              </a:spcAft>
+            </a:pPr>
+            <a:r>
+              <a:rPr sz="900" b="0">
+                <a:solidFill>
+                  <a:srgbClr val="0B5394"/>
+                </a:solidFill>
+                <a:latin typeface="Aptos"/>
+                <a:hlinkClick r:id="rId2"/>
+              </a:rPr>
+              <a:t>https://www.datos.gov.co/d/uejq-wxrr</a:t>
+            </a:r>
+          </a:p>
+        </p:txBody>
+      </p:sp>
+      <p:sp>
+        <p:nvSpPr>
+          <p:cNvPr id="16" name="TextBox 15"/>
+          <p:cNvSpPr txBox="1"/>
+          <p:nvPr/>
+        </p:nvSpPr>
+        <p:spPr>
+          <a:xfrm>
+            <a:off x="11384280" y="6492240"/>
+            <a:ext cx="228600" cy="201168"/>
+          </a:xfrm>
+          <a:prstGeom prst="rect">
+            <a:avLst/>
+          </a:prstGeom>
+          <a:noFill/>
+        </p:spPr>
+        <p:txBody>
+          <a:bodyPr wrap="square" anchor="t">
+            <a:spAutoFit/>
+          </a:bodyPr>
+          <a:lstStyle/>
+          <a:p>
+            <a:pPr algn="r">
+              <a:spcAft>
+                <a:spcPts val="400"/>
+              </a:spcAft>
+            </a:pPr>
+            <a:r>
+              <a:rPr sz="900" b="0">
+                <a:solidFill>
+                  <a:srgbClr val="5A5A5A"/>
+                </a:solidFill>
+                <a:latin typeface="Aptos"/>
+              </a:rPr>
+              <a:t>7</a:t>
             </a:r>
           </a:p>
         </p:txBody>
@@ -6293,33 +8764,33 @@
         </p:nvSpPr>
         <p:spPr>
           <a:xfrm>
-            <a:off x="548640" y="292608"/>
-            <a:ext cx="11064240" cy="365760"/>
-          </a:xfrm>
-          <a:prstGeom prst="rect">
-            <a:avLst/>
-          </a:prstGeom>
-          <a:noFill/>
-        </p:spPr>
-        <p:txBody>
-          <a:bodyPr wrap="none">
-            <a:spAutoFit/>
-          </a:bodyPr>
-          <a:lstStyle/>
-          <a:p>
-            <a:pPr algn="l">
-              <a:spcAft>
-                <a:spcPts val="600"/>
-              </a:spcAft>
-            </a:pPr>
-            <a:r>
-              <a:rPr sz="1300" b="1">
-                <a:solidFill>
-                  <a:srgbClr val="B03A2B"/>
-                </a:solidFill>
-                <a:latin typeface="Calibri"/>
-              </a:rPr>
-              <a:t>HALLAZGO 3 / SINAPLOT</a:t>
+            <a:off x="594360" y="292608"/>
+            <a:ext cx="10972800" cy="502920"/>
+          </a:xfrm>
+          <a:prstGeom prst="rect">
+            <a:avLst/>
+          </a:prstGeom>
+          <a:noFill/>
+        </p:spPr>
+        <p:txBody>
+          <a:bodyPr wrap="square" anchor="t">
+            <a:spAutoFit/>
+          </a:bodyPr>
+          <a:lstStyle/>
+          <a:p>
+            <a:pPr algn="l">
+              <a:spcAft>
+                <a:spcPts val="400"/>
+              </a:spcAft>
+            </a:pPr>
+            <a:r>
+              <a:rPr sz="2500" b="1">
+                <a:solidFill>
+                  <a:srgbClr val="0B5394"/>
+                </a:solidFill>
+                <a:latin typeface="Aptos"/>
+              </a:rPr>
+              <a:t>Sinaplot · cacao por departamento</a:t>
             </a:r>
           </a:p>
         </p:txBody>
@@ -6332,79 +8803,40 @@
         </p:nvSpPr>
         <p:spPr>
           <a:xfrm>
-            <a:off x="548640" y="566928"/>
-            <a:ext cx="11064240" cy="731520"/>
-          </a:xfrm>
-          <a:prstGeom prst="rect">
-            <a:avLst/>
-          </a:prstGeom>
-          <a:noFill/>
-        </p:spPr>
-        <p:txBody>
-          <a:bodyPr wrap="none">
-            <a:spAutoFit/>
-          </a:bodyPr>
-          <a:lstStyle/>
-          <a:p>
-            <a:pPr algn="l">
-              <a:spcAft>
-                <a:spcPts val="600"/>
-              </a:spcAft>
-            </a:pPr>
-            <a:r>
-              <a:rPr sz="2800" b="1">
-                <a:solidFill>
-                  <a:srgbClr val="1F3A5F"/>
-                </a:solidFill>
-                <a:latin typeface="Calibri"/>
-              </a:rPr>
-              <a:t>Figura 3 - Cacao por departamento</a:t>
-            </a:r>
-          </a:p>
-        </p:txBody>
-      </p:sp>
-      <p:sp>
-        <p:nvSpPr>
-          <p:cNvPr id="4" name="TextBox 3"/>
-          <p:cNvSpPr txBox="1"/>
-          <p:nvPr/>
-        </p:nvSpPr>
-        <p:spPr>
-          <a:xfrm>
-            <a:off x="548640" y="1225296"/>
-            <a:ext cx="11064240" cy="91440"/>
-          </a:xfrm>
-          <a:prstGeom prst="rect">
-            <a:avLst/>
-          </a:prstGeom>
-          <a:noFill/>
-        </p:spPr>
-        <p:txBody>
-          <a:bodyPr wrap="none">
-            <a:spAutoFit/>
-          </a:bodyPr>
-          <a:lstStyle/>
-          <a:p>
-            <a:pPr algn="l">
-              <a:spcAft>
-                <a:spcPts val="600"/>
-              </a:spcAft>
-            </a:pPr>
-            <a:r>
-              <a:rPr sz="200" b="0">
-                <a:solidFill>
-                  <a:srgbClr val="B03A2B"/>
-                </a:solidFill>
-                <a:latin typeface="Calibri"/>
-              </a:rPr>
-              <a:t> </a:t>
+            <a:off x="621792" y="822960"/>
+            <a:ext cx="10972800" cy="274320"/>
+          </a:xfrm>
+          <a:prstGeom prst="rect">
+            <a:avLst/>
+          </a:prstGeom>
+          <a:noFill/>
+        </p:spPr>
+        <p:txBody>
+          <a:bodyPr wrap="square" anchor="t">
+            <a:spAutoFit/>
+          </a:bodyPr>
+          <a:lstStyle/>
+          <a:p>
+            <a:pPr algn="l">
+              <a:spcAft>
+                <a:spcPts val="400"/>
+              </a:spcAft>
+            </a:pPr>
+            <a:r>
+              <a:rPr sz="1100" b="0">
+                <a:solidFill>
+                  <a:srgbClr val="5A5A5A"/>
+                </a:solidFill>
+                <a:latin typeface="Aptos"/>
+              </a:rPr>
+              <a:t>Captura de la visualización Plotly generada con datos reales EVA</a:t>
             </a:r>
           </a:p>
         </p:txBody>
       </p:sp>
       <p:pic>
         <p:nvPicPr>
-          <p:cNvPr id="5" name="Picture 4" descr="fig3_sinaplot_cacao.png"/>
+          <p:cNvPr id="4" name="Picture 3" descr="fig3_sinaplot_cacao.png"/>
           <p:cNvPicPr>
             <a:picLocks noChangeAspect="1"/>
           </p:cNvPicPr>
@@ -6418,8 +8850,8 @@
         </p:blipFill>
         <p:spPr>
           <a:xfrm>
-            <a:off x="548640" y="1417320"/>
-            <a:ext cx="11064240" cy="5729696"/>
+            <a:off x="457200" y="1097280"/>
+            <a:ext cx="11274552" cy="4434840"/>
           </a:xfrm>
           <a:prstGeom prst="rect">
             <a:avLst/>
@@ -6428,39 +8860,78 @@
       </p:pic>
       <p:sp>
         <p:nvSpPr>
+          <p:cNvPr id="5" name="TextBox 4"/>
+          <p:cNvSpPr txBox="1"/>
+          <p:nvPr/>
+        </p:nvSpPr>
+        <p:spPr>
+          <a:xfrm>
+            <a:off x="640080" y="5559552"/>
+            <a:ext cx="10927080" cy="566928"/>
+          </a:xfrm>
+          <a:prstGeom prst="rect">
+            <a:avLst/>
+          </a:prstGeom>
+          <a:noFill/>
+        </p:spPr>
+        <p:txBody>
+          <a:bodyPr wrap="square" anchor="t">
+            <a:spAutoFit/>
+          </a:bodyPr>
+          <a:lstStyle/>
+          <a:p>
+            <a:pPr algn="l">
+              <a:spcAft>
+                <a:spcPts val="400"/>
+              </a:spcAft>
+            </a:pPr>
+            <a:r>
+              <a:rPr sz="1100" b="0">
+                <a:solidFill>
+                  <a:srgbClr val="202124"/>
+                </a:solidFill>
+                <a:latin typeface="Aptos"/>
+              </a:rPr>
+              <a:t>Las medianas son cercanas (0,50–0,60 t/ha), pero las colas distinguen a los departamentos: Valle del Cauca llega a 1,50 y Cauca a 1,40, mientras Huila alcanza 0,88 t/ha.</a:t>
+            </a:r>
+          </a:p>
+        </p:txBody>
+      </p:sp>
+      <p:sp>
+        <p:nvSpPr>
           <p:cNvPr id="6" name="TextBox 5"/>
           <p:cNvSpPr txBox="1"/>
           <p:nvPr/>
         </p:nvSpPr>
         <p:spPr>
           <a:xfrm>
-            <a:off x="548640" y="5806440"/>
-            <a:ext cx="11064240" cy="640080"/>
-          </a:xfrm>
-          <a:prstGeom prst="rect">
-            <a:avLst/>
-          </a:prstGeom>
-          <a:noFill/>
-        </p:spPr>
-        <p:txBody>
-          <a:bodyPr wrap="none">
-            <a:spAutoFit/>
-          </a:bodyPr>
-          <a:lstStyle/>
-          <a:p>
-            <a:pPr algn="l">
-              <a:spcAft>
-                <a:spcPts val="600"/>
-              </a:spcAft>
-            </a:pPr>
-            <a:r>
-              <a:rPr sz="1500" b="1">
-                <a:solidFill>
-                  <a:srgbClr val="333333"/>
-                </a:solidFill>
-                <a:latin typeface="Calibri"/>
-              </a:rPr>
-              <a:t>Cerca del 44 % de los registros cae en 0,50/0,60 t/ha: una pila que la caja esconde tras una mediana aparentemente tranquila.</a:t>
+            <a:off x="640080" y="6144768"/>
+            <a:ext cx="10927080" cy="201168"/>
+          </a:xfrm>
+          <a:prstGeom prst="rect">
+            <a:avLst/>
+          </a:prstGeom>
+          <a:noFill/>
+        </p:spPr>
+        <p:txBody>
+          <a:bodyPr wrap="square" anchor="t">
+            <a:spAutoFit/>
+          </a:bodyPr>
+          <a:lstStyle/>
+          <a:p>
+            <a:pPr algn="ctr">
+              <a:spcAft>
+                <a:spcPts val="400"/>
+              </a:spcAft>
+            </a:pPr>
+            <a:r>
+              <a:rPr sz="900" b="0">
+                <a:solidFill>
+                  <a:srgbClr val="5A5A5A"/>
+                </a:solidFill>
+                <a:latin typeface="Aptos"/>
+              </a:rPr>
+              <a:t>Demostración: fig3_sinaplot_cacao.html · cada punto permite inspeccionar el registro real.</a:t>
             </a:r>
           </a:p>
         </p:txBody>
@@ -6473,33 +8944,112 @@
         </p:nvSpPr>
         <p:spPr>
           <a:xfrm>
-            <a:off x="548640" y="6419088"/>
-            <a:ext cx="11064240" cy="365760"/>
-          </a:xfrm>
-          <a:prstGeom prst="rect">
-            <a:avLst/>
-          </a:prstGeom>
-          <a:noFill/>
-        </p:spPr>
-        <p:txBody>
-          <a:bodyPr wrap="none">
-            <a:spAutoFit/>
-          </a:bodyPr>
-          <a:lstStyle/>
-          <a:p>
-            <a:pPr algn="l">
-              <a:spcAft>
-                <a:spcPts val="600"/>
-              </a:spcAft>
-            </a:pPr>
-            <a:r>
-              <a:rPr sz="1000" b="0">
-                <a:solidFill>
-                  <a:srgbClr val="666666"/>
-                </a:solidFill>
-                <a:latin typeface="Calibri"/>
-              </a:rPr>
-              <a:t>Fuente: EVA 2019-2025 (UPRA) - datos.gov.co/d/uejq-wxrr</a:t>
+            <a:off x="594360" y="6492240"/>
+            <a:ext cx="7315200" cy="201168"/>
+          </a:xfrm>
+          <a:prstGeom prst="rect">
+            <a:avLst/>
+          </a:prstGeom>
+          <a:noFill/>
+        </p:spPr>
+        <p:txBody>
+          <a:bodyPr wrap="square" anchor="t">
+            <a:spAutoFit/>
+          </a:bodyPr>
+          <a:lstStyle/>
+          <a:p>
+            <a:pPr algn="l">
+              <a:spcAft>
+                <a:spcPts val="400"/>
+              </a:spcAft>
+            </a:pPr>
+            <a:r>
+              <a:rPr sz="900" b="0">
+                <a:solidFill>
+                  <a:srgbClr val="5A5A5A"/>
+                </a:solidFill>
+                <a:latin typeface="Aptos"/>
+              </a:rPr>
+              <a:t>Fuente: EVA 2019–2025 (UPRA) · datos.gov.co</a:t>
+            </a:r>
+          </a:p>
+        </p:txBody>
+      </p:sp>
+      <p:sp>
+        <p:nvSpPr>
+          <p:cNvPr id="8" name="TextBox 7"/>
+          <p:cNvSpPr txBox="1"/>
+          <p:nvPr/>
+        </p:nvSpPr>
+        <p:spPr>
+          <a:xfrm>
+            <a:off x="7955279" y="6492240"/>
+            <a:ext cx="3383280" cy="201168"/>
+          </a:xfrm>
+          <a:prstGeom prst="rect">
+            <a:avLst/>
+          </a:prstGeom>
+          <a:noFill/>
+        </p:spPr>
+        <p:txBody>
+          <a:bodyPr wrap="square" anchor="t">
+            <a:spAutoFit/>
+          </a:bodyPr>
+          <a:lstStyle/>
+          <a:p>
+            <a:pPr algn="r">
+              <a:spcAft>
+                <a:spcPts val="400"/>
+              </a:spcAft>
+            </a:pPr>
+            <a:r>
+              <a:rPr sz="900" b="0">
+                <a:solidFill>
+                  <a:srgbClr val="0B5394"/>
+                </a:solidFill>
+                <a:latin typeface="Aptos"/>
+                <a:hlinkClick r:id="rId3"/>
+              </a:rPr>
+              <a:t>https://www.datos.gov.co/d/uejq-wxrr</a:t>
+            </a:r>
+          </a:p>
+        </p:txBody>
+      </p:sp>
+      <p:sp>
+        <p:nvSpPr>
+          <p:cNvPr id="9" name="TextBox 8"/>
+          <p:cNvSpPr txBox="1"/>
+          <p:nvPr/>
+        </p:nvSpPr>
+        <p:spPr>
+          <a:xfrm>
+            <a:off x="11384280" y="6492240"/>
+            <a:ext cx="228600" cy="201168"/>
+          </a:xfrm>
+          <a:prstGeom prst="rect">
+            <a:avLst/>
+          </a:prstGeom>
+          <a:noFill/>
+        </p:spPr>
+        <p:txBody>
+          <a:bodyPr wrap="square" anchor="t">
+            <a:spAutoFit/>
+          </a:bodyPr>
+          <a:lstStyle/>
+          <a:p>
+            <a:pPr algn="r">
+              <a:spcAft>
+                <a:spcPts val="400"/>
+              </a:spcAft>
+            </a:pPr>
+            <a:r>
+              <a:rPr sz="900" b="0">
+                <a:solidFill>
+                  <a:srgbClr val="5A5A5A"/>
+                </a:solidFill>
+                <a:latin typeface="Aptos"/>
+              </a:rPr>
+              <a:t>8</a:t>
             </a:r>
           </a:p>
         </p:txBody>
@@ -6530,213 +9080,598 @@
         </p:nvSpPr>
         <p:spPr>
           <a:xfrm>
-            <a:off x="548640" y="292608"/>
-            <a:ext cx="11064240" cy="365760"/>
-          </a:xfrm>
-          <a:prstGeom prst="rect">
-            <a:avLst/>
-          </a:prstGeom>
-          <a:noFill/>
-        </p:spPr>
-        <p:txBody>
-          <a:bodyPr wrap="none">
-            <a:spAutoFit/>
-          </a:bodyPr>
-          <a:lstStyle/>
-          <a:p>
-            <a:pPr algn="l">
-              <a:spcAft>
-                <a:spcPts val="600"/>
-              </a:spcAft>
-            </a:pPr>
-            <a:r>
-              <a:rPr sz="1300" b="1">
+            <a:off x="594360" y="292608"/>
+            <a:ext cx="10972800" cy="502920"/>
+          </a:xfrm>
+          <a:prstGeom prst="rect">
+            <a:avLst/>
+          </a:prstGeom>
+          <a:noFill/>
+        </p:spPr>
+        <p:txBody>
+          <a:bodyPr wrap="square" anchor="t">
+            <a:spAutoFit/>
+          </a:bodyPr>
+          <a:lstStyle/>
+          <a:p>
+            <a:pPr algn="l">
+              <a:spcAft>
+                <a:spcPts val="400"/>
+              </a:spcAft>
+            </a:pPr>
+            <a:r>
+              <a:rPr sz="2500" b="1">
+                <a:solidFill>
+                  <a:srgbClr val="0B5394"/>
+                </a:solidFill>
+                <a:latin typeface="Aptos"/>
+              </a:rPr>
+              <a:t>4. Boxenplot (Letter-Value Plot)</a:t>
+            </a:r>
+          </a:p>
+        </p:txBody>
+      </p:sp>
+      <p:sp>
+        <p:nvSpPr>
+          <p:cNvPr id="3" name="TextBox 2"/>
+          <p:cNvSpPr txBox="1"/>
+          <p:nvPr/>
+        </p:nvSpPr>
+        <p:spPr>
+          <a:xfrm>
+            <a:off x="621792" y="822960"/>
+            <a:ext cx="10972800" cy="274320"/>
+          </a:xfrm>
+          <a:prstGeom prst="rect">
+            <a:avLst/>
+          </a:prstGeom>
+          <a:noFill/>
+        </p:spPr>
+        <p:txBody>
+          <a:bodyPr wrap="square" anchor="t">
+            <a:spAutoFit/>
+          </a:bodyPr>
+          <a:lstStyle/>
+          <a:p>
+            <a:pPr algn="l">
+              <a:spcAft>
+                <a:spcPts val="400"/>
+              </a:spcAft>
+            </a:pPr>
+            <a:r>
+              <a:rPr sz="1100" b="0">
+                <a:solidFill>
+                  <a:srgbClr val="5A5A5A"/>
+                </a:solidFill>
+                <a:latin typeface="Aptos"/>
+              </a:rPr>
+              <a:t>Concepto, limitación que corrige y uso recomendado</a:t>
+            </a:r>
+          </a:p>
+        </p:txBody>
+      </p:sp>
+      <p:sp>
+        <p:nvSpPr>
+          <p:cNvPr id="4" name="Rounded Rectangle 3"/>
+          <p:cNvSpPr/>
+          <p:nvPr/>
+        </p:nvSpPr>
+        <p:spPr>
+          <a:xfrm>
+            <a:off x="594360" y="1325880"/>
+            <a:ext cx="3566160" cy="4526280"/>
+          </a:xfrm>
+          <a:prstGeom prst="roundRect">
+            <a:avLst/>
+          </a:prstGeom>
+          <a:solidFill>
+            <a:srgbClr val="F2F2F2"/>
+          </a:solidFill>
+          <a:ln w="12700">
+            <a:solidFill>
+              <a:srgbClr val="0B5394"/>
+            </a:solidFill>
+          </a:ln>
+        </p:spPr>
+        <p:style>
+          <a:lnRef idx="1">
+            <a:schemeClr val="accent1"/>
+          </a:lnRef>
+          <a:fillRef idx="3">
+            <a:schemeClr val="accent1"/>
+          </a:fillRef>
+          <a:effectRef idx="2">
+            <a:schemeClr val="accent1"/>
+          </a:effectRef>
+          <a:fontRef idx="minor">
+            <a:schemeClr val="lt1"/>
+          </a:fontRef>
+        </p:style>
+        <p:txBody>
+          <a:bodyPr rtlCol="0" anchor="ctr"/>
+          <a:lstStyle/>
+          <a:p>
+            <a:pPr algn="ctr"/>
+          </a:p>
+        </p:txBody>
+      </p:sp>
+      <p:sp>
+        <p:nvSpPr>
+          <p:cNvPr id="5" name="TextBox 4"/>
+          <p:cNvSpPr txBox="1"/>
+          <p:nvPr/>
+        </p:nvSpPr>
+        <p:spPr>
+          <a:xfrm>
+            <a:off x="777240" y="1463039"/>
+            <a:ext cx="3200400" cy="292608"/>
+          </a:xfrm>
+          <a:prstGeom prst="rect">
+            <a:avLst/>
+          </a:prstGeom>
+          <a:noFill/>
+        </p:spPr>
+        <p:txBody>
+          <a:bodyPr wrap="square" anchor="t">
+            <a:spAutoFit/>
+          </a:bodyPr>
+          <a:lstStyle/>
+          <a:p>
+            <a:pPr algn="l">
+              <a:spcAft>
+                <a:spcPts val="400"/>
+              </a:spcAft>
+            </a:pPr>
+            <a:r>
+              <a:rPr sz="1000" b="1">
+                <a:solidFill>
+                  <a:srgbClr val="0B5394"/>
+                </a:solidFill>
+                <a:latin typeface="Aptos"/>
+              </a:rPr>
+              <a:t>CONCEPTO</a:t>
+            </a:r>
+          </a:p>
+        </p:txBody>
+      </p:sp>
+      <p:sp>
+        <p:nvSpPr>
+          <p:cNvPr id="6" name="TextBox 5"/>
+          <p:cNvSpPr txBox="1"/>
+          <p:nvPr/>
+        </p:nvSpPr>
+        <p:spPr>
+          <a:xfrm>
+            <a:off x="777240" y="1783080"/>
+            <a:ext cx="3200400" cy="3959352"/>
+          </a:xfrm>
+          <a:prstGeom prst="rect">
+            <a:avLst/>
+          </a:prstGeom>
+          <a:noFill/>
+        </p:spPr>
+        <p:txBody>
+          <a:bodyPr wrap="square" anchor="t">
+            <a:spAutoFit/>
+          </a:bodyPr>
+          <a:lstStyle/>
+          <a:p>
+            <a:pPr algn="l">
+              <a:spcAft>
+                <a:spcPts val="400"/>
+              </a:spcAft>
+            </a:pPr>
+            <a:r>
+              <a:rPr sz="1500" b="0">
+                <a:solidFill>
+                  <a:srgbClr val="202124"/>
+                </a:solidFill>
+                <a:latin typeface="Aptos"/>
+              </a:rPr>
+              <a:t>Representa cuantiles anidados hasta las colas; cada banda añade detalle donde un boxplot solo muestra Q1, mediana y Q3.</a:t>
+            </a:r>
+          </a:p>
+        </p:txBody>
+      </p:sp>
+      <p:sp>
+        <p:nvSpPr>
+          <p:cNvPr id="7" name="Rounded Rectangle 6"/>
+          <p:cNvSpPr/>
+          <p:nvPr/>
+        </p:nvSpPr>
+        <p:spPr>
+          <a:xfrm>
+            <a:off x="4315968" y="1325880"/>
+            <a:ext cx="3566160" cy="4526280"/>
+          </a:xfrm>
+          <a:prstGeom prst="roundRect">
+            <a:avLst/>
+          </a:prstGeom>
+          <a:solidFill>
+            <a:srgbClr val="F2F2F2"/>
+          </a:solidFill>
+          <a:ln w="12700">
+            <a:solidFill>
+              <a:srgbClr val="B03A2B"/>
+            </a:solidFill>
+          </a:ln>
+        </p:spPr>
+        <p:style>
+          <a:lnRef idx="1">
+            <a:schemeClr val="accent1"/>
+          </a:lnRef>
+          <a:fillRef idx="3">
+            <a:schemeClr val="accent1"/>
+          </a:fillRef>
+          <a:effectRef idx="2">
+            <a:schemeClr val="accent1"/>
+          </a:effectRef>
+          <a:fontRef idx="minor">
+            <a:schemeClr val="lt1"/>
+          </a:fontRef>
+        </p:style>
+        <p:txBody>
+          <a:bodyPr rtlCol="0" anchor="ctr"/>
+          <a:lstStyle/>
+          <a:p>
+            <a:pPr algn="ctr"/>
+          </a:p>
+        </p:txBody>
+      </p:sp>
+      <p:sp>
+        <p:nvSpPr>
+          <p:cNvPr id="8" name="TextBox 7"/>
+          <p:cNvSpPr txBox="1"/>
+          <p:nvPr/>
+        </p:nvSpPr>
+        <p:spPr>
+          <a:xfrm>
+            <a:off x="4498848" y="1463039"/>
+            <a:ext cx="3200400" cy="292608"/>
+          </a:xfrm>
+          <a:prstGeom prst="rect">
+            <a:avLst/>
+          </a:prstGeom>
+          <a:noFill/>
+        </p:spPr>
+        <p:txBody>
+          <a:bodyPr wrap="square" anchor="t">
+            <a:spAutoFit/>
+          </a:bodyPr>
+          <a:lstStyle/>
+          <a:p>
+            <a:pPr algn="l">
+              <a:spcAft>
+                <a:spcPts val="400"/>
+              </a:spcAft>
+            </a:pPr>
+            <a:r>
+              <a:rPr sz="1000" b="1">
                 <a:solidFill>
                   <a:srgbClr val="B03A2B"/>
                 </a:solidFill>
-                <a:latin typeface="Calibri"/>
-              </a:rPr>
-              <a:t>HALLAZGO 4 / BOXENPLOT</a:t>
-            </a:r>
-          </a:p>
-        </p:txBody>
-      </p:sp>
-      <p:sp>
-        <p:nvSpPr>
-          <p:cNvPr id="3" name="TextBox 2"/>
-          <p:cNvSpPr txBox="1"/>
-          <p:nvPr/>
-        </p:nvSpPr>
-        <p:spPr>
-          <a:xfrm>
-            <a:off x="548640" y="566928"/>
-            <a:ext cx="11064240" cy="731520"/>
-          </a:xfrm>
-          <a:prstGeom prst="rect">
-            <a:avLst/>
-          </a:prstGeom>
-          <a:noFill/>
-        </p:spPr>
-        <p:txBody>
-          <a:bodyPr wrap="none">
-            <a:spAutoFit/>
-          </a:bodyPr>
-          <a:lstStyle/>
-          <a:p>
-            <a:pPr algn="l">
-              <a:spcAft>
-                <a:spcPts val="600"/>
-              </a:spcAft>
-            </a:pPr>
-            <a:r>
-              <a:rPr sz="2800" b="1">
-                <a:solidFill>
-                  <a:srgbClr val="1F3A5F"/>
-                </a:solidFill>
-                <a:latin typeface="Calibri"/>
-              </a:rPr>
-              <a:t>Figura 4 - Top 5 cultivos (rendimiento relativo)</a:t>
-            </a:r>
-          </a:p>
-        </p:txBody>
-      </p:sp>
-      <p:sp>
-        <p:nvSpPr>
-          <p:cNvPr id="4" name="TextBox 3"/>
-          <p:cNvSpPr txBox="1"/>
-          <p:nvPr/>
-        </p:nvSpPr>
-        <p:spPr>
-          <a:xfrm>
-            <a:off x="548640" y="1225296"/>
-            <a:ext cx="11064240" cy="91440"/>
-          </a:xfrm>
-          <a:prstGeom prst="rect">
-            <a:avLst/>
-          </a:prstGeom>
-          <a:noFill/>
-        </p:spPr>
-        <p:txBody>
-          <a:bodyPr wrap="none">
-            <a:spAutoFit/>
-          </a:bodyPr>
-          <a:lstStyle/>
-          <a:p>
-            <a:pPr algn="l">
-              <a:spcAft>
-                <a:spcPts val="600"/>
-              </a:spcAft>
-            </a:pPr>
-            <a:r>
-              <a:rPr sz="200" b="0">
-                <a:solidFill>
-                  <a:srgbClr val="B03A2B"/>
-                </a:solidFill>
-                <a:latin typeface="Calibri"/>
-              </a:rPr>
-              <a:t> </a:t>
-            </a:r>
-          </a:p>
-        </p:txBody>
-      </p:sp>
-      <p:pic>
-        <p:nvPicPr>
-          <p:cNvPr id="5" name="Picture 4" descr="fig4_boxenplot_top5.png"/>
-          <p:cNvPicPr>
-            <a:picLocks noChangeAspect="1"/>
-          </p:cNvPicPr>
-          <p:nvPr/>
-        </p:nvPicPr>
-        <p:blipFill>
-          <a:blip r:embed="rId2"/>
-          <a:stretch>
-            <a:fillRect/>
-          </a:stretch>
-        </p:blipFill>
-        <p:spPr>
-          <a:xfrm>
-            <a:off x="548640" y="1417320"/>
-            <a:ext cx="11064240" cy="5532120"/>
-          </a:xfrm>
-          <a:prstGeom prst="rect">
-            <a:avLst/>
-          </a:prstGeom>
-        </p:spPr>
-      </p:pic>
-      <p:sp>
-        <p:nvSpPr>
-          <p:cNvPr id="6" name="TextBox 5"/>
-          <p:cNvSpPr txBox="1"/>
-          <p:nvPr/>
-        </p:nvSpPr>
-        <p:spPr>
-          <a:xfrm>
-            <a:off x="548640" y="5806440"/>
-            <a:ext cx="11064240" cy="640080"/>
-          </a:xfrm>
-          <a:prstGeom prst="rect">
-            <a:avLst/>
-          </a:prstGeom>
-          <a:noFill/>
-        </p:spPr>
-        <p:txBody>
-          <a:bodyPr wrap="none">
-            <a:spAutoFit/>
-          </a:bodyPr>
-          <a:lstStyle/>
-          <a:p>
-            <a:pPr algn="l">
-              <a:spcAft>
-                <a:spcPts val="600"/>
-              </a:spcAft>
-            </a:pPr>
-            <a:r>
-              <a:rPr sz="1500" b="1">
-                <a:solidFill>
-                  <a:srgbClr val="333333"/>
-                </a:solidFill>
-                <a:latin typeface="Calibri"/>
-              </a:rPr>
-              <a:t>Con la mediana nacional en 1, la diferencia esta en las colas: tomate y maiz las tienen pesadas (p99 4,4-4,8) y la yuca liviana (p99 2,5).</a:t>
-            </a:r>
-          </a:p>
-        </p:txBody>
-      </p:sp>
-      <p:sp>
-        <p:nvSpPr>
-          <p:cNvPr id="7" name="TextBox 6"/>
-          <p:cNvSpPr txBox="1"/>
-          <p:nvPr/>
-        </p:nvSpPr>
-        <p:spPr>
-          <a:xfrm>
-            <a:off x="548640" y="6419088"/>
-            <a:ext cx="11064240" cy="365760"/>
-          </a:xfrm>
-          <a:prstGeom prst="rect">
-            <a:avLst/>
-          </a:prstGeom>
-          <a:noFill/>
-        </p:spPr>
-        <p:txBody>
-          <a:bodyPr wrap="none">
-            <a:spAutoFit/>
-          </a:bodyPr>
-          <a:lstStyle/>
-          <a:p>
-            <a:pPr algn="l">
-              <a:spcAft>
-                <a:spcPts val="600"/>
-              </a:spcAft>
-            </a:pPr>
-            <a:r>
-              <a:rPr sz="1000" b="0">
-                <a:solidFill>
-                  <a:srgbClr val="666666"/>
-                </a:solidFill>
-                <a:latin typeface="Calibri"/>
-              </a:rPr>
-              <a:t>Fuente: EVA 2019-2025 (UPRA) - datos.gov.co/d/uejq-wxrr</a:t>
+                <a:latin typeface="Aptos"/>
+              </a:rPr>
+              <a:t>QUÉ NO MUESTRA LA CAJA</a:t>
+            </a:r>
+          </a:p>
+        </p:txBody>
+      </p:sp>
+      <p:sp>
+        <p:nvSpPr>
+          <p:cNvPr id="9" name="TextBox 8"/>
+          <p:cNvSpPr txBox="1"/>
+          <p:nvPr/>
+        </p:nvSpPr>
+        <p:spPr>
+          <a:xfrm>
+            <a:off x="4498848" y="1783080"/>
+            <a:ext cx="3200400" cy="3959352"/>
+          </a:xfrm>
+          <a:prstGeom prst="rect">
+            <a:avLst/>
+          </a:prstGeom>
+          <a:noFill/>
+        </p:spPr>
+        <p:txBody>
+          <a:bodyPr wrap="square" anchor="t">
+            <a:spAutoFit/>
+          </a:bodyPr>
+          <a:lstStyle/>
+          <a:p>
+            <a:pPr algn="l">
+              <a:spcAft>
+                <a:spcPts val="400"/>
+              </a:spcAft>
+            </a:pPr>
+            <a:r>
+              <a:rPr sz="1500" b="0">
+                <a:solidFill>
+                  <a:srgbClr val="202124"/>
+                </a:solidFill>
+                <a:latin typeface="Aptos"/>
+              </a:rPr>
+              <a:t>La caja tradicional pierde estructura de las colas, especialmente cuando N es grande y los cuantiles extremos se estiman con estabilidad.</a:t>
+            </a:r>
+          </a:p>
+        </p:txBody>
+      </p:sp>
+      <p:sp>
+        <p:nvSpPr>
+          <p:cNvPr id="10" name="Rounded Rectangle 9"/>
+          <p:cNvSpPr/>
+          <p:nvPr/>
+        </p:nvSpPr>
+        <p:spPr>
+          <a:xfrm>
+            <a:off x="8037575" y="1325880"/>
+            <a:ext cx="3566160" cy="4526280"/>
+          </a:xfrm>
+          <a:prstGeom prst="roundRect">
+            <a:avLst/>
+          </a:prstGeom>
+          <a:solidFill>
+            <a:srgbClr val="F2F2F2"/>
+          </a:solidFill>
+          <a:ln w="12700">
+            <a:solidFill>
+              <a:srgbClr val="0B5394"/>
+            </a:solidFill>
+          </a:ln>
+        </p:spPr>
+        <p:style>
+          <a:lnRef idx="1">
+            <a:schemeClr val="accent1"/>
+          </a:lnRef>
+          <a:fillRef idx="3">
+            <a:schemeClr val="accent1"/>
+          </a:fillRef>
+          <a:effectRef idx="2">
+            <a:schemeClr val="accent1"/>
+          </a:effectRef>
+          <a:fontRef idx="minor">
+            <a:schemeClr val="lt1"/>
+          </a:fontRef>
+        </p:style>
+        <p:txBody>
+          <a:bodyPr rtlCol="0" anchor="ctr"/>
+          <a:lstStyle/>
+          <a:p>
+            <a:pPr algn="ctr"/>
+          </a:p>
+        </p:txBody>
+      </p:sp>
+      <p:sp>
+        <p:nvSpPr>
+          <p:cNvPr id="11" name="TextBox 10"/>
+          <p:cNvSpPr txBox="1"/>
+          <p:nvPr/>
+        </p:nvSpPr>
+        <p:spPr>
+          <a:xfrm>
+            <a:off x="8220455" y="1463039"/>
+            <a:ext cx="3200400" cy="292608"/>
+          </a:xfrm>
+          <a:prstGeom prst="rect">
+            <a:avLst/>
+          </a:prstGeom>
+          <a:noFill/>
+        </p:spPr>
+        <p:txBody>
+          <a:bodyPr wrap="square" anchor="t">
+            <a:spAutoFit/>
+          </a:bodyPr>
+          <a:lstStyle/>
+          <a:p>
+            <a:pPr algn="l">
+              <a:spcAft>
+                <a:spcPts val="400"/>
+              </a:spcAft>
+            </a:pPr>
+            <a:r>
+              <a:rPr sz="1000" b="1">
+                <a:solidFill>
+                  <a:srgbClr val="0B5394"/>
+                </a:solidFill>
+                <a:latin typeface="Aptos"/>
+              </a:rPr>
+              <a:t>ÚSELO CUANDO</a:t>
+            </a:r>
+          </a:p>
+        </p:txBody>
+      </p:sp>
+      <p:sp>
+        <p:nvSpPr>
+          <p:cNvPr id="12" name="TextBox 11"/>
+          <p:cNvSpPr txBox="1"/>
+          <p:nvPr/>
+        </p:nvSpPr>
+        <p:spPr>
+          <a:xfrm>
+            <a:off x="8220455" y="1783080"/>
+            <a:ext cx="3200400" cy="3959352"/>
+          </a:xfrm>
+          <a:prstGeom prst="rect">
+            <a:avLst/>
+          </a:prstGeom>
+          <a:noFill/>
+        </p:spPr>
+        <p:txBody>
+          <a:bodyPr wrap="square" anchor="t">
+            <a:spAutoFit/>
+          </a:bodyPr>
+          <a:lstStyle/>
+          <a:p>
+            <a:pPr algn="l">
+              <a:spcAft>
+                <a:spcPts val="400"/>
+              </a:spcAft>
+            </a:pPr>
+            <a:r>
+              <a:rPr sz="1500" b="0">
+                <a:solidFill>
+                  <a:srgbClr val="202124"/>
+                </a:solidFill>
+                <a:latin typeface="Aptos"/>
+              </a:rPr>
+              <a:t>Miles de observaciones por grupo y preguntas sobre extremos o dispersión de cola. Para comparar unidades distintas, normalice primero.</a:t>
+            </a:r>
+          </a:p>
+        </p:txBody>
+      </p:sp>
+      <p:sp>
+        <p:nvSpPr>
+          <p:cNvPr id="13" name="TextBox 12"/>
+          <p:cNvSpPr txBox="1"/>
+          <p:nvPr/>
+        </p:nvSpPr>
+        <p:spPr>
+          <a:xfrm>
+            <a:off x="640080" y="5989320"/>
+            <a:ext cx="10972800" cy="274320"/>
+          </a:xfrm>
+          <a:prstGeom prst="rect">
+            <a:avLst/>
+          </a:prstGeom>
+          <a:noFill/>
+        </p:spPr>
+        <p:txBody>
+          <a:bodyPr wrap="square" anchor="t">
+            <a:spAutoFit/>
+          </a:bodyPr>
+          <a:lstStyle/>
+          <a:p>
+            <a:pPr algn="ctr">
+              <a:spcAft>
+                <a:spcPts val="400"/>
+              </a:spcAft>
+            </a:pPr>
+            <a:r>
+              <a:rPr sz="1200" b="0">
+                <a:solidFill>
+                  <a:srgbClr val="5A5A5A"/>
+                </a:solidFill>
+                <a:latin typeface="Aptos"/>
+              </a:rPr>
+              <a:t>Corte: maíz, yuca, frijol, tomate y plátano; N total = 51.959. Rendimiento normalizado por mediana nacional.</a:t>
+            </a:r>
+          </a:p>
+        </p:txBody>
+      </p:sp>
+      <p:sp>
+        <p:nvSpPr>
+          <p:cNvPr id="14" name="TextBox 13"/>
+          <p:cNvSpPr txBox="1"/>
+          <p:nvPr/>
+        </p:nvSpPr>
+        <p:spPr>
+          <a:xfrm>
+            <a:off x="594360" y="6492240"/>
+            <a:ext cx="7315200" cy="201168"/>
+          </a:xfrm>
+          <a:prstGeom prst="rect">
+            <a:avLst/>
+          </a:prstGeom>
+          <a:noFill/>
+        </p:spPr>
+        <p:txBody>
+          <a:bodyPr wrap="square" anchor="t">
+            <a:spAutoFit/>
+          </a:bodyPr>
+          <a:lstStyle/>
+          <a:p>
+            <a:pPr algn="l">
+              <a:spcAft>
+                <a:spcPts val="400"/>
+              </a:spcAft>
+            </a:pPr>
+            <a:r>
+              <a:rPr sz="900" b="0">
+                <a:solidFill>
+                  <a:srgbClr val="5A5A5A"/>
+                </a:solidFill>
+                <a:latin typeface="Aptos"/>
+              </a:rPr>
+              <a:t>Fuente: EVA 2019–2025 (UPRA) · datos.gov.co</a:t>
+            </a:r>
+          </a:p>
+        </p:txBody>
+      </p:sp>
+      <p:sp>
+        <p:nvSpPr>
+          <p:cNvPr id="15" name="TextBox 14"/>
+          <p:cNvSpPr txBox="1"/>
+          <p:nvPr/>
+        </p:nvSpPr>
+        <p:spPr>
+          <a:xfrm>
+            <a:off x="7955279" y="6492240"/>
+            <a:ext cx="3383280" cy="201168"/>
+          </a:xfrm>
+          <a:prstGeom prst="rect">
+            <a:avLst/>
+          </a:prstGeom>
+          <a:noFill/>
+        </p:spPr>
+        <p:txBody>
+          <a:bodyPr wrap="square" anchor="t">
+            <a:spAutoFit/>
+          </a:bodyPr>
+          <a:lstStyle/>
+          <a:p>
+            <a:pPr algn="r">
+              <a:spcAft>
+                <a:spcPts val="400"/>
+              </a:spcAft>
+            </a:pPr>
+            <a:r>
+              <a:rPr sz="900" b="0">
+                <a:solidFill>
+                  <a:srgbClr val="0B5394"/>
+                </a:solidFill>
+                <a:latin typeface="Aptos"/>
+                <a:hlinkClick r:id="rId2"/>
+              </a:rPr>
+              <a:t>https://www.datos.gov.co/d/uejq-wxrr</a:t>
+            </a:r>
+          </a:p>
+        </p:txBody>
+      </p:sp>
+      <p:sp>
+        <p:nvSpPr>
+          <p:cNvPr id="16" name="TextBox 15"/>
+          <p:cNvSpPr txBox="1"/>
+          <p:nvPr/>
+        </p:nvSpPr>
+        <p:spPr>
+          <a:xfrm>
+            <a:off x="11384280" y="6492240"/>
+            <a:ext cx="228600" cy="201168"/>
+          </a:xfrm>
+          <a:prstGeom prst="rect">
+            <a:avLst/>
+          </a:prstGeom>
+          <a:noFill/>
+        </p:spPr>
+        <p:txBody>
+          <a:bodyPr wrap="square" anchor="t">
+            <a:spAutoFit/>
+          </a:bodyPr>
+          <a:lstStyle/>
+          <a:p>
+            <a:pPr algn="r">
+              <a:spcAft>
+                <a:spcPts val="400"/>
+              </a:spcAft>
+            </a:pPr>
+            <a:r>
+              <a:rPr sz="900" b="0">
+                <a:solidFill>
+                  <a:srgbClr val="5A5A5A"/>
+                </a:solidFill>
+                <a:latin typeface="Aptos"/>
+              </a:rPr>
+              <a:t>9</a:t>
             </a:r>
           </a:p>
         </p:txBody>

--- a/presentation/presentacion_boxplots_modernos.pptx
+++ b/presentation/presentacion_boxplots_modernos.pptx
@@ -18,6 +18,7 @@
     <p:sldId id="266" r:id="rId17"/>
     <p:sldId id="267" r:id="rId18"/>
     <p:sldId id="268" r:id="rId19"/>
+    <p:sldId id="269" r:id="rId20"/>
   </p:sldIdLst>
   <p:sldSz cx="12191695" cy="6858000" type="screen4x3"/>
   <p:notesSz cx="6858000" cy="9144000"/>
@@ -3442,7 +3443,7 @@
                 </a:solidFill>
                 <a:latin typeface="Aptos"/>
               </a:rPr>
-              <a:t>Boxenplot · top 5 de cultivos</a:t>
+              <a:t>Boxenplot · cinco cultivos con más registros</a:t>
             </a:r>
           </a:p>
         </p:txBody>
@@ -4482,7 +4483,7 @@
                 </a:solidFill>
                 <a:latin typeface="Aptos"/>
               </a:rPr>
-              <a:t>En los seis departamentos la media queda por debajo de la mediana, señal de cola baja. Antioquia lidera por mediana (1,21 t/ha) y Boyacá queda al final (0,95); el IQR máximo es 0,44 t/ha.</a:t>
+              <a:t>En los seis departamentos la media es levemente menor que la mediana. Antioquia lidera por mediana (1,21 t/ha) y Boyacá queda al final (0,95); el IQR máximo es 0,44 t/ha.</a:t>
             </a:r>
           </a:p>
         </p:txBody>
@@ -5527,7 +5528,7 @@
 </p:sld>
 </file>
 
-<file path=ppt/slides/slide2.xml><?xml version="1.0" encoding="utf-8"?>
+<file path=ppt/slides/slide14.xml><?xml version="1.0" encoding="utf-8"?>
 <p:sld xmlns:a="http://schemas.openxmlformats.org/drawingml/2006/main" xmlns:p="http://schemas.openxmlformats.org/presentationml/2006/main" xmlns:r="http://schemas.openxmlformats.org/officeDocument/2006/relationships">
   <p:cSld>
     <p:spTree>
@@ -5571,7 +5572,7 @@
                 </a:solidFill>
                 <a:latin typeface="Aptos"/>
               </a:rPr>
-              <a:t>Datos, método y entregables</a:t>
+              <a:t>Reproducibilidad y fuentes</a:t>
             </a:r>
           </a:p>
         </p:txBody>
@@ -5610,7 +5611,7 @@
                 </a:solidFill>
                 <a:latin typeface="Aptos"/>
               </a:rPr>
-              <a:t>Una misma fuente abierta; cinco preguntas y cinco visualizaciones interactivas</a:t>
+              <a:t>El código y los artefactos de la entrega permiten repetir e inspeccionar el análisis</a:t>
             </a:r>
           </a:p>
         </p:txBody>
@@ -5624,7 +5625,7 @@
         <p:spPr>
           <a:xfrm>
             <a:off x="594360" y="1325880"/>
-            <a:ext cx="3520440" cy="4434840"/>
+            <a:ext cx="3520440" cy="4297680"/>
           </a:xfrm>
           <a:prstGeom prst="roundRect">
             <a:avLst/>
@@ -5694,7 +5695,7 @@
                 </a:solidFill>
                 <a:latin typeface="Aptos"/>
               </a:rPr>
-              <a:t>DATASET REAL</a:t>
+              <a:t>CÓDIGO FUNCIONAL</a:t>
             </a:r>
           </a:p>
         </p:txBody>
@@ -5708,7 +5709,7 @@
         <p:spPr>
           <a:xfrm>
             <a:off x="777240" y="1783080"/>
-            <a:ext cx="3154680" cy="3867911"/>
+            <a:ext cx="3154680" cy="3730752"/>
           </a:xfrm>
           <a:prstGeom prst="rect">
             <a:avLst/>
@@ -5733,7 +5734,7 @@
                 </a:solidFill>
                 <a:latin typeface="Aptos"/>
               </a:rPr>
-              <a:t>Evaluaciones Agropecuarias Municipales – EVA. 2019–2025, Base Agrícola (UPRA).</a:t>
+              <a:t>El cuaderno construye las figuras manualmente con np.quantile y go.Scatter.</a:t>
             </a:r>
           </a:p>
           <a:p>
@@ -5756,15 +5757,8 @@
                 </a:solidFill>
                 <a:latin typeface="Aptos"/>
               </a:rPr>
-              <a:t>166.732 registros; 32 departamentos; 1.103 municipios; 165 cultivos.</a:t>
-            </a:r>
-          </a:p>
-          <a:p>
-            <a:pPr algn="l">
-              <a:spcAft>
-                <a:spcPts val="400"/>
-              </a:spcAft>
-            </a:pPr>
+              <a:t>fig.write_html(ruta_html, include_plotlyjs=True)</a:t>
+            </a:r>
           </a:p>
           <a:p>
             <a:pPr algn="l">
@@ -5779,7 +5773,30 @@
                 </a:solidFill>
                 <a:latin typeface="Aptos"/>
               </a:rPr>
-              <a:t>Cada punto representa municipio × cultivo × período.</a:t>
+              <a:t>fig.write_image(ruta_png, scale=2)</a:t>
+            </a:r>
+          </a:p>
+          <a:p>
+            <a:pPr algn="l">
+              <a:spcAft>
+                <a:spcPts val="400"/>
+              </a:spcAft>
+            </a:pPr>
+          </a:p>
+          <a:p>
+            <a:pPr algn="l">
+              <a:spcAft>
+                <a:spcPts val="400"/>
+              </a:spcAft>
+            </a:pPr>
+            <a:r>
+              <a:rPr sz="1500" b="0">
+                <a:solidFill>
+                  <a:srgbClr val="202124"/>
+                </a:solidFill>
+                <a:latin typeface="Aptos"/>
+              </a:rPr>
+              <a:t>Los HTML son autónomos: se abren en el navegador y conservan el hover.</a:t>
             </a:r>
           </a:p>
         </p:txBody>
@@ -5793,7 +5810,7 @@
         <p:spPr>
           <a:xfrm>
             <a:off x="4334256" y="1325880"/>
-            <a:ext cx="3520440" cy="4434840"/>
+            <a:ext cx="3520440" cy="4297680"/>
           </a:xfrm>
           <a:prstGeom prst="roundRect">
             <a:avLst/>
@@ -5863,7 +5880,7 @@
                 </a:solidFill>
                 <a:latin typeface="Aptos"/>
               </a:rPr>
-              <a:t>REPRODUCIBILIDAD</a:t>
+              <a:t>ENTREGA VERIFICABLE</a:t>
             </a:r>
           </a:p>
         </p:txBody>
@@ -5877,7 +5894,7 @@
         <p:spPr>
           <a:xfrm>
             <a:off x="4517136" y="1783080"/>
-            <a:ext cx="3154680" cy="3867911"/>
+            <a:ext cx="3154680" cy="3730752"/>
           </a:xfrm>
           <a:prstGeom prst="rect">
             <a:avLst/>
@@ -5902,7 +5919,7 @@
                 </a:solidFill>
                 <a:latin typeface="Aptos"/>
               </a:rPr>
-              <a:t>Cuaderno Python: proyecto_boxplots/boxplots_modernos_EVA.ipynb.</a:t>
+              <a:t>Cuaderno: proyecto_boxplots/boxplots_modernos_EVA.ipynb.</a:t>
             </a:r>
           </a:p>
           <a:p>
@@ -5925,7 +5942,7 @@
                 </a:solidFill>
                 <a:latin typeface="Aptos"/>
               </a:rPr>
-              <a:t>Genera cinco HTML Plotly autónomos, cinco PNG y las interpretaciones.</a:t>
+              <a:t>Cinco HTML: proyecto_boxplots/figuras_interactivas/.</a:t>
             </a:r>
           </a:p>
           <a:p>
@@ -5948,7 +5965,30 @@
                 </a:solidFill>
                 <a:latin typeface="Aptos"/>
               </a:rPr>
-              <a:t>No se usaron datos simulados.</a:t>
+              <a:t>Cinco PNG y un JSON con las interpretaciones.</a:t>
+            </a:r>
+          </a:p>
+          <a:p>
+            <a:pPr algn="l">
+              <a:spcAft>
+                <a:spcPts val="400"/>
+              </a:spcAft>
+            </a:pPr>
+          </a:p>
+          <a:p>
+            <a:pPr algn="l">
+              <a:spcAft>
+                <a:spcPts val="400"/>
+              </a:spcAft>
+            </a:pPr>
+            <a:r>
+              <a:rPr sz="1500" b="0">
+                <a:solidFill>
+                  <a:srgbClr val="202124"/>
+                </a:solidFill>
+                <a:latin typeface="Aptos"/>
+              </a:rPr>
+              <a:t>El CSV original no fue modificado.</a:t>
             </a:r>
           </a:p>
         </p:txBody>
@@ -5962,7 +6002,7 @@
         <p:spPr>
           <a:xfrm>
             <a:off x="8074152" y="1325880"/>
-            <a:ext cx="3520440" cy="4434840"/>
+            <a:ext cx="3520440" cy="4297680"/>
           </a:xfrm>
           <a:prstGeom prst="roundRect">
             <a:avLst/>
@@ -6032,6 +6072,847 @@
                 </a:solidFill>
                 <a:latin typeface="Aptos"/>
               </a:rPr>
+              <a:t>REFERENCIAS</a:t>
+            </a:r>
+          </a:p>
+        </p:txBody>
+      </p:sp>
+      <p:sp>
+        <p:nvSpPr>
+          <p:cNvPr id="12" name="TextBox 11"/>
+          <p:cNvSpPr txBox="1"/>
+          <p:nvPr/>
+        </p:nvSpPr>
+        <p:spPr>
+          <a:xfrm>
+            <a:off x="8257031" y="1783080"/>
+            <a:ext cx="3154680" cy="3730752"/>
+          </a:xfrm>
+          <a:prstGeom prst="rect">
+            <a:avLst/>
+          </a:prstGeom>
+          <a:noFill/>
+        </p:spPr>
+        <p:txBody>
+          <a:bodyPr wrap="square" anchor="t">
+            <a:spAutoFit/>
+          </a:bodyPr>
+          <a:lstStyle/>
+          <a:p>
+            <a:pPr algn="l">
+              <a:spcAft>
+                <a:spcPts val="400"/>
+              </a:spcAft>
+            </a:pPr>
+            <a:r>
+              <a:rPr sz="1500" b="0">
+                <a:solidFill>
+                  <a:srgbClr val="202124"/>
+                </a:solidFill>
+                <a:latin typeface="Aptos"/>
+              </a:rPr>
+              <a:t>Fuente primaria: EVA 2019–2025, UPRA.</a:t>
+            </a:r>
+          </a:p>
+          <a:p>
+            <a:pPr algn="l">
+              <a:spcAft>
+                <a:spcPts val="400"/>
+              </a:spcAft>
+            </a:pPr>
+          </a:p>
+          <a:p>
+            <a:pPr algn="l">
+              <a:spcAft>
+                <a:spcPts val="400"/>
+              </a:spcAft>
+            </a:pPr>
+            <a:r>
+              <a:rPr sz="1500" b="0">
+                <a:solidFill>
+                  <a:srgbClr val="202124"/>
+                </a:solidFill>
+                <a:latin typeface="Aptos"/>
+              </a:rPr>
+              <a:t>Guía de diseño: Clase 8, Análisis de datos.</a:t>
+            </a:r>
+          </a:p>
+          <a:p>
+            <a:pPr algn="l">
+              <a:spcAft>
+                <a:spcPts val="400"/>
+              </a:spcAft>
+            </a:pPr>
+          </a:p>
+          <a:p>
+            <a:pPr algn="l">
+              <a:spcAft>
+                <a:spcPts val="400"/>
+              </a:spcAft>
+            </a:pPr>
+            <a:r>
+              <a:rPr sz="1500" b="0">
+                <a:solidFill>
+                  <a:srgbClr val="202124"/>
+                </a:solidFill>
+                <a:latin typeface="Aptos"/>
+              </a:rPr>
+              <a:t>Implementación: documentación de Plotly para Python.</a:t>
+            </a:r>
+          </a:p>
+        </p:txBody>
+      </p:sp>
+      <p:sp>
+        <p:nvSpPr>
+          <p:cNvPr id="13" name="TextBox 12"/>
+          <p:cNvSpPr txBox="1"/>
+          <p:nvPr/>
+        </p:nvSpPr>
+        <p:spPr>
+          <a:xfrm>
+            <a:off x="8275320" y="4617720"/>
+            <a:ext cx="3108960" cy="256032"/>
+          </a:xfrm>
+          <a:prstGeom prst="rect">
+            <a:avLst/>
+          </a:prstGeom>
+          <a:noFill/>
+        </p:spPr>
+        <p:txBody>
+          <a:bodyPr wrap="square" anchor="t">
+            <a:spAutoFit/>
+          </a:bodyPr>
+          <a:lstStyle/>
+          <a:p>
+            <a:pPr algn="l">
+              <a:spcAft>
+                <a:spcPts val="400"/>
+              </a:spcAft>
+            </a:pPr>
+            <a:r>
+              <a:rPr sz="1000" b="0">
+                <a:solidFill>
+                  <a:srgbClr val="0B5394"/>
+                </a:solidFill>
+                <a:latin typeface="Aptos"/>
+                <a:hlinkClick r:id="rId2"/>
+              </a:rPr>
+              <a:t>datos.gov.co/d/uejq-wxrr</a:t>
+            </a:r>
+          </a:p>
+        </p:txBody>
+      </p:sp>
+      <p:sp>
+        <p:nvSpPr>
+          <p:cNvPr id="14" name="TextBox 13"/>
+          <p:cNvSpPr txBox="1"/>
+          <p:nvPr/>
+        </p:nvSpPr>
+        <p:spPr>
+          <a:xfrm>
+            <a:off x="8275320" y="4919472"/>
+            <a:ext cx="3108960" cy="256032"/>
+          </a:xfrm>
+          <a:prstGeom prst="rect">
+            <a:avLst/>
+          </a:prstGeom>
+          <a:noFill/>
+        </p:spPr>
+        <p:txBody>
+          <a:bodyPr wrap="square" anchor="t">
+            <a:spAutoFit/>
+          </a:bodyPr>
+          <a:lstStyle/>
+          <a:p>
+            <a:pPr algn="l">
+              <a:spcAft>
+                <a:spcPts val="400"/>
+              </a:spcAft>
+            </a:pPr>
+            <a:r>
+              <a:rPr sz="1000" b="0">
+                <a:solidFill>
+                  <a:srgbClr val="0B5394"/>
+                </a:solidFill>
+                <a:latin typeface="Aptos"/>
+                <a:hlinkClick r:id="rId3"/>
+              </a:rPr>
+              <a:t>github.com/juliangarzon/.../clase08</a:t>
+            </a:r>
+          </a:p>
+        </p:txBody>
+      </p:sp>
+      <p:sp>
+        <p:nvSpPr>
+          <p:cNvPr id="15" name="TextBox 14"/>
+          <p:cNvSpPr txBox="1"/>
+          <p:nvPr/>
+        </p:nvSpPr>
+        <p:spPr>
+          <a:xfrm>
+            <a:off x="8275320" y="5221224"/>
+            <a:ext cx="3108960" cy="256032"/>
+          </a:xfrm>
+          <a:prstGeom prst="rect">
+            <a:avLst/>
+          </a:prstGeom>
+          <a:noFill/>
+        </p:spPr>
+        <p:txBody>
+          <a:bodyPr wrap="square" anchor="t">
+            <a:spAutoFit/>
+          </a:bodyPr>
+          <a:lstStyle/>
+          <a:p>
+            <a:pPr algn="l">
+              <a:spcAft>
+                <a:spcPts val="400"/>
+              </a:spcAft>
+            </a:pPr>
+            <a:r>
+              <a:rPr sz="1000" b="0">
+                <a:solidFill>
+                  <a:srgbClr val="0B5394"/>
+                </a:solidFill>
+                <a:latin typeface="Aptos"/>
+                <a:hlinkClick r:id="rId4"/>
+              </a:rPr>
+              <a:t>plotly.com/python/</a:t>
+            </a:r>
+          </a:p>
+        </p:txBody>
+      </p:sp>
+      <p:sp>
+        <p:nvSpPr>
+          <p:cNvPr id="16" name="TextBox 15"/>
+          <p:cNvSpPr txBox="1"/>
+          <p:nvPr/>
+        </p:nvSpPr>
+        <p:spPr>
+          <a:xfrm>
+            <a:off x="594360" y="6492240"/>
+            <a:ext cx="7315200" cy="201168"/>
+          </a:xfrm>
+          <a:prstGeom prst="rect">
+            <a:avLst/>
+          </a:prstGeom>
+          <a:noFill/>
+        </p:spPr>
+        <p:txBody>
+          <a:bodyPr wrap="square" anchor="t">
+            <a:spAutoFit/>
+          </a:bodyPr>
+          <a:lstStyle/>
+          <a:p>
+            <a:pPr algn="l">
+              <a:spcAft>
+                <a:spcPts val="400"/>
+              </a:spcAft>
+            </a:pPr>
+            <a:r>
+              <a:rPr sz="900" b="0">
+                <a:solidFill>
+                  <a:srgbClr val="5A5A5A"/>
+                </a:solidFill>
+                <a:latin typeface="Aptos"/>
+              </a:rPr>
+              <a:t>Fuente: EVA 2019–2025 (UPRA) · datos.gov.co</a:t>
+            </a:r>
+          </a:p>
+        </p:txBody>
+      </p:sp>
+      <p:sp>
+        <p:nvSpPr>
+          <p:cNvPr id="17" name="TextBox 16"/>
+          <p:cNvSpPr txBox="1"/>
+          <p:nvPr/>
+        </p:nvSpPr>
+        <p:spPr>
+          <a:xfrm>
+            <a:off x="7955279" y="6492240"/>
+            <a:ext cx="3383280" cy="201168"/>
+          </a:xfrm>
+          <a:prstGeom prst="rect">
+            <a:avLst/>
+          </a:prstGeom>
+          <a:noFill/>
+        </p:spPr>
+        <p:txBody>
+          <a:bodyPr wrap="square" anchor="t">
+            <a:spAutoFit/>
+          </a:bodyPr>
+          <a:lstStyle/>
+          <a:p>
+            <a:pPr algn="r">
+              <a:spcAft>
+                <a:spcPts val="400"/>
+              </a:spcAft>
+            </a:pPr>
+            <a:r>
+              <a:rPr sz="900" b="0">
+                <a:solidFill>
+                  <a:srgbClr val="0B5394"/>
+                </a:solidFill>
+                <a:latin typeface="Aptos"/>
+                <a:hlinkClick r:id="rId2"/>
+              </a:rPr>
+              <a:t>https://www.datos.gov.co/d/uejq-wxrr</a:t>
+            </a:r>
+          </a:p>
+        </p:txBody>
+      </p:sp>
+      <p:sp>
+        <p:nvSpPr>
+          <p:cNvPr id="18" name="TextBox 17"/>
+          <p:cNvSpPr txBox="1"/>
+          <p:nvPr/>
+        </p:nvSpPr>
+        <p:spPr>
+          <a:xfrm>
+            <a:off x="11384280" y="6492240"/>
+            <a:ext cx="228600" cy="201168"/>
+          </a:xfrm>
+          <a:prstGeom prst="rect">
+            <a:avLst/>
+          </a:prstGeom>
+          <a:noFill/>
+        </p:spPr>
+        <p:txBody>
+          <a:bodyPr wrap="square" anchor="t">
+            <a:spAutoFit/>
+          </a:bodyPr>
+          <a:lstStyle/>
+          <a:p>
+            <a:pPr algn="r">
+              <a:spcAft>
+                <a:spcPts val="400"/>
+              </a:spcAft>
+            </a:pPr>
+            <a:r>
+              <a:rPr sz="900" b="0">
+                <a:solidFill>
+                  <a:srgbClr val="5A5A5A"/>
+                </a:solidFill>
+                <a:latin typeface="Aptos"/>
+              </a:rPr>
+              <a:t>14</a:t>
+            </a:r>
+          </a:p>
+        </p:txBody>
+      </p:sp>
+    </p:spTree>
+  </p:cSld>
+  <p:clrMapOvr>
+    <a:masterClrMapping/>
+  </p:clrMapOvr>
+</p:sld>
+</file>
+
+<file path=ppt/slides/slide2.xml><?xml version="1.0" encoding="utf-8"?>
+<p:sld xmlns:a="http://schemas.openxmlformats.org/drawingml/2006/main" xmlns:p="http://schemas.openxmlformats.org/presentationml/2006/main" xmlns:r="http://schemas.openxmlformats.org/officeDocument/2006/relationships">
+  <p:cSld>
+    <p:spTree>
+      <p:nvGrpSpPr>
+        <p:cNvPr id="1" name=""/>
+        <p:cNvGrpSpPr/>
+        <p:nvPr/>
+      </p:nvGrpSpPr>
+      <p:grpSpPr/>
+      <p:sp>
+        <p:nvSpPr>
+          <p:cNvPr id="2" name="TextBox 1"/>
+          <p:cNvSpPr txBox="1"/>
+          <p:nvPr/>
+        </p:nvSpPr>
+        <p:spPr>
+          <a:xfrm>
+            <a:off x="594360" y="292608"/>
+            <a:ext cx="10972800" cy="502920"/>
+          </a:xfrm>
+          <a:prstGeom prst="rect">
+            <a:avLst/>
+          </a:prstGeom>
+          <a:noFill/>
+        </p:spPr>
+        <p:txBody>
+          <a:bodyPr wrap="square" anchor="t">
+            <a:spAutoFit/>
+          </a:bodyPr>
+          <a:lstStyle/>
+          <a:p>
+            <a:pPr algn="l">
+              <a:spcAft>
+                <a:spcPts val="400"/>
+              </a:spcAft>
+            </a:pPr>
+            <a:r>
+              <a:rPr sz="2500" b="1">
+                <a:solidFill>
+                  <a:srgbClr val="0B5394"/>
+                </a:solidFill>
+                <a:latin typeface="Aptos"/>
+              </a:rPr>
+              <a:t>Datos, método y entregables</a:t>
+            </a:r>
+          </a:p>
+        </p:txBody>
+      </p:sp>
+      <p:sp>
+        <p:nvSpPr>
+          <p:cNvPr id="3" name="TextBox 2"/>
+          <p:cNvSpPr txBox="1"/>
+          <p:nvPr/>
+        </p:nvSpPr>
+        <p:spPr>
+          <a:xfrm>
+            <a:off x="621792" y="822960"/>
+            <a:ext cx="10972800" cy="274320"/>
+          </a:xfrm>
+          <a:prstGeom prst="rect">
+            <a:avLst/>
+          </a:prstGeom>
+          <a:noFill/>
+        </p:spPr>
+        <p:txBody>
+          <a:bodyPr wrap="square" anchor="t">
+            <a:spAutoFit/>
+          </a:bodyPr>
+          <a:lstStyle/>
+          <a:p>
+            <a:pPr algn="l">
+              <a:spcAft>
+                <a:spcPts val="400"/>
+              </a:spcAft>
+            </a:pPr>
+            <a:r>
+              <a:rPr sz="1100" b="0">
+                <a:solidFill>
+                  <a:srgbClr val="5A5A5A"/>
+                </a:solidFill>
+                <a:latin typeface="Aptos"/>
+              </a:rPr>
+              <a:t>Una misma fuente abierta; cinco preguntas y cinco visualizaciones interactivas</a:t>
+            </a:r>
+          </a:p>
+        </p:txBody>
+      </p:sp>
+      <p:sp>
+        <p:nvSpPr>
+          <p:cNvPr id="4" name="Rounded Rectangle 3"/>
+          <p:cNvSpPr/>
+          <p:nvPr/>
+        </p:nvSpPr>
+        <p:spPr>
+          <a:xfrm>
+            <a:off x="594360" y="1325880"/>
+            <a:ext cx="3520440" cy="4434840"/>
+          </a:xfrm>
+          <a:prstGeom prst="roundRect">
+            <a:avLst/>
+          </a:prstGeom>
+          <a:solidFill>
+            <a:srgbClr val="F2F2F2"/>
+          </a:solidFill>
+          <a:ln w="12700">
+            <a:solidFill>
+              <a:srgbClr val="0B5394"/>
+            </a:solidFill>
+          </a:ln>
+        </p:spPr>
+        <p:style>
+          <a:lnRef idx="1">
+            <a:schemeClr val="accent1"/>
+          </a:lnRef>
+          <a:fillRef idx="3">
+            <a:schemeClr val="accent1"/>
+          </a:fillRef>
+          <a:effectRef idx="2">
+            <a:schemeClr val="accent1"/>
+          </a:effectRef>
+          <a:fontRef idx="minor">
+            <a:schemeClr val="lt1"/>
+          </a:fontRef>
+        </p:style>
+        <p:txBody>
+          <a:bodyPr rtlCol="0" anchor="ctr"/>
+          <a:lstStyle/>
+          <a:p>
+            <a:pPr algn="ctr"/>
+          </a:p>
+        </p:txBody>
+      </p:sp>
+      <p:sp>
+        <p:nvSpPr>
+          <p:cNvPr id="5" name="TextBox 4"/>
+          <p:cNvSpPr txBox="1"/>
+          <p:nvPr/>
+        </p:nvSpPr>
+        <p:spPr>
+          <a:xfrm>
+            <a:off x="777240" y="1463039"/>
+            <a:ext cx="3154680" cy="292608"/>
+          </a:xfrm>
+          <a:prstGeom prst="rect">
+            <a:avLst/>
+          </a:prstGeom>
+          <a:noFill/>
+        </p:spPr>
+        <p:txBody>
+          <a:bodyPr wrap="square" anchor="t">
+            <a:spAutoFit/>
+          </a:bodyPr>
+          <a:lstStyle/>
+          <a:p>
+            <a:pPr algn="l">
+              <a:spcAft>
+                <a:spcPts val="400"/>
+              </a:spcAft>
+            </a:pPr>
+            <a:r>
+              <a:rPr sz="1000" b="1">
+                <a:solidFill>
+                  <a:srgbClr val="0B5394"/>
+                </a:solidFill>
+                <a:latin typeface="Aptos"/>
+              </a:rPr>
+              <a:t>DATASET REAL</a:t>
+            </a:r>
+          </a:p>
+        </p:txBody>
+      </p:sp>
+      <p:sp>
+        <p:nvSpPr>
+          <p:cNvPr id="6" name="TextBox 5"/>
+          <p:cNvSpPr txBox="1"/>
+          <p:nvPr/>
+        </p:nvSpPr>
+        <p:spPr>
+          <a:xfrm>
+            <a:off x="777240" y="1783080"/>
+            <a:ext cx="3154680" cy="3867911"/>
+          </a:xfrm>
+          <a:prstGeom prst="rect">
+            <a:avLst/>
+          </a:prstGeom>
+          <a:noFill/>
+        </p:spPr>
+        <p:txBody>
+          <a:bodyPr wrap="square" anchor="t">
+            <a:spAutoFit/>
+          </a:bodyPr>
+          <a:lstStyle/>
+          <a:p>
+            <a:pPr algn="l">
+              <a:spcAft>
+                <a:spcPts val="400"/>
+              </a:spcAft>
+            </a:pPr>
+            <a:r>
+              <a:rPr sz="1500" b="0">
+                <a:solidFill>
+                  <a:srgbClr val="202124"/>
+                </a:solidFill>
+                <a:latin typeface="Aptos"/>
+              </a:rPr>
+              <a:t>Evaluaciones Agropecuarias Municipales – EVA. 2019–2025, Base Agrícola (UPRA).</a:t>
+            </a:r>
+          </a:p>
+          <a:p>
+            <a:pPr algn="l">
+              <a:spcAft>
+                <a:spcPts val="400"/>
+              </a:spcAft>
+            </a:pPr>
+          </a:p>
+          <a:p>
+            <a:pPr algn="l">
+              <a:spcAft>
+                <a:spcPts val="400"/>
+              </a:spcAft>
+            </a:pPr>
+            <a:r>
+              <a:rPr sz="1500" b="0">
+                <a:solidFill>
+                  <a:srgbClr val="202124"/>
+                </a:solidFill>
+                <a:latin typeface="Aptos"/>
+              </a:rPr>
+              <a:t>166.732 registros; 32 departamentos; 1.103 municipios; 165 cultivos.</a:t>
+            </a:r>
+          </a:p>
+          <a:p>
+            <a:pPr algn="l">
+              <a:spcAft>
+                <a:spcPts val="400"/>
+              </a:spcAft>
+            </a:pPr>
+          </a:p>
+          <a:p>
+            <a:pPr algn="l">
+              <a:spcAft>
+                <a:spcPts val="400"/>
+              </a:spcAft>
+            </a:pPr>
+            <a:r>
+              <a:rPr sz="1500" b="0">
+                <a:solidFill>
+                  <a:srgbClr val="202124"/>
+                </a:solidFill>
+                <a:latin typeface="Aptos"/>
+              </a:rPr>
+              <a:t>Cada punto representa municipio × cultivo × período.</a:t>
+            </a:r>
+          </a:p>
+        </p:txBody>
+      </p:sp>
+      <p:sp>
+        <p:nvSpPr>
+          <p:cNvPr id="7" name="Rounded Rectangle 6"/>
+          <p:cNvSpPr/>
+          <p:nvPr/>
+        </p:nvSpPr>
+        <p:spPr>
+          <a:xfrm>
+            <a:off x="4334256" y="1325880"/>
+            <a:ext cx="3520440" cy="4434840"/>
+          </a:xfrm>
+          <a:prstGeom prst="roundRect">
+            <a:avLst/>
+          </a:prstGeom>
+          <a:solidFill>
+            <a:srgbClr val="F2F2F2"/>
+          </a:solidFill>
+          <a:ln w="12700">
+            <a:solidFill>
+              <a:srgbClr val="0B5394"/>
+            </a:solidFill>
+          </a:ln>
+        </p:spPr>
+        <p:style>
+          <a:lnRef idx="1">
+            <a:schemeClr val="accent1"/>
+          </a:lnRef>
+          <a:fillRef idx="3">
+            <a:schemeClr val="accent1"/>
+          </a:fillRef>
+          <a:effectRef idx="2">
+            <a:schemeClr val="accent1"/>
+          </a:effectRef>
+          <a:fontRef idx="minor">
+            <a:schemeClr val="lt1"/>
+          </a:fontRef>
+        </p:style>
+        <p:txBody>
+          <a:bodyPr rtlCol="0" anchor="ctr"/>
+          <a:lstStyle/>
+          <a:p>
+            <a:pPr algn="ctr"/>
+          </a:p>
+        </p:txBody>
+      </p:sp>
+      <p:sp>
+        <p:nvSpPr>
+          <p:cNvPr id="8" name="TextBox 7"/>
+          <p:cNvSpPr txBox="1"/>
+          <p:nvPr/>
+        </p:nvSpPr>
+        <p:spPr>
+          <a:xfrm>
+            <a:off x="4517136" y="1463039"/>
+            <a:ext cx="3154680" cy="292608"/>
+          </a:xfrm>
+          <a:prstGeom prst="rect">
+            <a:avLst/>
+          </a:prstGeom>
+          <a:noFill/>
+        </p:spPr>
+        <p:txBody>
+          <a:bodyPr wrap="square" anchor="t">
+            <a:spAutoFit/>
+          </a:bodyPr>
+          <a:lstStyle/>
+          <a:p>
+            <a:pPr algn="l">
+              <a:spcAft>
+                <a:spcPts val="400"/>
+              </a:spcAft>
+            </a:pPr>
+            <a:r>
+              <a:rPr sz="1000" b="1">
+                <a:solidFill>
+                  <a:srgbClr val="0B5394"/>
+                </a:solidFill>
+                <a:latin typeface="Aptos"/>
+              </a:rPr>
+              <a:t>REPRODUCIBILIDAD</a:t>
+            </a:r>
+          </a:p>
+        </p:txBody>
+      </p:sp>
+      <p:sp>
+        <p:nvSpPr>
+          <p:cNvPr id="9" name="TextBox 8"/>
+          <p:cNvSpPr txBox="1"/>
+          <p:nvPr/>
+        </p:nvSpPr>
+        <p:spPr>
+          <a:xfrm>
+            <a:off x="4517136" y="1783080"/>
+            <a:ext cx="3154680" cy="3867911"/>
+          </a:xfrm>
+          <a:prstGeom prst="rect">
+            <a:avLst/>
+          </a:prstGeom>
+          <a:noFill/>
+        </p:spPr>
+        <p:txBody>
+          <a:bodyPr wrap="square" anchor="t">
+            <a:spAutoFit/>
+          </a:bodyPr>
+          <a:lstStyle/>
+          <a:p>
+            <a:pPr algn="l">
+              <a:spcAft>
+                <a:spcPts val="400"/>
+              </a:spcAft>
+            </a:pPr>
+            <a:r>
+              <a:rPr sz="1500" b="0">
+                <a:solidFill>
+                  <a:srgbClr val="202124"/>
+                </a:solidFill>
+                <a:latin typeface="Aptos"/>
+              </a:rPr>
+              <a:t>Cuaderno Python: proyecto_boxplots/boxplots_modernos_EVA.ipynb.</a:t>
+            </a:r>
+          </a:p>
+          <a:p>
+            <a:pPr algn="l">
+              <a:spcAft>
+                <a:spcPts val="400"/>
+              </a:spcAft>
+            </a:pPr>
+          </a:p>
+          <a:p>
+            <a:pPr algn="l">
+              <a:spcAft>
+                <a:spcPts val="400"/>
+              </a:spcAft>
+            </a:pPr>
+            <a:r>
+              <a:rPr sz="1500" b="0">
+                <a:solidFill>
+                  <a:srgbClr val="202124"/>
+                </a:solidFill>
+                <a:latin typeface="Aptos"/>
+              </a:rPr>
+              <a:t>Genera cinco HTML Plotly autónomos, cinco PNG y las interpretaciones.</a:t>
+            </a:r>
+          </a:p>
+          <a:p>
+            <a:pPr algn="l">
+              <a:spcAft>
+                <a:spcPts val="400"/>
+              </a:spcAft>
+            </a:pPr>
+          </a:p>
+          <a:p>
+            <a:pPr algn="l">
+              <a:spcAft>
+                <a:spcPts val="400"/>
+              </a:spcAft>
+            </a:pPr>
+            <a:r>
+              <a:rPr sz="1500" b="0">
+                <a:solidFill>
+                  <a:srgbClr val="202124"/>
+                </a:solidFill>
+                <a:latin typeface="Aptos"/>
+              </a:rPr>
+              <a:t>No se usaron datos simulados.</a:t>
+            </a:r>
+          </a:p>
+        </p:txBody>
+      </p:sp>
+      <p:sp>
+        <p:nvSpPr>
+          <p:cNvPr id="10" name="Rounded Rectangle 9"/>
+          <p:cNvSpPr/>
+          <p:nvPr/>
+        </p:nvSpPr>
+        <p:spPr>
+          <a:xfrm>
+            <a:off x="8074152" y="1325880"/>
+            <a:ext cx="3520440" cy="4434840"/>
+          </a:xfrm>
+          <a:prstGeom prst="roundRect">
+            <a:avLst/>
+          </a:prstGeom>
+          <a:solidFill>
+            <a:srgbClr val="F2F2F2"/>
+          </a:solidFill>
+          <a:ln w="12700">
+            <a:solidFill>
+              <a:srgbClr val="0B5394"/>
+            </a:solidFill>
+          </a:ln>
+        </p:spPr>
+        <p:style>
+          <a:lnRef idx="1">
+            <a:schemeClr val="accent1"/>
+          </a:lnRef>
+          <a:fillRef idx="3">
+            <a:schemeClr val="accent1"/>
+          </a:fillRef>
+          <a:effectRef idx="2">
+            <a:schemeClr val="accent1"/>
+          </a:effectRef>
+          <a:fontRef idx="minor">
+            <a:schemeClr val="lt1"/>
+          </a:fontRef>
+        </p:style>
+        <p:txBody>
+          <a:bodyPr rtlCol="0" anchor="ctr"/>
+          <a:lstStyle/>
+          <a:p>
+            <a:pPr algn="ctr"/>
+          </a:p>
+        </p:txBody>
+      </p:sp>
+      <p:sp>
+        <p:nvSpPr>
+          <p:cNvPr id="11" name="TextBox 10"/>
+          <p:cNvSpPr txBox="1"/>
+          <p:nvPr/>
+        </p:nvSpPr>
+        <p:spPr>
+          <a:xfrm>
+            <a:off x="8257031" y="1463039"/>
+            <a:ext cx="3154680" cy="292608"/>
+          </a:xfrm>
+          <a:prstGeom prst="rect">
+            <a:avLst/>
+          </a:prstGeom>
+          <a:noFill/>
+        </p:spPr>
+        <p:txBody>
+          <a:bodyPr wrap="square" anchor="t">
+            <a:spAutoFit/>
+          </a:bodyPr>
+          <a:lstStyle/>
+          <a:p>
+            <a:pPr algn="l">
+              <a:spcAft>
+                <a:spcPts val="400"/>
+              </a:spcAft>
+            </a:pPr>
+            <a:r>
+              <a:rPr sz="1000" b="1">
+                <a:solidFill>
+                  <a:srgbClr val="0B5394"/>
+                </a:solidFill>
+                <a:latin typeface="Aptos"/>
+              </a:rPr>
               <a:t>CÓMO SE DEMUESTRA</a:t>
             </a:r>
           </a:p>
@@ -6117,7 +6998,7 @@
                 </a:solidFill>
                 <a:latin typeface="Aptos"/>
               </a:rPr>
-              <a:t>Los títulos fueron contrastados contra las tablas del cuaderno.</a:t>
+              <a:t>Los títulos fueron contrastados contra las tablas del cuaderno. Los rendimientos reportados son en buena parte redondeados; la KDE es una aproximación suave.</a:t>
             </a:r>
           </a:p>
         </p:txBody>
@@ -7016,7 +7897,7 @@
                 </a:solidFill>
                 <a:latin typeface="Aptos"/>
               </a:rPr>
-              <a:t>Cundinamarca (20,0 t/ha) y Boyacá superan a Antioquia (14,0) y Nariño en mediana. Los cinco departamentos presentan dispersión amplia; el intervalo central del 95 % mide entre 22,0 y 37,0 t/ha.</a:t>
+              <a:t>Las medianas van de 14,0 t/ha (Antioquia) a 20,0 (Cundinamarca). Los cinco departamentos presentan dispersión amplia: el intervalo central del 95 % mide entre 22,0 y 37,0 t/ha.</a:t>
             </a:r>
           </a:p>
         </p:txBody>
@@ -9553,7 +10434,7 @@
                 </a:solidFill>
                 <a:latin typeface="Aptos"/>
               </a:rPr>
-              <a:t>Corte: maíz, yuca, frijol, tomate y plátano; N total = 51.959. Rendimiento normalizado por mediana nacional.</a:t>
+              <a:t>Corte: cinco cultivos con más registros EVA positivos; N total = 51.959. Rendimiento normalizado por mediana nacional.</a:t>
             </a:r>
           </a:p>
         </p:txBody>
